--- a/sunumlar/6-sinif-unite5-sunum-programlari-DETAYLI.pptx
+++ b/sunumlar/6-sinif-unite5-sunum-programlari-DETAYLI.pptx
@@ -112,6 +112,1334 @@
     </a:lvl9pPr>
   </p:defaultTextStyle>
 </p:presentation>
+</file>
+
+<file path=ppt/notesMasters/notesMaster1.xml><?xml version="1.0" encoding="utf-8"?>
+<p:notesMaster xmlns:a="http://schemas.openxmlformats.org/drawingml/2006/main" xmlns:p="http://schemas.openxmlformats.org/presentationml/2006/main" xmlns:r="http://schemas.openxmlformats.org/officeDocument/2006/relationships">
+  <p:cSld>
+    <p:bg>
+      <p:bgRef idx="1001">
+        <a:schemeClr val="bg1"/>
+      </p:bgRef>
+    </p:bg>
+    <p:spTree>
+      <p:nvGrpSpPr>
+        <p:cNvPr id="1" name=""/>
+        <p:cNvGrpSpPr/>
+        <p:nvPr/>
+      </p:nvGrpSpPr>
+      <p:grpSpPr>
+        <a:xfrm>
+          <a:off x="0" y="0"/>
+          <a:ext cx="0" cy="0"/>
+          <a:chOff x="0" y="0"/>
+          <a:chExt cx="0" cy="0"/>
+        </a:xfrm>
+      </p:grpSpPr>
+      <p:sp>
+        <p:nvSpPr>
+          <p:cNvPr id="2" name="Header Placeholder 1"/>
+          <p:cNvSpPr>
+            <a:spLocks noGrp="1"/>
+          </p:cNvSpPr>
+          <p:nvPr>
+            <p:ph type="hdr" sz="quarter"/>
+          </p:nvPr>
+        </p:nvSpPr>
+        <p:spPr>
+          <a:xfrm>
+            <a:off x="0" y="0"/>
+            <a:ext cx="2971800" cy="457200"/>
+          </a:xfrm>
+          <a:prstGeom prst="rect">
+            <a:avLst/>
+          </a:prstGeom>
+        </p:spPr>
+        <p:txBody>
+          <a:bodyPr vert="horz" lIns="91440" tIns="45720" rIns="91440" bIns="45720" rtlCol="0"/>
+          <a:lstStyle>
+            <a:lvl1pPr algn="l">
+              <a:defRPr sz="1200"/>
+            </a:lvl1pPr>
+          </a:lstStyle>
+          <a:p>
+            <a:endParaRPr lang="en-US"/>
+          </a:p>
+        </p:txBody>
+      </p:sp>
+      <p:sp>
+        <p:nvSpPr>
+          <p:cNvPr id="3" name="Date Placeholder 2"/>
+          <p:cNvSpPr>
+            <a:spLocks noGrp="1"/>
+          </p:cNvSpPr>
+          <p:nvPr>
+            <p:ph type="dt" idx="1"/>
+          </p:nvPr>
+        </p:nvSpPr>
+        <p:spPr>
+          <a:xfrm>
+            <a:off x="3884613" y="0"/>
+            <a:ext cx="2971800" cy="457200"/>
+          </a:xfrm>
+          <a:prstGeom prst="rect">
+            <a:avLst/>
+          </a:prstGeom>
+        </p:spPr>
+        <p:txBody>
+          <a:bodyPr vert="horz" lIns="91440" tIns="45720" rIns="91440" bIns="45720" rtlCol="0"/>
+          <a:lstStyle>
+            <a:lvl1pPr algn="r">
+              <a:defRPr sz="1200"/>
+            </a:lvl1pPr>
+          </a:lstStyle>
+          <a:p>
+            <a:fld id="{0F89C1C7-3DCD-1040-A9CF-14679D8B5DDD}" type="datetimeFigureOut">
+              <a:rPr lang="en-US" smtClean="0"/>
+              <a:t>10/17/16</a:t>
+            </a:fld>
+            <a:endParaRPr lang="en-US"/>
+          </a:p>
+        </p:txBody>
+      </p:sp>
+      <p:sp>
+        <p:nvSpPr>
+          <p:cNvPr id="4" name="Slide Image Placeholder 3"/>
+          <p:cNvSpPr>
+            <a:spLocks noGrp="1" noRot="1" noChangeAspect="1"/>
+          </p:cNvSpPr>
+          <p:nvPr>
+            <p:ph type="sldImg" idx="2"/>
+          </p:nvPr>
+        </p:nvSpPr>
+        <p:spPr>
+          <a:xfrm>
+            <a:off x="1143000" y="685800"/>
+            <a:ext cx="4572000" cy="3429000"/>
+          </a:xfrm>
+          <a:prstGeom prst="rect">
+            <a:avLst/>
+          </a:prstGeom>
+          <a:noFill/>
+          <a:ln w="12700">
+            <a:solidFill>
+              <a:prstClr val="black"/>
+            </a:solidFill>
+          </a:ln>
+        </p:spPr>
+        <p:txBody>
+          <a:bodyPr vert="horz" lIns="91440" tIns="45720" rIns="91440" bIns="45720" rtlCol="0" anchor="ctr"/>
+          <a:lstStyle/>
+          <a:p>
+            <a:endParaRPr lang="en-US"/>
+          </a:p>
+        </p:txBody>
+      </p:sp>
+      <p:sp>
+        <p:nvSpPr>
+          <p:cNvPr id="5" name="Notes Placeholder 4"/>
+          <p:cNvSpPr>
+            <a:spLocks noGrp="1"/>
+          </p:cNvSpPr>
+          <p:nvPr>
+            <p:ph type="body" sz="quarter" idx="3"/>
+          </p:nvPr>
+        </p:nvSpPr>
+        <p:spPr>
+          <a:xfrm>
+            <a:off x="685800" y="4343400"/>
+            <a:ext cx="5486400" cy="4114800"/>
+          </a:xfrm>
+          <a:prstGeom prst="rect">
+            <a:avLst/>
+          </a:prstGeom>
+        </p:spPr>
+        <p:txBody>
+          <a:bodyPr vert="horz" lIns="91440" tIns="45720" rIns="91440" bIns="45720" rtlCol="0"/>
+          <a:lstStyle/>
+          <a:p>
+            <a:pPr lvl="0"/>
+            <a:r>
+              <a:rPr lang="en-US" smtClean="0"/>
+              <a:t>Click to edit Master text styles</a:t>
+            </a:r>
+          </a:p>
+          <a:p>
+            <a:pPr lvl="1"/>
+            <a:r>
+              <a:rPr lang="en-US" smtClean="0"/>
+              <a:t>Second level</a:t>
+            </a:r>
+          </a:p>
+          <a:p>
+            <a:pPr lvl="2"/>
+            <a:r>
+              <a:rPr lang="en-US" smtClean="0"/>
+              <a:t>Third level</a:t>
+            </a:r>
+          </a:p>
+          <a:p>
+            <a:pPr lvl="3"/>
+            <a:r>
+              <a:rPr lang="en-US" smtClean="0"/>
+              <a:t>Fourth level</a:t>
+            </a:r>
+          </a:p>
+          <a:p>
+            <a:pPr lvl="4"/>
+            <a:r>
+              <a:rPr lang="en-US" smtClean="0"/>
+              <a:t>Fifth level</a:t>
+            </a:r>
+            <a:endParaRPr lang="en-US"/>
+          </a:p>
+        </p:txBody>
+      </p:sp>
+      <p:sp>
+        <p:nvSpPr>
+          <p:cNvPr id="6" name="Footer Placeholder 5"/>
+          <p:cNvSpPr>
+            <a:spLocks noGrp="1"/>
+          </p:cNvSpPr>
+          <p:nvPr>
+            <p:ph type="ftr" sz="quarter" idx="4"/>
+          </p:nvPr>
+        </p:nvSpPr>
+        <p:spPr>
+          <a:xfrm>
+            <a:off x="0" y="8685213"/>
+            <a:ext cx="2971800" cy="457200"/>
+          </a:xfrm>
+          <a:prstGeom prst="rect">
+            <a:avLst/>
+          </a:prstGeom>
+        </p:spPr>
+        <p:txBody>
+          <a:bodyPr vert="horz" lIns="91440" tIns="45720" rIns="91440" bIns="45720" rtlCol="0" anchor="b"/>
+          <a:lstStyle>
+            <a:lvl1pPr algn="l">
+              <a:defRPr sz="1200"/>
+            </a:lvl1pPr>
+          </a:lstStyle>
+          <a:p>
+            <a:endParaRPr lang="en-US"/>
+          </a:p>
+        </p:txBody>
+      </p:sp>
+      <p:sp>
+        <p:nvSpPr>
+          <p:cNvPr id="7" name="Slide Number Placeholder 6"/>
+          <p:cNvSpPr>
+            <a:spLocks noGrp="1"/>
+          </p:cNvSpPr>
+          <p:nvPr>
+            <p:ph type="sldNum" sz="quarter" idx="5"/>
+          </p:nvPr>
+        </p:nvSpPr>
+        <p:spPr>
+          <a:xfrm>
+            <a:off x="3884613" y="8685213"/>
+            <a:ext cx="2971800" cy="457200"/>
+          </a:xfrm>
+          <a:prstGeom prst="rect">
+            <a:avLst/>
+          </a:prstGeom>
+        </p:spPr>
+        <p:txBody>
+          <a:bodyPr vert="horz" lIns="91440" tIns="45720" rIns="91440" bIns="45720" rtlCol="0" anchor="b"/>
+          <a:lstStyle>
+            <a:lvl1pPr algn="r">
+              <a:defRPr sz="1200"/>
+            </a:lvl1pPr>
+          </a:lstStyle>
+          <a:p>
+            <a:fld id="{BB5E49A5-4136-284D-997B-48E1D791AD67}" type="slidenum">
+              <a:rPr lang="en-US" smtClean="0"/>
+              <a:t>‹#›</a:t>
+            </a:fld>
+            <a:endParaRPr lang="en-US"/>
+          </a:p>
+        </p:txBody>
+      </p:sp>
+    </p:spTree>
+    <p:extLst>
+      <p:ext uri="{BB962C8B-B14F-4D97-AF65-F5344CB8AC3E}">
+        <p14:creationId xmlns:p14="http://schemas.microsoft.com/office/powerpoint/2010/main" val="2623252185"/>
+      </p:ext>
+    </p:extLst>
+  </p:cSld>
+  <p:clrMap bg1="lt1" tx1="dk1" bg2="lt2" tx2="dk2" accent1="accent1" accent2="accent2" accent3="accent3" accent4="accent4" accent5="accent5" accent6="accent6" hlink="hlink" folHlink="folHlink"/>
+  <p:notesStyle>
+    <a:lvl1pPr marL="0" algn="l" defTabSz="457200" rtl="0" eaLnBrk="1" latinLnBrk="0" hangingPunct="1">
+      <a:defRPr sz="1200" kern="1200">
+        <a:solidFill>
+          <a:schemeClr val="tx1"/>
+        </a:solidFill>
+        <a:latin typeface="+mn-lt"/>
+        <a:ea typeface="+mn-ea"/>
+        <a:cs typeface="+mn-cs"/>
+      </a:defRPr>
+    </a:lvl1pPr>
+    <a:lvl2pPr marL="457200" algn="l" defTabSz="457200" rtl="0" eaLnBrk="1" latinLnBrk="0" hangingPunct="1">
+      <a:defRPr sz="1200" kern="1200">
+        <a:solidFill>
+          <a:schemeClr val="tx1"/>
+        </a:solidFill>
+        <a:latin typeface="+mn-lt"/>
+        <a:ea typeface="+mn-ea"/>
+        <a:cs typeface="+mn-cs"/>
+      </a:defRPr>
+    </a:lvl2pPr>
+    <a:lvl3pPr marL="914400" algn="l" defTabSz="457200" rtl="0" eaLnBrk="1" latinLnBrk="0" hangingPunct="1">
+      <a:defRPr sz="1200" kern="1200">
+        <a:solidFill>
+          <a:schemeClr val="tx1"/>
+        </a:solidFill>
+        <a:latin typeface="+mn-lt"/>
+        <a:ea typeface="+mn-ea"/>
+        <a:cs typeface="+mn-cs"/>
+      </a:defRPr>
+    </a:lvl3pPr>
+    <a:lvl4pPr marL="1371600" algn="l" defTabSz="457200" rtl="0" eaLnBrk="1" latinLnBrk="0" hangingPunct="1">
+      <a:defRPr sz="1200" kern="1200">
+        <a:solidFill>
+          <a:schemeClr val="tx1"/>
+        </a:solidFill>
+        <a:latin typeface="+mn-lt"/>
+        <a:ea typeface="+mn-ea"/>
+        <a:cs typeface="+mn-cs"/>
+      </a:defRPr>
+    </a:lvl4pPr>
+    <a:lvl5pPr marL="1828800" algn="l" defTabSz="457200" rtl="0" eaLnBrk="1" latinLnBrk="0" hangingPunct="1">
+      <a:defRPr sz="1200" kern="1200">
+        <a:solidFill>
+          <a:schemeClr val="tx1"/>
+        </a:solidFill>
+        <a:latin typeface="+mn-lt"/>
+        <a:ea typeface="+mn-ea"/>
+        <a:cs typeface="+mn-cs"/>
+      </a:defRPr>
+    </a:lvl5pPr>
+    <a:lvl6pPr marL="2286000" algn="l" defTabSz="457200" rtl="0" eaLnBrk="1" latinLnBrk="0" hangingPunct="1">
+      <a:defRPr sz="1200" kern="1200">
+        <a:solidFill>
+          <a:schemeClr val="tx1"/>
+        </a:solidFill>
+        <a:latin typeface="+mn-lt"/>
+        <a:ea typeface="+mn-ea"/>
+        <a:cs typeface="+mn-cs"/>
+      </a:defRPr>
+    </a:lvl6pPr>
+    <a:lvl7pPr marL="2743200" algn="l" defTabSz="457200" rtl="0" eaLnBrk="1" latinLnBrk="0" hangingPunct="1">
+      <a:defRPr sz="1200" kern="1200">
+        <a:solidFill>
+          <a:schemeClr val="tx1"/>
+        </a:solidFill>
+        <a:latin typeface="+mn-lt"/>
+        <a:ea typeface="+mn-ea"/>
+        <a:cs typeface="+mn-cs"/>
+      </a:defRPr>
+    </a:lvl7pPr>
+    <a:lvl8pPr marL="3200400" algn="l" defTabSz="457200" rtl="0" eaLnBrk="1" latinLnBrk="0" hangingPunct="1">
+      <a:defRPr sz="1200" kern="1200">
+        <a:solidFill>
+          <a:schemeClr val="tx1"/>
+        </a:solidFill>
+        <a:latin typeface="+mn-lt"/>
+        <a:ea typeface="+mn-ea"/>
+        <a:cs typeface="+mn-cs"/>
+      </a:defRPr>
+    </a:lvl8pPr>
+    <a:lvl9pPr marL="3657600" algn="l" defTabSz="457200" rtl="0" eaLnBrk="1" latinLnBrk="0" hangingPunct="1">
+      <a:defRPr sz="1200" kern="1200">
+        <a:solidFill>
+          <a:schemeClr val="tx1"/>
+        </a:solidFill>
+        <a:latin typeface="+mn-lt"/>
+        <a:ea typeface="+mn-ea"/>
+        <a:cs typeface="+mn-cs"/>
+      </a:defRPr>
+    </a:lvl9pPr>
+  </p:notesStyle>
+</p:notesMaster>
+</file>
+
+<file path=ppt/notesSlides/notesSlide1.xml><?xml version="1.0" encoding="utf-8"?>
+<p:notes xmlns:a="http://schemas.openxmlformats.org/drawingml/2006/main" xmlns:p="http://schemas.openxmlformats.org/presentationml/2006/main" xmlns:r="http://schemas.openxmlformats.org/officeDocument/2006/relationships">
+  <p:cSld>
+    <p:spTree>
+      <p:nvGrpSpPr>
+        <p:cNvPr id="1" name=""/>
+        <p:cNvGrpSpPr/>
+        <p:nvPr/>
+      </p:nvGrpSpPr>
+      <p:grpSpPr>
+        <a:xfrm>
+          <a:off x="0" y="0"/>
+          <a:ext cx="0" cy="0"/>
+          <a:chOff x="0" y="0"/>
+          <a:chExt cx="0" cy="0"/>
+        </a:xfrm>
+      </p:grpSpPr>
+      <p:sp>
+        <p:nvSpPr>
+          <p:cNvPr id="2" name="Slide Image Placeholder 1"/>
+          <p:cNvSpPr>
+            <a:spLocks noGrp="1"/>
+          </p:cNvSpPr>
+          <p:nvPr>
+            <p:ph type="sldImg" idx="2"/>
+          </p:nvPr>
+        </p:nvSpPr>
+        <p:spPr/>
+      </p:sp>
+      <p:sp>
+        <p:nvSpPr>
+          <p:cNvPr id="3" name="Notes Placeholder 2"/>
+          <p:cNvSpPr>
+            <a:spLocks noGrp="1"/>
+          </p:cNvSpPr>
+          <p:nvPr>
+            <p:ph type="body" idx="3" sz="quarter"/>
+          </p:nvPr>
+        </p:nvSpPr>
+        <p:spPr/>
+        <p:txBody>
+          <a:bodyPr/>
+          <a:lstStyle/>
+          <a:p>
+            <a:r>
+              <a:t>🎨 GÖRSELLEŞTİRME ÖNERİLERİ:</a:t>
+            </a:r>
+          </a:p>
+          <a:p/>
+          <a:p>
+            <a:r>
+              <a:t>📸 Görsel: CPU, RAM ve anakart fotoğrafları</a:t>
+            </a:r>
+          </a:p>
+          <a:p>
+            <a:r>
+              <a:t>🎬 Video: Bilgisayar donanımı tanıtım videosu (1-2 dk)</a:t>
+            </a:r>
+          </a:p>
+          <a:p>
+            <a:r>
+              <a:t>💡 İnfografik: Bilgisayar bileşenleri şeması</a:t>
+            </a:r>
+          </a:p>
+          <a:p>
+            <a:r>
+              <a:t>📸 Görsel: Scratch arayüzü ekran görüntüsü</a:t>
+            </a:r>
+          </a:p>
+          <a:p>
+            <a:r>
+              <a:t>🎬 Video: Scratch ile basit oyun yapımı (3-5 dk)</a:t>
+            </a:r>
+          </a:p>
+          <a:p>
+            <a:r>
+              <a:t>💡 Ekran kaydı: Adım adım Scratch projesi</a:t>
+            </a:r>
+          </a:p>
+          <a:p>
+            <a:r>
+              <a:t>📸 Görsel: Koşullu yapılar akış diyagramı</a:t>
+            </a:r>
+          </a:p>
+          <a:p>
+            <a:r>
+              <a:t>🎬 Video: Koşullu ifadeler Scratch'te</a:t>
+            </a:r>
+          </a:p>
+          <a:p>
+            <a:r>
+              <a:t>📸 Görsel: PowerPoint arayüzü ve araçları</a:t>
+            </a:r>
+          </a:p>
+          <a:p>
+            <a:r>
+              <a:t>🎬 Video: Etkili sunum hazırlama ipuçları</a:t>
+            </a:r>
+          </a:p>
+          <a:p>
+            <a:r>
+              <a:t>💡 Ekran kaydı: PowerPoint temel özellikler</a:t>
+            </a:r>
+          </a:p>
+        </p:txBody>
+      </p:sp>
+      <p:sp>
+        <p:nvSpPr>
+          <p:cNvPr id="4" name="Slide Number Placeholder 3"/>
+          <p:cNvSpPr>
+            <a:spLocks noGrp="1"/>
+          </p:cNvSpPr>
+          <p:nvPr>
+            <p:ph type="sldNum" idx="5" sz="quarter"/>
+          </p:nvPr>
+        </p:nvSpPr>
+        <p:spPr/>
+      </p:sp>
+    </p:spTree>
+  </p:cSld>
+  <p:clrMapOvr>
+    <a:masterClrMapping/>
+  </p:clrMapOvr>
+</p:notes>
+</file>
+
+<file path=ppt/notesSlides/notesSlide2.xml><?xml version="1.0" encoding="utf-8"?>
+<p:notes xmlns:a="http://schemas.openxmlformats.org/drawingml/2006/main" xmlns:p="http://schemas.openxmlformats.org/presentationml/2006/main" xmlns:r="http://schemas.openxmlformats.org/officeDocument/2006/relationships">
+  <p:cSld>
+    <p:spTree>
+      <p:nvGrpSpPr>
+        <p:cNvPr id="1" name=""/>
+        <p:cNvGrpSpPr/>
+        <p:nvPr/>
+      </p:nvGrpSpPr>
+      <p:grpSpPr>
+        <a:xfrm>
+          <a:off x="0" y="0"/>
+          <a:ext cx="0" cy="0"/>
+          <a:chOff x="0" y="0"/>
+          <a:chExt cx="0" cy="0"/>
+        </a:xfrm>
+      </p:grpSpPr>
+      <p:sp>
+        <p:nvSpPr>
+          <p:cNvPr id="2" name="Slide Image Placeholder 1"/>
+          <p:cNvSpPr>
+            <a:spLocks noGrp="1"/>
+          </p:cNvSpPr>
+          <p:nvPr>
+            <p:ph type="sldImg" idx="2"/>
+          </p:nvPr>
+        </p:nvSpPr>
+        <p:spPr/>
+      </p:sp>
+      <p:sp>
+        <p:nvSpPr>
+          <p:cNvPr id="3" name="Notes Placeholder 2"/>
+          <p:cNvSpPr>
+            <a:spLocks noGrp="1"/>
+          </p:cNvSpPr>
+          <p:nvPr>
+            <p:ph type="body" idx="3" sz="quarter"/>
+          </p:nvPr>
+        </p:nvSpPr>
+        <p:spPr/>
+        <p:txBody>
+          <a:bodyPr/>
+          <a:lstStyle/>
+          <a:p>
+            <a:r>
+              <a:t>🎨 GÖRSELLEŞTİRME ÖNERİLERİ:</a:t>
+            </a:r>
+          </a:p>
+          <a:p/>
+          <a:p>
+            <a:r>
+              <a:t>📸 Görsel: CPU, RAM ve anakart fotoğrafları</a:t>
+            </a:r>
+          </a:p>
+          <a:p>
+            <a:r>
+              <a:t>🎬 Video: Bilgisayar donanımı tanıtım videosu (1-2 dk)</a:t>
+            </a:r>
+          </a:p>
+          <a:p>
+            <a:r>
+              <a:t>💡 İnfografik: Bilgisayar bileşenleri şeması</a:t>
+            </a:r>
+          </a:p>
+          <a:p>
+            <a:r>
+              <a:t>📸 Görsel: Scratch arayüzü ekran görüntüsü</a:t>
+            </a:r>
+          </a:p>
+          <a:p>
+            <a:r>
+              <a:t>🎬 Video: Scratch ile basit oyun yapımı (3-5 dk)</a:t>
+            </a:r>
+          </a:p>
+          <a:p>
+            <a:r>
+              <a:t>💡 Ekran kaydı: Adım adım Scratch projesi</a:t>
+            </a:r>
+          </a:p>
+          <a:p>
+            <a:r>
+              <a:t>📸 Görsel: Temel tasarım prensipleri</a:t>
+            </a:r>
+          </a:p>
+          <a:p>
+            <a:r>
+              <a:t>🎬 Video: Dijital tasarıma giriş</a:t>
+            </a:r>
+          </a:p>
+          <a:p>
+            <a:r>
+              <a:t>💡 İnfografik: Renk teorisi ve uyumu</a:t>
+            </a:r>
+          </a:p>
+          <a:p>
+            <a:r>
+              <a:t>📸 Görsel: PowerPoint arayüzü ve araçları</a:t>
+            </a:r>
+          </a:p>
+          <a:p>
+            <a:r>
+              <a:t>🎬 Video: Etkili sunum hazırlama ipuçları</a:t>
+            </a:r>
+          </a:p>
+          <a:p>
+            <a:r>
+              <a:t>💡 Ekran kaydı: PowerPoint temel özellikler</a:t>
+            </a:r>
+          </a:p>
+        </p:txBody>
+      </p:sp>
+      <p:sp>
+        <p:nvSpPr>
+          <p:cNvPr id="4" name="Slide Number Placeholder 3"/>
+          <p:cNvSpPr>
+            <a:spLocks noGrp="1"/>
+          </p:cNvSpPr>
+          <p:nvPr>
+            <p:ph type="sldNum" idx="5" sz="quarter"/>
+          </p:nvPr>
+        </p:nvSpPr>
+        <p:spPr/>
+      </p:sp>
+    </p:spTree>
+  </p:cSld>
+  <p:clrMapOvr>
+    <a:masterClrMapping/>
+  </p:clrMapOvr>
+</p:notes>
+</file>
+
+<file path=ppt/notesSlides/notesSlide3.xml><?xml version="1.0" encoding="utf-8"?>
+<p:notes xmlns:a="http://schemas.openxmlformats.org/drawingml/2006/main" xmlns:p="http://schemas.openxmlformats.org/presentationml/2006/main" xmlns:r="http://schemas.openxmlformats.org/officeDocument/2006/relationships">
+  <p:cSld>
+    <p:spTree>
+      <p:nvGrpSpPr>
+        <p:cNvPr id="1" name=""/>
+        <p:cNvGrpSpPr/>
+        <p:nvPr/>
+      </p:nvGrpSpPr>
+      <p:grpSpPr>
+        <a:xfrm>
+          <a:off x="0" y="0"/>
+          <a:ext cx="0" cy="0"/>
+          <a:chOff x="0" y="0"/>
+          <a:chExt cx="0" cy="0"/>
+        </a:xfrm>
+      </p:grpSpPr>
+      <p:sp>
+        <p:nvSpPr>
+          <p:cNvPr id="2" name="Slide Image Placeholder 1"/>
+          <p:cNvSpPr>
+            <a:spLocks noGrp="1"/>
+          </p:cNvSpPr>
+          <p:nvPr>
+            <p:ph type="sldImg" idx="2"/>
+          </p:nvPr>
+        </p:nvSpPr>
+        <p:spPr/>
+      </p:sp>
+      <p:sp>
+        <p:nvSpPr>
+          <p:cNvPr id="3" name="Notes Placeholder 2"/>
+          <p:cNvSpPr>
+            <a:spLocks noGrp="1"/>
+          </p:cNvSpPr>
+          <p:nvPr>
+            <p:ph type="body" idx="3" sz="quarter"/>
+          </p:nvPr>
+        </p:nvSpPr>
+        <p:spPr/>
+        <p:txBody>
+          <a:bodyPr/>
+          <a:lstStyle/>
+          <a:p>
+            <a:r>
+              <a:t>🎨 GÖRSELLEŞTİRME ÖNERİLERİ:</a:t>
+            </a:r>
+          </a:p>
+          <a:p/>
+          <a:p>
+            <a:r>
+              <a:t>📸 Görsel: CPU, RAM ve anakart fotoğrafları</a:t>
+            </a:r>
+          </a:p>
+          <a:p>
+            <a:r>
+              <a:t>🎬 Video: Bilgisayar donanımı tanıtım videosu (1-2 dk)</a:t>
+            </a:r>
+          </a:p>
+          <a:p>
+            <a:r>
+              <a:t>💡 İnfografik: Bilgisayar bileşenleri şeması</a:t>
+            </a:r>
+          </a:p>
+          <a:p>
+            <a:r>
+              <a:t>📸 Görsel: LAN ve WAN ağ topolojileri şeması</a:t>
+            </a:r>
+          </a:p>
+          <a:p>
+            <a:r>
+              <a:t>🎬 Video: İnternet nasıl çalışır? Animasyonlu anlatım</a:t>
+            </a:r>
+          </a:p>
+          <a:p>
+            <a:r>
+              <a:t>💡 İnfografik: Ev ağı kurulumu diyagramı</a:t>
+            </a:r>
+          </a:p>
+          <a:p>
+            <a:r>
+              <a:t>📸 Görsel: Scratch arayüzü ekran görüntüsü</a:t>
+            </a:r>
+          </a:p>
+          <a:p>
+            <a:r>
+              <a:t>🎬 Video: Scratch ile basit oyun yapımı (3-5 dk)</a:t>
+            </a:r>
+          </a:p>
+          <a:p>
+            <a:r>
+              <a:t>💡 Ekran kaydı: Adım adım Scratch projesi</a:t>
+            </a:r>
+          </a:p>
+          <a:p>
+            <a:r>
+              <a:t>📸 Görsel: PowerPoint arayüzü ve araçları</a:t>
+            </a:r>
+          </a:p>
+          <a:p>
+            <a:r>
+              <a:t>🎬 Video: Etkili sunum hazırlama ipuçları</a:t>
+            </a:r>
+          </a:p>
+          <a:p>
+            <a:r>
+              <a:t>💡 Ekran kaydı: PowerPoint temel özellikler</a:t>
+            </a:r>
+          </a:p>
+        </p:txBody>
+      </p:sp>
+      <p:sp>
+        <p:nvSpPr>
+          <p:cNvPr id="4" name="Slide Number Placeholder 3"/>
+          <p:cNvSpPr>
+            <a:spLocks noGrp="1"/>
+          </p:cNvSpPr>
+          <p:nvPr>
+            <p:ph type="sldNum" idx="5" sz="quarter"/>
+          </p:nvPr>
+        </p:nvSpPr>
+        <p:spPr/>
+      </p:sp>
+    </p:spTree>
+  </p:cSld>
+  <p:clrMapOvr>
+    <a:masterClrMapping/>
+  </p:clrMapOvr>
+</p:notes>
+</file>
+
+<file path=ppt/notesSlides/notesSlide4.xml><?xml version="1.0" encoding="utf-8"?>
+<p:notes xmlns:a="http://schemas.openxmlformats.org/drawingml/2006/main" xmlns:p="http://schemas.openxmlformats.org/presentationml/2006/main" xmlns:r="http://schemas.openxmlformats.org/officeDocument/2006/relationships">
+  <p:cSld>
+    <p:spTree>
+      <p:nvGrpSpPr>
+        <p:cNvPr id="1" name=""/>
+        <p:cNvGrpSpPr/>
+        <p:nvPr/>
+      </p:nvGrpSpPr>
+      <p:grpSpPr>
+        <a:xfrm>
+          <a:off x="0" y="0"/>
+          <a:ext cx="0" cy="0"/>
+          <a:chOff x="0" y="0"/>
+          <a:chExt cx="0" cy="0"/>
+        </a:xfrm>
+      </p:grpSpPr>
+      <p:sp>
+        <p:nvSpPr>
+          <p:cNvPr id="2" name="Slide Image Placeholder 1"/>
+          <p:cNvSpPr>
+            <a:spLocks noGrp="1"/>
+          </p:cNvSpPr>
+          <p:nvPr>
+            <p:ph type="sldImg" idx="2"/>
+          </p:nvPr>
+        </p:nvSpPr>
+        <p:spPr/>
+      </p:sp>
+      <p:sp>
+        <p:nvSpPr>
+          <p:cNvPr id="3" name="Notes Placeholder 2"/>
+          <p:cNvSpPr>
+            <a:spLocks noGrp="1"/>
+          </p:cNvSpPr>
+          <p:nvPr>
+            <p:ph type="body" idx="3" sz="quarter"/>
+          </p:nvPr>
+        </p:nvSpPr>
+        <p:spPr/>
+        <p:txBody>
+          <a:bodyPr/>
+          <a:lstStyle/>
+          <a:p>
+            <a:r>
+              <a:t>🎨 GÖRSELLEŞTİRME ÖNERİLERİ:</a:t>
+            </a:r>
+          </a:p>
+          <a:p/>
+          <a:p>
+            <a:r>
+              <a:t>📸 Görsel: LAN ve WAN ağ topolojileri şeması</a:t>
+            </a:r>
+          </a:p>
+          <a:p>
+            <a:r>
+              <a:t>🎬 Video: İnternet nasıl çalışır? Animasyonlu anlatım</a:t>
+            </a:r>
+          </a:p>
+          <a:p>
+            <a:r>
+              <a:t>💡 İnfografik: Ev ağı kurulumu diyagramı</a:t>
+            </a:r>
+          </a:p>
+          <a:p>
+            <a:r>
+              <a:t>📸 Görsel: Telif hakları sembolleri (©, ®, ™)</a:t>
+            </a:r>
+          </a:p>
+          <a:p>
+            <a:r>
+              <a:t>🎬 Video: Dijital etik ve telif hakları</a:t>
+            </a:r>
+          </a:p>
+          <a:p>
+            <a:r>
+              <a:t>💡 İnfografik: Lisans türleri karşılaştırması</a:t>
+            </a:r>
+          </a:p>
+          <a:p>
+            <a:r>
+              <a:t>📸 Görsel: Koşullu yapılar akış diyagramı</a:t>
+            </a:r>
+          </a:p>
+          <a:p>
+            <a:r>
+              <a:t>🎬 Video: Koşullu ifadeler Scratch'te</a:t>
+            </a:r>
+          </a:p>
+          <a:p>
+            <a:r>
+              <a:t>📸 Görsel: Temel tasarım prensipleri</a:t>
+            </a:r>
+          </a:p>
+          <a:p>
+            <a:r>
+              <a:t>🎬 Video: Dijital tasarıma giriş</a:t>
+            </a:r>
+          </a:p>
+          <a:p>
+            <a:r>
+              <a:t>💡 İnfografik: Renk teorisi ve uyumu</a:t>
+            </a:r>
+          </a:p>
+          <a:p>
+            <a:r>
+              <a:t>📸 Görsel: PowerPoint arayüzü ve araçları</a:t>
+            </a:r>
+          </a:p>
+          <a:p>
+            <a:r>
+              <a:t>🎬 Video: Etkili sunum hazırlama ipuçları</a:t>
+            </a:r>
+          </a:p>
+          <a:p>
+            <a:r>
+              <a:t>💡 Ekran kaydı: PowerPoint temel özellikler</a:t>
+            </a:r>
+          </a:p>
+        </p:txBody>
+      </p:sp>
+      <p:sp>
+        <p:nvSpPr>
+          <p:cNvPr id="4" name="Slide Number Placeholder 3"/>
+          <p:cNvSpPr>
+            <a:spLocks noGrp="1"/>
+          </p:cNvSpPr>
+          <p:nvPr>
+            <p:ph type="sldNum" idx="5" sz="quarter"/>
+          </p:nvPr>
+        </p:nvSpPr>
+        <p:spPr/>
+      </p:sp>
+    </p:spTree>
+  </p:cSld>
+  <p:clrMapOvr>
+    <a:masterClrMapping/>
+  </p:clrMapOvr>
+</p:notes>
+</file>
+
+<file path=ppt/notesSlides/notesSlide5.xml><?xml version="1.0" encoding="utf-8"?>
+<p:notes xmlns:a="http://schemas.openxmlformats.org/drawingml/2006/main" xmlns:p="http://schemas.openxmlformats.org/presentationml/2006/main" xmlns:r="http://schemas.openxmlformats.org/officeDocument/2006/relationships">
+  <p:cSld>
+    <p:spTree>
+      <p:nvGrpSpPr>
+        <p:cNvPr id="1" name=""/>
+        <p:cNvGrpSpPr/>
+        <p:nvPr/>
+      </p:nvGrpSpPr>
+      <p:grpSpPr>
+        <a:xfrm>
+          <a:off x="0" y="0"/>
+          <a:ext cx="0" cy="0"/>
+          <a:chOff x="0" y="0"/>
+          <a:chExt cx="0" cy="0"/>
+        </a:xfrm>
+      </p:grpSpPr>
+      <p:sp>
+        <p:nvSpPr>
+          <p:cNvPr id="2" name="Slide Image Placeholder 1"/>
+          <p:cNvSpPr>
+            <a:spLocks noGrp="1"/>
+          </p:cNvSpPr>
+          <p:nvPr>
+            <p:ph type="sldImg" idx="2"/>
+          </p:nvPr>
+        </p:nvSpPr>
+        <p:spPr/>
+      </p:sp>
+      <p:sp>
+        <p:nvSpPr>
+          <p:cNvPr id="3" name="Notes Placeholder 2"/>
+          <p:cNvSpPr>
+            <a:spLocks noGrp="1"/>
+          </p:cNvSpPr>
+          <p:nvPr>
+            <p:ph type="body" idx="3" sz="quarter"/>
+          </p:nvPr>
+        </p:nvSpPr>
+        <p:spPr/>
+        <p:txBody>
+          <a:bodyPr/>
+          <a:lstStyle/>
+          <a:p>
+            <a:r>
+              <a:t>🎨 GÖRSELLEŞTİRME ÖNERİLERİ:</a:t>
+            </a:r>
+          </a:p>
+          <a:p/>
+          <a:p>
+            <a:r>
+              <a:t>📸 Görsel: LAN ve WAN ağ topolojileri şeması</a:t>
+            </a:r>
+          </a:p>
+          <a:p>
+            <a:r>
+              <a:t>🎬 Video: İnternet nasıl çalışır? Animasyonlu anlatım</a:t>
+            </a:r>
+          </a:p>
+          <a:p>
+            <a:r>
+              <a:t>💡 İnfografik: Ev ağı kurulumu diyagramı</a:t>
+            </a:r>
+          </a:p>
+          <a:p>
+            <a:r>
+              <a:t>📸 Görsel: Temel tasarım prensipleri</a:t>
+            </a:r>
+          </a:p>
+          <a:p>
+            <a:r>
+              <a:t>🎬 Video: Dijital tasarıma giriş</a:t>
+            </a:r>
+          </a:p>
+          <a:p>
+            <a:r>
+              <a:t>💡 İnfografik: Renk teorisi ve uyumu</a:t>
+            </a:r>
+          </a:p>
+          <a:p>
+            <a:r>
+              <a:t>📸 Görsel: PowerPoint arayüzü ve araçları</a:t>
+            </a:r>
+          </a:p>
+          <a:p>
+            <a:r>
+              <a:t>🎬 Video: Etkili sunum hazırlama ipuçları</a:t>
+            </a:r>
+          </a:p>
+          <a:p>
+            <a:r>
+              <a:t>💡 Ekran kaydı: PowerPoint temel özellikler</a:t>
+            </a:r>
+          </a:p>
+        </p:txBody>
+      </p:sp>
+      <p:sp>
+        <p:nvSpPr>
+          <p:cNvPr id="4" name="Slide Number Placeholder 3"/>
+          <p:cNvSpPr>
+            <a:spLocks noGrp="1"/>
+          </p:cNvSpPr>
+          <p:nvPr>
+            <p:ph type="sldNum" idx="5" sz="quarter"/>
+          </p:nvPr>
+        </p:nvSpPr>
+        <p:spPr/>
+      </p:sp>
+    </p:spTree>
+  </p:cSld>
+  <p:clrMapOvr>
+    <a:masterClrMapping/>
+  </p:clrMapOvr>
+</p:notes>
+</file>
+
+<file path=ppt/notesSlides/notesSlide6.xml><?xml version="1.0" encoding="utf-8"?>
+<p:notes xmlns:a="http://schemas.openxmlformats.org/drawingml/2006/main" xmlns:p="http://schemas.openxmlformats.org/presentationml/2006/main" xmlns:r="http://schemas.openxmlformats.org/officeDocument/2006/relationships">
+  <p:cSld>
+    <p:spTree>
+      <p:nvGrpSpPr>
+        <p:cNvPr id="1" name=""/>
+        <p:cNvGrpSpPr/>
+        <p:nvPr/>
+      </p:nvGrpSpPr>
+      <p:grpSpPr>
+        <a:xfrm>
+          <a:off x="0" y="0"/>
+          <a:ext cx="0" cy="0"/>
+          <a:chOff x="0" y="0"/>
+          <a:chExt cx="0" cy="0"/>
+        </a:xfrm>
+      </p:grpSpPr>
+      <p:sp>
+        <p:nvSpPr>
+          <p:cNvPr id="2" name="Slide Image Placeholder 1"/>
+          <p:cNvSpPr>
+            <a:spLocks noGrp="1"/>
+          </p:cNvSpPr>
+          <p:nvPr>
+            <p:ph type="sldImg" idx="2"/>
+          </p:nvPr>
+        </p:nvSpPr>
+        <p:spPr/>
+      </p:sp>
+      <p:sp>
+        <p:nvSpPr>
+          <p:cNvPr id="3" name="Notes Placeholder 2"/>
+          <p:cNvSpPr>
+            <a:spLocks noGrp="1"/>
+          </p:cNvSpPr>
+          <p:nvPr>
+            <p:ph type="body" idx="3" sz="quarter"/>
+          </p:nvPr>
+        </p:nvSpPr>
+        <p:spPr/>
+        <p:txBody>
+          <a:bodyPr/>
+          <a:lstStyle/>
+          <a:p>
+            <a:r>
+              <a:t>🎨 GÖRSELLEŞTİRME ÖNERİLERİ:</a:t>
+            </a:r>
+          </a:p>
+          <a:p/>
+          <a:p>
+            <a:r>
+              <a:t>📸 Görsel: LAN ve WAN ağ topolojileri şeması</a:t>
+            </a:r>
+          </a:p>
+          <a:p>
+            <a:r>
+              <a:t>🎬 Video: İnternet nasıl çalışır? Animasyonlu anlatım</a:t>
+            </a:r>
+          </a:p>
+          <a:p>
+            <a:r>
+              <a:t>💡 İnfografik: Ev ağı kurulumu diyagramı</a:t>
+            </a:r>
+          </a:p>
+          <a:p>
+            <a:r>
+              <a:t>📸 Görsel: PowerPoint arayüzü ve araçları</a:t>
+            </a:r>
+          </a:p>
+          <a:p>
+            <a:r>
+              <a:t>🎬 Video: Etkili sunum hazırlama ipuçları</a:t>
+            </a:r>
+          </a:p>
+          <a:p>
+            <a:r>
+              <a:t>💡 Ekran kaydı: PowerPoint temel özellikler</a:t>
+            </a:r>
+          </a:p>
+        </p:txBody>
+      </p:sp>
+      <p:sp>
+        <p:nvSpPr>
+          <p:cNvPr id="4" name="Slide Number Placeholder 3"/>
+          <p:cNvSpPr>
+            <a:spLocks noGrp="1"/>
+          </p:cNvSpPr>
+          <p:nvPr>
+            <p:ph type="sldNum" idx="5" sz="quarter"/>
+          </p:nvPr>
+        </p:nvSpPr>
+        <p:spPr/>
+      </p:sp>
+    </p:spTree>
+  </p:cSld>
+  <p:clrMapOvr>
+    <a:masterClrMapping/>
+  </p:clrMapOvr>
+</p:notes>
+</file>
+
+<file path=ppt/notesSlides/notesSlide7.xml><?xml version="1.0" encoding="utf-8"?>
+<p:notes xmlns:a="http://schemas.openxmlformats.org/drawingml/2006/main" xmlns:p="http://schemas.openxmlformats.org/presentationml/2006/main" xmlns:r="http://schemas.openxmlformats.org/officeDocument/2006/relationships">
+  <p:cSld>
+    <p:spTree>
+      <p:nvGrpSpPr>
+        <p:cNvPr id="1" name=""/>
+        <p:cNvGrpSpPr/>
+        <p:nvPr/>
+      </p:nvGrpSpPr>
+      <p:grpSpPr>
+        <a:xfrm>
+          <a:off x="0" y="0"/>
+          <a:ext cx="0" cy="0"/>
+          <a:chOff x="0" y="0"/>
+          <a:chExt cx="0" cy="0"/>
+        </a:xfrm>
+      </p:grpSpPr>
+      <p:sp>
+        <p:nvSpPr>
+          <p:cNvPr id="2" name="Slide Image Placeholder 1"/>
+          <p:cNvSpPr>
+            <a:spLocks noGrp="1"/>
+          </p:cNvSpPr>
+          <p:nvPr>
+            <p:ph type="sldImg" idx="2"/>
+          </p:nvPr>
+        </p:nvSpPr>
+        <p:spPr/>
+      </p:sp>
+      <p:sp>
+        <p:nvSpPr>
+          <p:cNvPr id="3" name="Notes Placeholder 2"/>
+          <p:cNvSpPr>
+            <a:spLocks noGrp="1"/>
+          </p:cNvSpPr>
+          <p:nvPr>
+            <p:ph type="body" idx="3" sz="quarter"/>
+          </p:nvPr>
+        </p:nvSpPr>
+        <p:spPr/>
+        <p:txBody>
+          <a:bodyPr/>
+          <a:lstStyle/>
+          <a:p>
+            <a:r>
+              <a:t>🎨 GÖRSELLEŞTİRME ÖNERİLERİ:</a:t>
+            </a:r>
+          </a:p>
+          <a:p/>
+          <a:p>
+            <a:r>
+              <a:t>📸 Görsel: LAN ve WAN ağ topolojileri şeması</a:t>
+            </a:r>
+          </a:p>
+          <a:p>
+            <a:r>
+              <a:t>🎬 Video: İnternet nasıl çalışır? Animasyonlu anlatım</a:t>
+            </a:r>
+          </a:p>
+          <a:p>
+            <a:r>
+              <a:t>💡 İnfografik: Ev ağı kurulumu diyagramı</a:t>
+            </a:r>
+          </a:p>
+          <a:p>
+            <a:r>
+              <a:t>📸 Görsel: PowerPoint arayüzü ve araçları</a:t>
+            </a:r>
+          </a:p>
+          <a:p>
+            <a:r>
+              <a:t>🎬 Video: Etkili sunum hazırlama ipuçları</a:t>
+            </a:r>
+          </a:p>
+          <a:p>
+            <a:r>
+              <a:t>💡 Ekran kaydı: PowerPoint temel özellikler</a:t>
+            </a:r>
+          </a:p>
+        </p:txBody>
+      </p:sp>
+      <p:sp>
+        <p:nvSpPr>
+          <p:cNvPr id="4" name="Slide Number Placeholder 3"/>
+          <p:cNvSpPr>
+            <a:spLocks noGrp="1"/>
+          </p:cNvSpPr>
+          <p:nvPr>
+            <p:ph type="sldNum" idx="5" sz="quarter"/>
+          </p:nvPr>
+        </p:nvSpPr>
+        <p:spPr/>
+      </p:sp>
+    </p:spTree>
+  </p:cSld>
+  <p:clrMapOvr>
+    <a:masterClrMapping/>
+  </p:clrMapOvr>
+</p:notes>
+</file>
+
+<file path=ppt/notesSlides/notesSlide8.xml><?xml version="1.0" encoding="utf-8"?>
+<p:notes xmlns:a="http://schemas.openxmlformats.org/drawingml/2006/main" xmlns:p="http://schemas.openxmlformats.org/presentationml/2006/main" xmlns:r="http://schemas.openxmlformats.org/officeDocument/2006/relationships">
+  <p:cSld>
+    <p:spTree>
+      <p:nvGrpSpPr>
+        <p:cNvPr id="1" name=""/>
+        <p:cNvGrpSpPr/>
+        <p:nvPr/>
+      </p:nvGrpSpPr>
+      <p:grpSpPr>
+        <a:xfrm>
+          <a:off x="0" y="0"/>
+          <a:ext cx="0" cy="0"/>
+          <a:chOff x="0" y="0"/>
+          <a:chExt cx="0" cy="0"/>
+        </a:xfrm>
+      </p:grpSpPr>
+      <p:sp>
+        <p:nvSpPr>
+          <p:cNvPr id="2" name="Slide Image Placeholder 1"/>
+          <p:cNvSpPr>
+            <a:spLocks noGrp="1"/>
+          </p:cNvSpPr>
+          <p:nvPr>
+            <p:ph type="sldImg" idx="2"/>
+          </p:nvPr>
+        </p:nvSpPr>
+        <p:spPr/>
+      </p:sp>
+      <p:sp>
+        <p:nvSpPr>
+          <p:cNvPr id="3" name="Notes Placeholder 2"/>
+          <p:cNvSpPr>
+            <a:spLocks noGrp="1"/>
+          </p:cNvSpPr>
+          <p:nvPr>
+            <p:ph type="body" idx="3" sz="quarter"/>
+          </p:nvPr>
+        </p:nvSpPr>
+        <p:spPr/>
+        <p:txBody>
+          <a:bodyPr/>
+          <a:lstStyle/>
+          <a:p>
+            <a:r>
+              <a:t>🎨 GÖRSELLEŞTİRME ÖNERİLERİ:</a:t>
+            </a:r>
+          </a:p>
+          <a:p/>
+          <a:p>
+            <a:r>
+              <a:t>📸 Görsel: CPU, RAM ve anakart fotoğrafları</a:t>
+            </a:r>
+          </a:p>
+          <a:p>
+            <a:r>
+              <a:t>🎬 Video: Bilgisayar donanımı tanıtım videosu (1-2 dk)</a:t>
+            </a:r>
+          </a:p>
+          <a:p>
+            <a:r>
+              <a:t>💡 İnfografik: Bilgisayar bileşenleri şeması</a:t>
+            </a:r>
+          </a:p>
+          <a:p>
+            <a:r>
+              <a:t>📸 Görsel: Scratch arayüzü ekran görüntüsü</a:t>
+            </a:r>
+          </a:p>
+          <a:p>
+            <a:r>
+              <a:t>🎬 Video: Scratch ile basit oyun yapımı (3-5 dk)</a:t>
+            </a:r>
+          </a:p>
+          <a:p>
+            <a:r>
+              <a:t>💡 Ekran kaydı: Adım adım Scratch projesi</a:t>
+            </a:r>
+          </a:p>
+          <a:p>
+            <a:r>
+              <a:t>📸 Görsel: Temel tasarım prensipleri</a:t>
+            </a:r>
+          </a:p>
+          <a:p>
+            <a:r>
+              <a:t>🎬 Video: Dijital tasarıma giriş</a:t>
+            </a:r>
+          </a:p>
+          <a:p>
+            <a:r>
+              <a:t>💡 İnfografik: Renk teorisi ve uyumu</a:t>
+            </a:r>
+          </a:p>
+          <a:p>
+            <a:r>
+              <a:t>📸 Görsel: PowerPoint arayüzü ve araçları</a:t>
+            </a:r>
+          </a:p>
+          <a:p>
+            <a:r>
+              <a:t>🎬 Video: Etkili sunum hazırlama ipuçları</a:t>
+            </a:r>
+          </a:p>
+          <a:p>
+            <a:r>
+              <a:t>💡 Ekran kaydı: PowerPoint temel özellikler</a:t>
+            </a:r>
+          </a:p>
+        </p:txBody>
+      </p:sp>
+      <p:sp>
+        <p:nvSpPr>
+          <p:cNvPr id="4" name="Slide Number Placeholder 3"/>
+          <p:cNvSpPr>
+            <a:spLocks noGrp="1"/>
+          </p:cNvSpPr>
+          <p:nvPr>
+            <p:ph type="sldNum" idx="5" sz="quarter"/>
+          </p:nvPr>
+        </p:nvSpPr>
+        <p:spPr/>
+      </p:sp>
+    </p:spTree>
+  </p:cSld>
+  <p:clrMapOvr>
+    <a:masterClrMapping/>
+  </p:clrMapOvr>
+</p:notes>
 </file>
 
 <file path=ppt/slideLayouts/slideLayout1.xml><?xml version="1.0" encoding="utf-8"?>
@@ -3799,6 +5127,7 @@
               <a:defRPr sz="1900"/>
             </a:pPr>
             <a:r>
+              <a:rPr sz="1600"/>
               <a:t>Güzel ve etkili slayt nasıl olur?</a:t>
             </a:r>
           </a:p>
@@ -3818,6 +5147,7 @@
               <a:defRPr sz="1900"/>
             </a:pPr>
             <a:r>
+              <a:rPr sz="1600"/>
               <a:t>✅ Tasarım İlkeleri:</a:t>
             </a:r>
           </a:p>
@@ -3837,6 +5167,7 @@
               <a:defRPr sz="1900"/>
             </a:pPr>
             <a:r>
+              <a:rPr sz="1600"/>
               <a:t>🎯 Basitlik:</a:t>
             </a:r>
           </a:p>
@@ -3848,6 +5179,7 @@
               <a:defRPr sz="1700"/>
             </a:pPr>
             <a:r>
+              <a:rPr sz="1600"/>
               <a:t>    • Her slayt 1 ana fikir</a:t>
             </a:r>
           </a:p>
@@ -3859,6 +5191,7 @@
               <a:defRPr sz="1700"/>
             </a:pPr>
             <a:r>
+              <a:rPr sz="1600"/>
               <a:t>    • Çok metin kullanma</a:t>
             </a:r>
           </a:p>
@@ -3870,6 +5203,7 @@
               <a:defRPr sz="1700"/>
             </a:pPr>
             <a:r>
+              <a:rPr sz="1600"/>
               <a:t>    • Boşluk bırak</a:t>
             </a:r>
           </a:p>
@@ -3889,6 +5223,7 @@
               <a:defRPr sz="1900"/>
             </a:pPr>
             <a:r>
+              <a:rPr sz="1600"/>
               <a:t>🌈 Renk Uyumu:</a:t>
             </a:r>
           </a:p>
@@ -3900,6 +5235,7 @@
               <a:defRPr sz="1700"/>
             </a:pPr>
             <a:r>
+              <a:rPr sz="1600"/>
               <a:t>    • 3-4 renk kullan</a:t>
             </a:r>
           </a:p>
@@ -3911,6 +5247,7 @@
               <a:defRPr sz="1700"/>
             </a:pPr>
             <a:r>
+              <a:rPr sz="1600"/>
               <a:t>    • Kontrast önemli (açık arka plan + koyu metin)</a:t>
             </a:r>
           </a:p>
@@ -3930,6 +5267,7 @@
               <a:defRPr sz="1900"/>
             </a:pPr>
             <a:r>
+              <a:rPr sz="1600"/>
               <a:t>🔤 Yazı Tipi:</a:t>
             </a:r>
           </a:p>
@@ -3941,6 +5279,7 @@
               <a:defRPr sz="1700"/>
             </a:pPr>
             <a:r>
+              <a:rPr sz="1600"/>
               <a:t>    • Okunabilir fontlar (Arial, Calibri)</a:t>
             </a:r>
           </a:p>
@@ -3952,6 +5291,7 @@
               <a:defRPr sz="1700"/>
             </a:pPr>
             <a:r>
+              <a:rPr sz="1600"/>
               <a:t>    • Başlık: 28-44 pt</a:t>
             </a:r>
           </a:p>
@@ -3963,6 +5303,7 @@
               <a:defRPr sz="1700"/>
             </a:pPr>
             <a:r>
+              <a:rPr sz="1600"/>
               <a:t>    • Metin: 18-24 pt</a:t>
             </a:r>
           </a:p>
@@ -3982,6 +5323,7 @@
               <a:defRPr sz="1900"/>
             </a:pPr>
             <a:r>
+              <a:rPr sz="1600"/>
               <a:t>🖼️ Görseller:</a:t>
             </a:r>
           </a:p>
@@ -3993,6 +5335,7 @@
               <a:defRPr sz="1700"/>
             </a:pPr>
             <a:r>
+              <a:rPr sz="1600"/>
               <a:t>    • Yüksek çözünürlük</a:t>
             </a:r>
           </a:p>
@@ -4004,6 +5347,7 @@
               <a:defRPr sz="1700"/>
             </a:pPr>
             <a:r>
+              <a:rPr sz="1600"/>
               <a:t>    • Konuyla ilgili</a:t>
             </a:r>
           </a:p>
@@ -4015,6 +5359,7 @@
               <a:defRPr sz="1700"/>
             </a:pPr>
             <a:r>
+              <a:rPr sz="1600"/>
               <a:t>    • Telif haklarına dikkat</a:t>
             </a:r>
           </a:p>
@@ -4034,6 +5379,7 @@
               <a:defRPr sz="1900"/>
             </a:pPr>
             <a:r>
+              <a:rPr sz="1600"/>
               <a:t>💡 6-6 Kuralı:</a:t>
             </a:r>
           </a:p>
@@ -4045,6 +5391,7 @@
               <a:defRPr sz="1900"/>
             </a:pPr>
             <a:r>
+              <a:rPr sz="1600"/>
               <a:t>Slayt başına 6 madde, madde başına 6 kelime</a:t>
             </a:r>
           </a:p>
@@ -4815,6 +6162,7 @@
               <a:defRPr sz="1900"/>
             </a:pPr>
             <a:r>
+              <a:rPr sz="1600"/>
               <a:t>Sunumu nasıl yapmalısın?</a:t>
             </a:r>
           </a:p>
@@ -4834,6 +6182,7 @@
               <a:defRPr sz="1900"/>
             </a:pPr>
             <a:r>
+              <a:rPr sz="1600"/>
               <a:t>✅ Sunum Öncesi:</a:t>
             </a:r>
           </a:p>
@@ -4845,6 +6194,7 @@
               <a:defRPr sz="1700"/>
             </a:pPr>
             <a:r>
+              <a:rPr sz="1600"/>
               <a:t>    • Prova yap</a:t>
             </a:r>
           </a:p>
@@ -4856,6 +6206,7 @@
               <a:defRPr sz="1700"/>
             </a:pPr>
             <a:r>
+              <a:rPr sz="1600"/>
               <a:t>    • Zamanını ölç</a:t>
             </a:r>
           </a:p>
@@ -4867,6 +6218,7 @@
               <a:defRPr sz="1700"/>
             </a:pPr>
             <a:r>
+              <a:rPr sz="1600"/>
               <a:t>    • Ekipmanı kontrol et</a:t>
             </a:r>
           </a:p>
@@ -4886,6 +6238,7 @@
               <a:defRPr sz="1900"/>
             </a:pPr>
             <a:r>
+              <a:rPr sz="1600"/>
               <a:t>✅ Sunum Sırasında:</a:t>
             </a:r>
           </a:p>
@@ -4897,6 +6250,7 @@
               <a:defRPr sz="1700"/>
             </a:pPr>
             <a:r>
+              <a:rPr sz="1600"/>
               <a:t>    • Göz teması kur</a:t>
             </a:r>
           </a:p>
@@ -4908,6 +6262,7 @@
               <a:defRPr sz="1700"/>
             </a:pPr>
             <a:r>
+              <a:rPr sz="1600"/>
               <a:t>    • Net konuş</a:t>
             </a:r>
           </a:p>
@@ -4919,6 +6274,7 @@
               <a:defRPr sz="1700"/>
             </a:pPr>
             <a:r>
+              <a:rPr sz="1600"/>
               <a:t>    • Slayta bakma, izleyicilere bak</a:t>
             </a:r>
           </a:p>
@@ -4930,6 +6286,7 @@
               <a:defRPr sz="1700"/>
             </a:pPr>
             <a:r>
+              <a:rPr sz="1600"/>
               <a:t>    • Jestlerini kullan</a:t>
             </a:r>
           </a:p>
@@ -4941,6 +6298,7 @@
               <a:defRPr sz="1700"/>
             </a:pPr>
             <a:r>
+              <a:rPr sz="1600"/>
               <a:t>    • Kendine güven</a:t>
             </a:r>
           </a:p>
@@ -4960,6 +6318,7 @@
               <a:defRPr sz="1900"/>
             </a:pPr>
             <a:r>
+              <a:rPr sz="1600"/>
               <a:t>✅ İçerik:</a:t>
             </a:r>
           </a:p>
@@ -4971,6 +6330,7 @@
               <a:defRPr sz="1700"/>
             </a:pPr>
             <a:r>
+              <a:rPr sz="1600"/>
               <a:t>    • Giriş yap</a:t>
             </a:r>
           </a:p>
@@ -4982,6 +6342,7 @@
               <a:defRPr sz="1700"/>
             </a:pPr>
             <a:r>
+              <a:rPr sz="1600"/>
               <a:t>    • Ana konuları sun</a:t>
             </a:r>
           </a:p>
@@ -4993,6 +6354,7 @@
               <a:defRPr sz="1700"/>
             </a:pPr>
             <a:r>
+              <a:rPr sz="1600"/>
               <a:t>    • Özet yap</a:t>
             </a:r>
           </a:p>
@@ -5004,6 +6366,7 @@
               <a:defRPr sz="1700"/>
             </a:pPr>
             <a:r>
+              <a:rPr sz="1600"/>
               <a:t>    • Sorular al</a:t>
             </a:r>
           </a:p>
@@ -5023,6 +6386,7 @@
               <a:defRPr sz="1900"/>
             </a:pPr>
             <a:r>
+              <a:rPr sz="1600"/>
               <a:t>💡 Altın Kural:</a:t>
             </a:r>
           </a:p>
@@ -5034,6 +6398,7 @@
               <a:defRPr sz="1900"/>
             </a:pPr>
             <a:r>
+              <a:rPr sz="1600"/>
               <a:t>Slayt senin yardımcın, sen sunumu yapıyorsun!</a:t>
             </a:r>
           </a:p>
@@ -5053,6 +6418,7 @@
               <a:defRPr sz="1900"/>
             </a:pPr>
             <a:r>
+              <a:rPr sz="1600"/>
               <a:t>⚠️ Yapma:</a:t>
             </a:r>
           </a:p>
@@ -5064,6 +6430,7 @@
               <a:defRPr sz="1700"/>
             </a:pPr>
             <a:r>
+              <a:rPr sz="1600"/>
               <a:t>    • Slaytı kelimesi kelimesine okuma</a:t>
             </a:r>
           </a:p>
@@ -5075,6 +6442,7 @@
               <a:defRPr sz="1700"/>
             </a:pPr>
             <a:r>
+              <a:rPr sz="1600"/>
               <a:t>    • Hızlı konuşma</a:t>
             </a:r>
           </a:p>
@@ -5086,6 +6454,7 @@
               <a:defRPr sz="1700"/>
             </a:pPr>
             <a:r>
+              <a:rPr sz="1600"/>
               <a:t>    • İzleyiciye sırt dönme</a:t>
             </a:r>
           </a:p>
@@ -5660,4 +7029,324 @@
   </a:objectDefaults>
   <a:extraClrSchemeLst/>
 </a:theme>
+</file>
+
+<file path=ppt/theme/theme2.xml><?xml version="1.0" encoding="utf-8"?>
+<a:theme xmlns:a="http://schemas.openxmlformats.org/drawingml/2006/main" name="Office Theme">
+  <a:themeElements>
+    <a:clrScheme name="Office">
+      <a:dk1>
+        <a:sysClr val="windowText" lastClr="000000"/>
+      </a:dk1>
+      <a:lt1>
+        <a:sysClr val="window" lastClr="FFFFFF"/>
+      </a:lt1>
+      <a:dk2>
+        <a:srgbClr val="1F497D"/>
+      </a:dk2>
+      <a:lt2>
+        <a:srgbClr val="EEECE1"/>
+      </a:lt2>
+      <a:accent1>
+        <a:srgbClr val="4F81BD"/>
+      </a:accent1>
+      <a:accent2>
+        <a:srgbClr val="C0504D"/>
+      </a:accent2>
+      <a:accent3>
+        <a:srgbClr val="9BBB59"/>
+      </a:accent3>
+      <a:accent4>
+        <a:srgbClr val="8064A2"/>
+      </a:accent4>
+      <a:accent5>
+        <a:srgbClr val="4BACC6"/>
+      </a:accent5>
+      <a:accent6>
+        <a:srgbClr val="F79646"/>
+      </a:accent6>
+      <a:hlink>
+        <a:srgbClr val="0000FF"/>
+      </a:hlink>
+      <a:folHlink>
+        <a:srgbClr val="800080"/>
+      </a:folHlink>
+    </a:clrScheme>
+    <a:fontScheme name="Office">
+      <a:majorFont>
+        <a:latin typeface="Calibri"/>
+        <a:ea typeface=""/>
+        <a:cs typeface=""/>
+        <a:font script="Jpan" typeface="ＭＳ Ｐゴシック"/>
+        <a:font script="Hang" typeface="맑은 고딕"/>
+        <a:font script="Hans" typeface="宋体"/>
+        <a:font script="Hant" typeface="新細明體"/>
+        <a:font script="Arab" typeface="Times New Roman"/>
+        <a:font script="Hebr" typeface="Times New Roman"/>
+        <a:font script="Thai" typeface="Angsana New"/>
+        <a:font script="Ethi" typeface="Nyala"/>
+        <a:font script="Beng" typeface="Vrinda"/>
+        <a:font script="Gujr" typeface="Shruti"/>
+        <a:font script="Khmr" typeface="MoolBoran"/>
+        <a:font script="Knda" typeface="Tunga"/>
+        <a:font script="Guru" typeface="Raavi"/>
+        <a:font script="Cans" typeface="Euphemia"/>
+        <a:font script="Cher" typeface="Plantagenet Cherokee"/>
+        <a:font script="Yiii" typeface="Microsoft Yi Baiti"/>
+        <a:font script="Tibt" typeface="Microsoft Himalaya"/>
+        <a:font script="Thaa" typeface="MV Boli"/>
+        <a:font script="Deva" typeface="Mangal"/>
+        <a:font script="Telu" typeface="Gautami"/>
+        <a:font script="Taml" typeface="Latha"/>
+        <a:font script="Syrc" typeface="Estrangelo Edessa"/>
+        <a:font script="Orya" typeface="Kalinga"/>
+        <a:font script="Mlym" typeface="Kartika"/>
+        <a:font script="Laoo" typeface="DokChampa"/>
+        <a:font script="Sinh" typeface="Iskoola Pota"/>
+        <a:font script="Mong" typeface="Mongolian Baiti"/>
+        <a:font script="Viet" typeface="Times New Roman"/>
+        <a:font script="Uigh" typeface="Microsoft Uighur"/>
+        <a:font script="Geor" typeface="Sylfaen"/>
+      </a:majorFont>
+      <a:minorFont>
+        <a:latin typeface="Calibri"/>
+        <a:ea typeface=""/>
+        <a:cs typeface=""/>
+        <a:font script="Jpan" typeface="ＭＳ Ｐゴシック"/>
+        <a:font script="Hang" typeface="맑은 고딕"/>
+        <a:font script="Hans" typeface="宋体"/>
+        <a:font script="Hant" typeface="新細明體"/>
+        <a:font script="Arab" typeface="Arial"/>
+        <a:font script="Hebr" typeface="Arial"/>
+        <a:font script="Thai" typeface="Cordia New"/>
+        <a:font script="Ethi" typeface="Nyala"/>
+        <a:font script="Beng" typeface="Vrinda"/>
+        <a:font script="Gujr" typeface="Shruti"/>
+        <a:font script="Khmr" typeface="DaunPenh"/>
+        <a:font script="Knda" typeface="Tunga"/>
+        <a:font script="Guru" typeface="Raavi"/>
+        <a:font script="Cans" typeface="Euphemia"/>
+        <a:font script="Cher" typeface="Plantagenet Cherokee"/>
+        <a:font script="Yiii" typeface="Microsoft Yi Baiti"/>
+        <a:font script="Tibt" typeface="Microsoft Himalaya"/>
+        <a:font script="Thaa" typeface="MV Boli"/>
+        <a:font script="Deva" typeface="Mangal"/>
+        <a:font script="Telu" typeface="Gautami"/>
+        <a:font script="Taml" typeface="Latha"/>
+        <a:font script="Syrc" typeface="Estrangelo Edessa"/>
+        <a:font script="Orya" typeface="Kalinga"/>
+        <a:font script="Mlym" typeface="Kartika"/>
+        <a:font script="Laoo" typeface="DokChampa"/>
+        <a:font script="Sinh" typeface="Iskoola Pota"/>
+        <a:font script="Mong" typeface="Mongolian Baiti"/>
+        <a:font script="Viet" typeface="Arial"/>
+        <a:font script="Uigh" typeface="Microsoft Uighur"/>
+        <a:font script="Geor" typeface="Sylfaen"/>
+      </a:minorFont>
+    </a:fontScheme>
+    <a:fmtScheme name="Office">
+      <a:fillStyleLst>
+        <a:solidFill>
+          <a:schemeClr val="phClr"/>
+        </a:solidFill>
+        <a:gradFill rotWithShape="1">
+          <a:gsLst>
+            <a:gs pos="0">
+              <a:schemeClr val="phClr">
+                <a:tint val="50000"/>
+                <a:satMod val="300000"/>
+              </a:schemeClr>
+            </a:gs>
+            <a:gs pos="35000">
+              <a:schemeClr val="phClr">
+                <a:tint val="37000"/>
+                <a:satMod val="300000"/>
+              </a:schemeClr>
+            </a:gs>
+            <a:gs pos="100000">
+              <a:schemeClr val="phClr">
+                <a:tint val="15000"/>
+                <a:satMod val="350000"/>
+              </a:schemeClr>
+            </a:gs>
+          </a:gsLst>
+          <a:lin ang="16200000" scaled="1"/>
+        </a:gradFill>
+        <a:gradFill rotWithShape="1">
+          <a:gsLst>
+            <a:gs pos="0">
+              <a:schemeClr val="phClr">
+                <a:tint val="100000"/>
+                <a:shade val="100000"/>
+                <a:satMod val="130000"/>
+              </a:schemeClr>
+            </a:gs>
+            <a:gs pos="100000">
+              <a:schemeClr val="phClr">
+                <a:tint val="50000"/>
+                <a:shade val="100000"/>
+                <a:satMod val="350000"/>
+              </a:schemeClr>
+            </a:gs>
+          </a:gsLst>
+          <a:lin ang="16200000" scaled="0"/>
+        </a:gradFill>
+      </a:fillStyleLst>
+      <a:lnStyleLst>
+        <a:ln w="9525" cap="flat" cmpd="sng" algn="ctr">
+          <a:solidFill>
+            <a:schemeClr val="phClr">
+              <a:shade val="95000"/>
+              <a:satMod val="105000"/>
+            </a:schemeClr>
+          </a:solidFill>
+          <a:prstDash val="solid"/>
+        </a:ln>
+        <a:ln w="25400" cap="flat" cmpd="sng" algn="ctr">
+          <a:solidFill>
+            <a:schemeClr val="phClr"/>
+          </a:solidFill>
+          <a:prstDash val="solid"/>
+        </a:ln>
+        <a:ln w="38100" cap="flat" cmpd="sng" algn="ctr">
+          <a:solidFill>
+            <a:schemeClr val="phClr"/>
+          </a:solidFill>
+          <a:prstDash val="solid"/>
+        </a:ln>
+      </a:lnStyleLst>
+      <a:effectStyleLst>
+        <a:effectStyle>
+          <a:effectLst>
+            <a:outerShdw blurRad="40000" dist="20000" dir="5400000" rotWithShape="0">
+              <a:srgbClr val="000000">
+                <a:alpha val="38000"/>
+              </a:srgbClr>
+            </a:outerShdw>
+          </a:effectLst>
+        </a:effectStyle>
+        <a:effectStyle>
+          <a:effectLst>
+            <a:outerShdw blurRad="40000" dist="23000" dir="5400000" rotWithShape="0">
+              <a:srgbClr val="000000">
+                <a:alpha val="35000"/>
+              </a:srgbClr>
+            </a:outerShdw>
+          </a:effectLst>
+        </a:effectStyle>
+        <a:effectStyle>
+          <a:effectLst>
+            <a:outerShdw blurRad="40000" dist="23000" dir="5400000" rotWithShape="0">
+              <a:srgbClr val="000000">
+                <a:alpha val="35000"/>
+              </a:srgbClr>
+            </a:outerShdw>
+          </a:effectLst>
+          <a:scene3d>
+            <a:camera prst="orthographicFront">
+              <a:rot lat="0" lon="0" rev="0"/>
+            </a:camera>
+            <a:lightRig rig="threePt" dir="t">
+              <a:rot lat="0" lon="0" rev="1200000"/>
+            </a:lightRig>
+          </a:scene3d>
+          <a:sp3d>
+            <a:bevelT w="63500" h="25400"/>
+          </a:sp3d>
+        </a:effectStyle>
+      </a:effectStyleLst>
+      <a:bgFillStyleLst>
+        <a:solidFill>
+          <a:schemeClr val="phClr"/>
+        </a:solidFill>
+        <a:gradFill rotWithShape="1">
+          <a:gsLst>
+            <a:gs pos="0">
+              <a:schemeClr val="phClr">
+                <a:tint val="40000"/>
+                <a:satMod val="350000"/>
+              </a:schemeClr>
+            </a:gs>
+            <a:gs pos="40000">
+              <a:schemeClr val="phClr">
+                <a:tint val="45000"/>
+                <a:shade val="99000"/>
+                <a:satMod val="350000"/>
+              </a:schemeClr>
+            </a:gs>
+            <a:gs pos="100000">
+              <a:schemeClr val="phClr">
+                <a:shade val="20000"/>
+                <a:satMod val="255000"/>
+              </a:schemeClr>
+            </a:gs>
+          </a:gsLst>
+          <a:path path="circle">
+            <a:fillToRect l="50000" t="-80000" r="50000" b="180000"/>
+          </a:path>
+        </a:gradFill>
+        <a:gradFill rotWithShape="1">
+          <a:gsLst>
+            <a:gs pos="0">
+              <a:schemeClr val="phClr">
+                <a:tint val="80000"/>
+                <a:satMod val="300000"/>
+              </a:schemeClr>
+            </a:gs>
+            <a:gs pos="100000">
+              <a:schemeClr val="phClr">
+                <a:shade val="30000"/>
+                <a:satMod val="200000"/>
+              </a:schemeClr>
+            </a:gs>
+          </a:gsLst>
+          <a:path path="circle">
+            <a:fillToRect l="50000" t="50000" r="50000" b="50000"/>
+          </a:path>
+        </a:gradFill>
+      </a:bgFillStyleLst>
+    </a:fmtScheme>
+  </a:themeElements>
+  <a:objectDefaults>
+    <a:spDef>
+      <a:spPr/>
+      <a:bodyPr/>
+      <a:lstStyle/>
+      <a:style>
+        <a:lnRef idx="1">
+          <a:schemeClr val="accent1"/>
+        </a:lnRef>
+        <a:fillRef idx="3">
+          <a:schemeClr val="accent1"/>
+        </a:fillRef>
+        <a:effectRef idx="2">
+          <a:schemeClr val="accent1"/>
+        </a:effectRef>
+        <a:fontRef idx="minor">
+          <a:schemeClr val="lt1"/>
+        </a:fontRef>
+      </a:style>
+    </a:spDef>
+    <a:lnDef>
+      <a:spPr/>
+      <a:bodyPr/>
+      <a:lstStyle/>
+      <a:style>
+        <a:lnRef idx="2">
+          <a:schemeClr val="accent1"/>
+        </a:lnRef>
+        <a:fillRef idx="0">
+          <a:schemeClr val="accent1"/>
+        </a:fillRef>
+        <a:effectRef idx="1">
+          <a:schemeClr val="accent1"/>
+        </a:effectRef>
+        <a:fontRef idx="minor">
+          <a:schemeClr val="tx1"/>
+        </a:fontRef>
+      </a:style>
+    </a:lnDef>
+  </a:objectDefaults>
+  <a:extraClrSchemeLst/>
+</a:theme>
 </file>
--- a/sunumlar/6-sinif-unite5-sunum-programlari-DETAYLI.pptx
+++ b/sunumlar/6-sinif-unite5-sunum-programlari-DETAYLI.pptx
@@ -4448,7 +4448,7 @@
           <a:noFill/>
         </p:spPr>
         <p:txBody>
-          <a:bodyPr wrap="none">
+          <a:bodyPr wrap="square">
             <a:spAutoFit/>
           </a:bodyPr>
           <a:lstStyle/>
@@ -4483,7 +4483,7 @@
           <a:noFill/>
         </p:spPr>
         <p:txBody>
-          <a:bodyPr wrap="none">
+          <a:bodyPr wrap="square">
             <a:spAutoFit/>
           </a:bodyPr>
           <a:lstStyle/>
@@ -4531,7 +4531,7 @@
         </p:nvSpPr>
         <p:spPr/>
         <p:txBody>
-          <a:bodyPr/>
+          <a:bodyPr wrap="square"/>
           <a:lstStyle/>
           <a:p>
             <a:pPr>
@@ -4585,163 +4585,230 @@
             <a:spAutoFit/>
           </a:bodyPr>
           <a:lstStyle/>
-          <a:p/>
-          <a:p>
-            <a:pPr>
-              <a:spcAft>
-                <a:spcPts val="1000"/>
-              </a:spcAft>
-              <a:defRPr sz="1900"/>
-            </a:pPr>
-            <a:r>
+          <a:p>
+            <a:pPr>
+              <a:lnSpc>
+                <a:spcPct val="90000"/>
+              </a:lnSpc>
+              <a:spcAft>
+                <a:spcPts val="300"/>
+              </a:spcAft>
+            </a:pPr>
+          </a:p>
+          <a:p>
+            <a:pPr>
+              <a:lnSpc>
+                <a:spcPct val="90000"/>
+              </a:lnSpc>
+              <a:spcAft>
+                <a:spcPts val="300"/>
+              </a:spcAft>
+              <a:defRPr sz="1900"/>
+            </a:pPr>
+            <a:r>
+              <a:rPr sz="1500"/>
               <a:t>Bu ünitede neler öğreneceğiz?</a:t>
             </a:r>
           </a:p>
           <a:p>
             <a:pPr>
-              <a:spcAft>
-                <a:spcPts val="1000"/>
-              </a:spcAft>
-              <a:defRPr sz="1900"/>
-            </a:pPr>
-          </a:p>
-          <a:p>
-            <a:pPr>
-              <a:spcAft>
-                <a:spcPts val="1000"/>
-              </a:spcAft>
-              <a:defRPr sz="1900"/>
-            </a:pPr>
-            <a:r>
+              <a:lnSpc>
+                <a:spcPct val="90000"/>
+              </a:lnSpc>
+              <a:spcAft>
+                <a:spcPts val="300"/>
+              </a:spcAft>
+              <a:defRPr sz="1900"/>
+            </a:pPr>
+          </a:p>
+          <a:p>
+            <a:pPr>
+              <a:lnSpc>
+                <a:spcPct val="90000"/>
+              </a:lnSpc>
+              <a:spcAft>
+                <a:spcPts val="300"/>
+              </a:spcAft>
+              <a:defRPr sz="1900"/>
+            </a:pPr>
+            <a:r>
+              <a:rPr sz="1500"/>
               <a:t>✅ 1. Sunum Programları Nedir?</a:t>
             </a:r>
           </a:p>
           <a:p>
             <a:pPr>
-              <a:spcAft>
-                <a:spcPts val="1000"/>
-              </a:spcAft>
-              <a:defRPr sz="1900"/>
-            </a:pPr>
-            <a:r>
+              <a:lnSpc>
+                <a:spcPct val="90000"/>
+              </a:lnSpc>
+              <a:spcAft>
+                <a:spcPts val="300"/>
+              </a:spcAft>
+              <a:defRPr sz="1900"/>
+            </a:pPr>
+            <a:r>
+              <a:rPr sz="1500"/>
               <a:t>✅ 2. PowerPoint / Google Slides</a:t>
             </a:r>
           </a:p>
           <a:p>
             <a:pPr>
-              <a:spcAft>
-                <a:spcPts val="1000"/>
-              </a:spcAft>
-              <a:defRPr sz="1900"/>
-            </a:pPr>
-            <a:r>
+              <a:lnSpc>
+                <a:spcPct val="90000"/>
+              </a:lnSpc>
+              <a:spcAft>
+                <a:spcPts val="300"/>
+              </a:spcAft>
+              <a:defRPr sz="1900"/>
+            </a:pPr>
+            <a:r>
+              <a:rPr sz="1500"/>
               <a:t>✅ 3. Slayt Tasarımı</a:t>
             </a:r>
           </a:p>
           <a:p>
             <a:pPr>
-              <a:spcAft>
-                <a:spcPts val="1000"/>
-              </a:spcAft>
-              <a:defRPr sz="1900"/>
-            </a:pPr>
-            <a:r>
+              <a:lnSpc>
+                <a:spcPct val="90000"/>
+              </a:lnSpc>
+              <a:spcAft>
+                <a:spcPts val="300"/>
+              </a:spcAft>
+              <a:defRPr sz="1900"/>
+            </a:pPr>
+            <a:r>
+              <a:rPr sz="1500"/>
               <a:t>✅ 4. Metin ve Görsel Ekleme</a:t>
             </a:r>
           </a:p>
           <a:p>
             <a:pPr>
-              <a:spcAft>
-                <a:spcPts val="1000"/>
-              </a:spcAft>
-              <a:defRPr sz="1900"/>
-            </a:pPr>
-            <a:r>
+              <a:lnSpc>
+                <a:spcPct val="90000"/>
+              </a:lnSpc>
+              <a:spcAft>
+                <a:spcPts val="300"/>
+              </a:spcAft>
+              <a:defRPr sz="1900"/>
+            </a:pPr>
+            <a:r>
+              <a:rPr sz="1500"/>
               <a:t>✅ 5. Animasyonlar</a:t>
             </a:r>
           </a:p>
           <a:p>
             <a:pPr>
-              <a:spcAft>
-                <a:spcPts val="1000"/>
-              </a:spcAft>
-              <a:defRPr sz="1900"/>
-            </a:pPr>
-            <a:r>
+              <a:lnSpc>
+                <a:spcPct val="90000"/>
+              </a:lnSpc>
+              <a:spcAft>
+                <a:spcPts val="300"/>
+              </a:spcAft>
+              <a:defRPr sz="1900"/>
+            </a:pPr>
+            <a:r>
+              <a:rPr sz="1500"/>
               <a:t>✅ 6. Geçiş Efektleri</a:t>
             </a:r>
           </a:p>
           <a:p>
             <a:pPr>
-              <a:spcAft>
-                <a:spcPts val="1000"/>
-              </a:spcAft>
-              <a:defRPr sz="1900"/>
-            </a:pPr>
-            <a:r>
+              <a:lnSpc>
+                <a:spcPct val="90000"/>
+              </a:lnSpc>
+              <a:spcAft>
+                <a:spcPts val="300"/>
+              </a:spcAft>
+              <a:defRPr sz="1900"/>
+            </a:pPr>
+            <a:r>
+              <a:rPr sz="1500"/>
               <a:t>✅ 7. Multimedya Ekleme (Video, Ses)</a:t>
             </a:r>
           </a:p>
           <a:p>
             <a:pPr>
-              <a:spcAft>
-                <a:spcPts val="1000"/>
-              </a:spcAft>
-              <a:defRPr sz="1900"/>
-            </a:pPr>
-            <a:r>
+              <a:lnSpc>
+                <a:spcPct val="90000"/>
+              </a:lnSpc>
+              <a:spcAft>
+                <a:spcPts val="300"/>
+              </a:spcAft>
+              <a:defRPr sz="1900"/>
+            </a:pPr>
+            <a:r>
+              <a:rPr sz="1500"/>
               <a:t>✅ 8. Sunum Hazırlama İpuçları</a:t>
             </a:r>
           </a:p>
           <a:p>
             <a:pPr>
-              <a:spcAft>
-                <a:spcPts val="1000"/>
-              </a:spcAft>
-              <a:defRPr sz="1900"/>
-            </a:pPr>
-            <a:r>
+              <a:lnSpc>
+                <a:spcPct val="90000"/>
+              </a:lnSpc>
+              <a:spcAft>
+                <a:spcPts val="300"/>
+              </a:spcAft>
+              <a:defRPr sz="1900"/>
+            </a:pPr>
+            <a:r>
+              <a:rPr sz="1500"/>
               <a:t>✅ 9. Etkili Sunum Yapma</a:t>
             </a:r>
           </a:p>
           <a:p>
             <a:pPr>
-              <a:spcAft>
-                <a:spcPts val="1000"/>
-              </a:spcAft>
-              <a:defRPr sz="1900"/>
-            </a:pPr>
-            <a:r>
+              <a:lnSpc>
+                <a:spcPct val="90000"/>
+              </a:lnSpc>
+              <a:spcAft>
+                <a:spcPts val="300"/>
+              </a:spcAft>
+              <a:defRPr sz="1900"/>
+            </a:pPr>
+            <a:r>
+              <a:rPr sz="1500"/>
               <a:t>✅ 10. Proje: Araştırma Sunumu</a:t>
             </a:r>
           </a:p>
           <a:p>
             <a:pPr>
-              <a:spcAft>
-                <a:spcPts val="1000"/>
-              </a:spcAft>
-              <a:defRPr sz="1900"/>
-            </a:pPr>
-          </a:p>
-          <a:p>
-            <a:pPr>
-              <a:spcAft>
-                <a:spcPts val="1000"/>
-              </a:spcAft>
-              <a:defRPr sz="1900"/>
-            </a:pPr>
-            <a:r>
+              <a:lnSpc>
+                <a:spcPct val="90000"/>
+              </a:lnSpc>
+              <a:spcAft>
+                <a:spcPts val="300"/>
+              </a:spcAft>
+              <a:defRPr sz="1900"/>
+            </a:pPr>
+          </a:p>
+          <a:p>
+            <a:pPr>
+              <a:lnSpc>
+                <a:spcPct val="90000"/>
+              </a:lnSpc>
+              <a:spcAft>
+                <a:spcPts val="300"/>
+              </a:spcAft>
+              <a:defRPr sz="1900"/>
+            </a:pPr>
+            <a:r>
+              <a:rPr sz="1500"/>
               <a:t>⏰ Süre: 3 Hafta</a:t>
             </a:r>
           </a:p>
           <a:p>
             <a:pPr>
-              <a:spcAft>
-                <a:spcPts val="1000"/>
-              </a:spcAft>
-              <a:defRPr sz="1900"/>
-            </a:pPr>
-            <a:r>
+              <a:lnSpc>
+                <a:spcPct val="90000"/>
+              </a:lnSpc>
+              <a:spcAft>
+                <a:spcPts val="300"/>
+              </a:spcAft>
+              <a:defRPr sz="1900"/>
+            </a:pPr>
+            <a:r>
+              <a:rPr sz="1500"/>
               <a:t>🎯 Amaç: Etkili sunumlar hazırlamak!</a:t>
             </a:r>
           </a:p>
@@ -4777,7 +4844,7 @@
         </p:nvSpPr>
         <p:spPr/>
         <p:txBody>
-          <a:bodyPr/>
+          <a:bodyPr wrap="square"/>
           <a:lstStyle/>
           <a:p>
             <a:pPr>
@@ -4831,204 +4898,286 @@
             <a:spAutoFit/>
           </a:bodyPr>
           <a:lstStyle/>
-          <a:p/>
-          <a:p>
-            <a:pPr>
-              <a:spcAft>
-                <a:spcPts val="1000"/>
-              </a:spcAft>
-              <a:defRPr sz="1900"/>
-            </a:pPr>
-            <a:r>
+          <a:p>
+            <a:pPr>
+              <a:lnSpc>
+                <a:spcPct val="90000"/>
+              </a:lnSpc>
+              <a:spcAft>
+                <a:spcPts val="300"/>
+              </a:spcAft>
+            </a:pPr>
+          </a:p>
+          <a:p>
+            <a:pPr>
+              <a:lnSpc>
+                <a:spcPct val="90000"/>
+              </a:lnSpc>
+              <a:spcAft>
+                <a:spcPts val="300"/>
+              </a:spcAft>
+              <a:defRPr sz="1900"/>
+            </a:pPr>
+            <a:r>
+              <a:rPr sz="1500"/>
               <a:t>Sunum programı = Görsel sunumlar hazırlama aracı</a:t>
             </a:r>
           </a:p>
           <a:p>
             <a:pPr>
-              <a:spcAft>
-                <a:spcPts val="1000"/>
-              </a:spcAft>
-              <a:defRPr sz="1900"/>
-            </a:pPr>
-          </a:p>
-          <a:p>
-            <a:pPr>
-              <a:spcAft>
-                <a:spcPts val="1000"/>
-              </a:spcAft>
-              <a:defRPr sz="1900"/>
-            </a:pPr>
-            <a:r>
+              <a:lnSpc>
+                <a:spcPct val="90000"/>
+              </a:lnSpc>
+              <a:spcAft>
+                <a:spcPts val="300"/>
+              </a:spcAft>
+              <a:defRPr sz="1900"/>
+            </a:pPr>
+          </a:p>
+          <a:p>
+            <a:pPr>
+              <a:lnSpc>
+                <a:spcPct val="90000"/>
+              </a:lnSpc>
+              <a:spcAft>
+                <a:spcPts val="300"/>
+              </a:spcAft>
+              <a:defRPr sz="1900"/>
+            </a:pPr>
+            <a:r>
+              <a:rPr sz="1500"/>
               <a:t>✅ Popüler Programlar:</a:t>
             </a:r>
           </a:p>
           <a:p>
             <a:pPr lvl="1">
-              <a:spcAft>
-                <a:spcPts val="1000"/>
+              <a:lnSpc>
+                <a:spcPct val="90000"/>
+              </a:lnSpc>
+              <a:spcAft>
+                <a:spcPts val="300"/>
               </a:spcAft>
               <a:defRPr sz="1700"/>
             </a:pPr>
             <a:r>
+              <a:rPr sz="1500"/>
               <a:t>    • Microsoft PowerPoint (ücretli)</a:t>
             </a:r>
           </a:p>
           <a:p>
             <a:pPr lvl="1">
-              <a:spcAft>
-                <a:spcPts val="1000"/>
+              <a:lnSpc>
+                <a:spcPct val="90000"/>
+              </a:lnSpc>
+              <a:spcAft>
+                <a:spcPts val="300"/>
               </a:spcAft>
               <a:defRPr sz="1700"/>
             </a:pPr>
             <a:r>
+              <a:rPr sz="1500"/>
               <a:t>    • Google Slides (ücretsiz)</a:t>
             </a:r>
           </a:p>
           <a:p>
             <a:pPr lvl="1">
-              <a:spcAft>
-                <a:spcPts val="1000"/>
+              <a:lnSpc>
+                <a:spcPct val="90000"/>
+              </a:lnSpc>
+              <a:spcAft>
+                <a:spcPts val="300"/>
               </a:spcAft>
               <a:defRPr sz="1700"/>
             </a:pPr>
             <a:r>
+              <a:rPr sz="1500"/>
               <a:t>    • Canva (online)</a:t>
             </a:r>
           </a:p>
           <a:p>
             <a:pPr lvl="1">
-              <a:spcAft>
-                <a:spcPts val="1000"/>
+              <a:lnSpc>
+                <a:spcPct val="90000"/>
+              </a:lnSpc>
+              <a:spcAft>
+                <a:spcPts val="300"/>
               </a:spcAft>
               <a:defRPr sz="1700"/>
             </a:pPr>
             <a:r>
+              <a:rPr sz="1500"/>
               <a:t>    • Prezi (farklı format)</a:t>
             </a:r>
           </a:p>
           <a:p>
             <a:pPr>
-              <a:spcAft>
-                <a:spcPts val="1000"/>
-              </a:spcAft>
-              <a:defRPr sz="1900"/>
-            </a:pPr>
-          </a:p>
-          <a:p>
-            <a:pPr>
-              <a:spcAft>
-                <a:spcPts val="1000"/>
-              </a:spcAft>
-              <a:defRPr sz="1900"/>
-            </a:pPr>
-            <a:r>
+              <a:lnSpc>
+                <a:spcPct val="90000"/>
+              </a:lnSpc>
+              <a:spcAft>
+                <a:spcPts val="300"/>
+              </a:spcAft>
+              <a:defRPr sz="1900"/>
+            </a:pPr>
+          </a:p>
+          <a:p>
+            <a:pPr>
+              <a:lnSpc>
+                <a:spcPct val="90000"/>
+              </a:lnSpc>
+              <a:spcAft>
+                <a:spcPts val="300"/>
+              </a:spcAft>
+              <a:defRPr sz="1900"/>
+            </a:pPr>
+            <a:r>
+              <a:rPr sz="1500"/>
               <a:t>📌 Ne İçin Kullanılır?</a:t>
             </a:r>
           </a:p>
           <a:p>
             <a:pPr lvl="1">
-              <a:spcAft>
-                <a:spcPts val="1000"/>
+              <a:lnSpc>
+                <a:spcPct val="90000"/>
+              </a:lnSpc>
+              <a:spcAft>
+                <a:spcPts val="300"/>
               </a:spcAft>
               <a:defRPr sz="1700"/>
             </a:pPr>
             <a:r>
+              <a:rPr sz="1500"/>
               <a:t>    • Ders sunumları</a:t>
             </a:r>
           </a:p>
           <a:p>
             <a:pPr lvl="1">
-              <a:spcAft>
-                <a:spcPts val="1000"/>
+              <a:lnSpc>
+                <a:spcPct val="90000"/>
+              </a:lnSpc>
+              <a:spcAft>
+                <a:spcPts val="300"/>
               </a:spcAft>
               <a:defRPr sz="1700"/>
             </a:pPr>
             <a:r>
+              <a:rPr sz="1500"/>
               <a:t>    • Proje tanıtımı</a:t>
             </a:r>
           </a:p>
           <a:p>
             <a:pPr lvl="1">
-              <a:spcAft>
-                <a:spcPts val="1000"/>
+              <a:lnSpc>
+                <a:spcPct val="90000"/>
+              </a:lnSpc>
+              <a:spcAft>
+                <a:spcPts val="300"/>
               </a:spcAft>
               <a:defRPr sz="1700"/>
             </a:pPr>
             <a:r>
+              <a:rPr sz="1500"/>
               <a:t>    • Rapor sunumu</a:t>
             </a:r>
           </a:p>
           <a:p>
             <a:pPr lvl="1">
-              <a:spcAft>
-                <a:spcPts val="1000"/>
+              <a:lnSpc>
+                <a:spcPct val="90000"/>
+              </a:lnSpc>
+              <a:spcAft>
+                <a:spcPts val="300"/>
               </a:spcAft>
               <a:defRPr sz="1700"/>
             </a:pPr>
             <a:r>
+              <a:rPr sz="1500"/>
               <a:t>    • Eğitim materyali</a:t>
             </a:r>
           </a:p>
           <a:p>
             <a:pPr>
-              <a:spcAft>
-                <a:spcPts val="1000"/>
-              </a:spcAft>
-              <a:defRPr sz="1900"/>
-            </a:pPr>
-          </a:p>
-          <a:p>
-            <a:pPr>
-              <a:spcAft>
-                <a:spcPts val="1000"/>
-              </a:spcAft>
-              <a:defRPr sz="1900"/>
-            </a:pPr>
-            <a:r>
+              <a:lnSpc>
+                <a:spcPct val="90000"/>
+              </a:lnSpc>
+              <a:spcAft>
+                <a:spcPts val="300"/>
+              </a:spcAft>
+              <a:defRPr sz="1900"/>
+            </a:pPr>
+          </a:p>
+          <a:p>
+            <a:pPr>
+              <a:lnSpc>
+                <a:spcPct val="90000"/>
+              </a:lnSpc>
+              <a:spcAft>
+                <a:spcPts val="300"/>
+              </a:spcAft>
+              <a:defRPr sz="1900"/>
+            </a:pPr>
+            <a:r>
+              <a:rPr sz="1500"/>
               <a:t>💡 İyi bir sunum:</a:t>
             </a:r>
           </a:p>
           <a:p>
             <a:pPr lvl="1">
-              <a:spcAft>
-                <a:spcPts val="1000"/>
+              <a:lnSpc>
+                <a:spcPct val="90000"/>
+              </a:lnSpc>
+              <a:spcAft>
+                <a:spcPts val="300"/>
               </a:spcAft>
               <a:defRPr sz="1700"/>
             </a:pPr>
             <a:r>
+              <a:rPr sz="1500"/>
               <a:t>    • Görsel</a:t>
             </a:r>
           </a:p>
           <a:p>
             <a:pPr lvl="1">
-              <a:spcAft>
-                <a:spcPts val="1000"/>
+              <a:lnSpc>
+                <a:spcPct val="90000"/>
+              </a:lnSpc>
+              <a:spcAft>
+                <a:spcPts val="300"/>
               </a:spcAft>
               <a:defRPr sz="1700"/>
             </a:pPr>
             <a:r>
+              <a:rPr sz="1500"/>
               <a:t>    • Net</a:t>
             </a:r>
           </a:p>
           <a:p>
             <a:pPr lvl="1">
-              <a:spcAft>
-                <a:spcPts val="1000"/>
+              <a:lnSpc>
+                <a:spcPct val="90000"/>
+              </a:lnSpc>
+              <a:spcAft>
+                <a:spcPts val="300"/>
               </a:spcAft>
               <a:defRPr sz="1700"/>
             </a:pPr>
             <a:r>
+              <a:rPr sz="1500"/>
               <a:t>    • Özlü</a:t>
             </a:r>
           </a:p>
           <a:p>
             <a:pPr lvl="1">
-              <a:spcAft>
-                <a:spcPts val="1000"/>
+              <a:lnSpc>
+                <a:spcPct val="90000"/>
+              </a:lnSpc>
+              <a:spcAft>
+                <a:spcPts val="300"/>
               </a:spcAft>
               <a:defRPr sz="1700"/>
             </a:pPr>
             <a:r>
+              <a:rPr sz="1500"/>
               <a:t>    • Etkili</a:t>
             </a:r>
           </a:p>
@@ -5064,7 +5213,7 @@
         </p:nvSpPr>
         <p:spPr/>
         <p:txBody>
-          <a:bodyPr/>
+          <a:bodyPr wrap="square"/>
           <a:lstStyle/>
           <a:p>
             <a:pPr>
@@ -5118,280 +5267,364 @@
             <a:spAutoFit/>
           </a:bodyPr>
           <a:lstStyle/>
-          <a:p/>
-          <a:p>
-            <a:pPr>
-              <a:spcAft>
-                <a:spcPts val="1000"/>
-              </a:spcAft>
-              <a:defRPr sz="1900"/>
-            </a:pPr>
-            <a:r>
-              <a:rPr sz="1600"/>
+          <a:p>
+            <a:pPr>
+              <a:lnSpc>
+                <a:spcPct val="90000"/>
+              </a:lnSpc>
+              <a:spcAft>
+                <a:spcPts val="300"/>
+              </a:spcAft>
+            </a:pPr>
+          </a:p>
+          <a:p>
+            <a:pPr>
+              <a:lnSpc>
+                <a:spcPct val="90000"/>
+              </a:lnSpc>
+              <a:spcAft>
+                <a:spcPts val="300"/>
+              </a:spcAft>
+              <a:defRPr sz="1900"/>
+            </a:pPr>
+            <a:r>
+              <a:rPr sz="1400"/>
               <a:t>Güzel ve etkili slayt nasıl olur?</a:t>
             </a:r>
           </a:p>
           <a:p>
             <a:pPr>
-              <a:spcAft>
-                <a:spcPts val="1000"/>
-              </a:spcAft>
-              <a:defRPr sz="1900"/>
-            </a:pPr>
-          </a:p>
-          <a:p>
-            <a:pPr>
-              <a:spcAft>
-                <a:spcPts val="1000"/>
-              </a:spcAft>
-              <a:defRPr sz="1900"/>
-            </a:pPr>
-            <a:r>
-              <a:rPr sz="1600"/>
+              <a:lnSpc>
+                <a:spcPct val="90000"/>
+              </a:lnSpc>
+              <a:spcAft>
+                <a:spcPts val="300"/>
+              </a:spcAft>
+              <a:defRPr sz="1900"/>
+            </a:pPr>
+          </a:p>
+          <a:p>
+            <a:pPr>
+              <a:lnSpc>
+                <a:spcPct val="90000"/>
+              </a:lnSpc>
+              <a:spcAft>
+                <a:spcPts val="300"/>
+              </a:spcAft>
+              <a:defRPr sz="1900"/>
+            </a:pPr>
+            <a:r>
+              <a:rPr sz="1400"/>
               <a:t>✅ Tasarım İlkeleri:</a:t>
             </a:r>
           </a:p>
           <a:p>
             <a:pPr>
-              <a:spcAft>
-                <a:spcPts val="1000"/>
-              </a:spcAft>
-              <a:defRPr sz="1900"/>
-            </a:pPr>
-          </a:p>
-          <a:p>
-            <a:pPr>
-              <a:spcAft>
-                <a:spcPts val="1000"/>
-              </a:spcAft>
-              <a:defRPr sz="1900"/>
-            </a:pPr>
-            <a:r>
-              <a:rPr sz="1600"/>
+              <a:lnSpc>
+                <a:spcPct val="90000"/>
+              </a:lnSpc>
+              <a:spcAft>
+                <a:spcPts val="300"/>
+              </a:spcAft>
+              <a:defRPr sz="1900"/>
+            </a:pPr>
+          </a:p>
+          <a:p>
+            <a:pPr>
+              <a:lnSpc>
+                <a:spcPct val="90000"/>
+              </a:lnSpc>
+              <a:spcAft>
+                <a:spcPts val="300"/>
+              </a:spcAft>
+              <a:defRPr sz="1900"/>
+            </a:pPr>
+            <a:r>
+              <a:rPr sz="1400"/>
               <a:t>🎯 Basitlik:</a:t>
             </a:r>
           </a:p>
           <a:p>
             <a:pPr lvl="1">
-              <a:spcAft>
-                <a:spcPts val="1000"/>
+              <a:lnSpc>
+                <a:spcPct val="90000"/>
+              </a:lnSpc>
+              <a:spcAft>
+                <a:spcPts val="300"/>
               </a:spcAft>
               <a:defRPr sz="1700"/>
             </a:pPr>
             <a:r>
-              <a:rPr sz="1600"/>
+              <a:rPr sz="1400"/>
               <a:t>    • Her slayt 1 ana fikir</a:t>
             </a:r>
           </a:p>
           <a:p>
             <a:pPr lvl="1">
-              <a:spcAft>
-                <a:spcPts val="1000"/>
+              <a:lnSpc>
+                <a:spcPct val="90000"/>
+              </a:lnSpc>
+              <a:spcAft>
+                <a:spcPts val="300"/>
               </a:spcAft>
               <a:defRPr sz="1700"/>
             </a:pPr>
             <a:r>
-              <a:rPr sz="1600"/>
+              <a:rPr sz="1400"/>
               <a:t>    • Çok metin kullanma</a:t>
             </a:r>
           </a:p>
           <a:p>
             <a:pPr lvl="1">
-              <a:spcAft>
-                <a:spcPts val="1000"/>
+              <a:lnSpc>
+                <a:spcPct val="90000"/>
+              </a:lnSpc>
+              <a:spcAft>
+                <a:spcPts val="300"/>
               </a:spcAft>
               <a:defRPr sz="1700"/>
             </a:pPr>
             <a:r>
-              <a:rPr sz="1600"/>
+              <a:rPr sz="1400"/>
               <a:t>    • Boşluk bırak</a:t>
             </a:r>
           </a:p>
           <a:p>
             <a:pPr>
-              <a:spcAft>
-                <a:spcPts val="1000"/>
-              </a:spcAft>
-              <a:defRPr sz="1900"/>
-            </a:pPr>
-          </a:p>
-          <a:p>
-            <a:pPr>
-              <a:spcAft>
-                <a:spcPts val="1000"/>
-              </a:spcAft>
-              <a:defRPr sz="1900"/>
-            </a:pPr>
-            <a:r>
-              <a:rPr sz="1600"/>
+              <a:lnSpc>
+                <a:spcPct val="90000"/>
+              </a:lnSpc>
+              <a:spcAft>
+                <a:spcPts val="300"/>
+              </a:spcAft>
+              <a:defRPr sz="1900"/>
+            </a:pPr>
+          </a:p>
+          <a:p>
+            <a:pPr>
+              <a:lnSpc>
+                <a:spcPct val="90000"/>
+              </a:lnSpc>
+              <a:spcAft>
+                <a:spcPts val="300"/>
+              </a:spcAft>
+              <a:defRPr sz="1900"/>
+            </a:pPr>
+            <a:r>
+              <a:rPr sz="1400"/>
               <a:t>🌈 Renk Uyumu:</a:t>
             </a:r>
           </a:p>
           <a:p>
             <a:pPr lvl="1">
-              <a:spcAft>
-                <a:spcPts val="1000"/>
+              <a:lnSpc>
+                <a:spcPct val="90000"/>
+              </a:lnSpc>
+              <a:spcAft>
+                <a:spcPts val="300"/>
               </a:spcAft>
               <a:defRPr sz="1700"/>
             </a:pPr>
             <a:r>
-              <a:rPr sz="1600"/>
+              <a:rPr sz="1400"/>
               <a:t>    • 3-4 renk kullan</a:t>
             </a:r>
           </a:p>
           <a:p>
             <a:pPr lvl="1">
-              <a:spcAft>
-                <a:spcPts val="1000"/>
+              <a:lnSpc>
+                <a:spcPct val="90000"/>
+              </a:lnSpc>
+              <a:spcAft>
+                <a:spcPts val="300"/>
               </a:spcAft>
               <a:defRPr sz="1700"/>
             </a:pPr>
             <a:r>
-              <a:rPr sz="1600"/>
+              <a:rPr sz="1400"/>
               <a:t>    • Kontrast önemli (açık arka plan + koyu metin)</a:t>
             </a:r>
           </a:p>
           <a:p>
             <a:pPr>
-              <a:spcAft>
-                <a:spcPts val="1000"/>
-              </a:spcAft>
-              <a:defRPr sz="1900"/>
-            </a:pPr>
-          </a:p>
-          <a:p>
-            <a:pPr>
-              <a:spcAft>
-                <a:spcPts val="1000"/>
-              </a:spcAft>
-              <a:defRPr sz="1900"/>
-            </a:pPr>
-            <a:r>
-              <a:rPr sz="1600"/>
+              <a:lnSpc>
+                <a:spcPct val="90000"/>
+              </a:lnSpc>
+              <a:spcAft>
+                <a:spcPts val="300"/>
+              </a:spcAft>
+              <a:defRPr sz="1900"/>
+            </a:pPr>
+          </a:p>
+          <a:p>
+            <a:pPr>
+              <a:lnSpc>
+                <a:spcPct val="90000"/>
+              </a:lnSpc>
+              <a:spcAft>
+                <a:spcPts val="300"/>
+              </a:spcAft>
+              <a:defRPr sz="1900"/>
+            </a:pPr>
+            <a:r>
+              <a:rPr sz="1400"/>
               <a:t>🔤 Yazı Tipi:</a:t>
             </a:r>
           </a:p>
           <a:p>
             <a:pPr lvl="1">
-              <a:spcAft>
-                <a:spcPts val="1000"/>
+              <a:lnSpc>
+                <a:spcPct val="90000"/>
+              </a:lnSpc>
+              <a:spcAft>
+                <a:spcPts val="300"/>
               </a:spcAft>
               <a:defRPr sz="1700"/>
             </a:pPr>
             <a:r>
-              <a:rPr sz="1600"/>
+              <a:rPr sz="1400"/>
               <a:t>    • Okunabilir fontlar (Arial, Calibri)</a:t>
             </a:r>
           </a:p>
           <a:p>
             <a:pPr lvl="1">
-              <a:spcAft>
-                <a:spcPts val="1000"/>
+              <a:lnSpc>
+                <a:spcPct val="90000"/>
+              </a:lnSpc>
+              <a:spcAft>
+                <a:spcPts val="300"/>
               </a:spcAft>
               <a:defRPr sz="1700"/>
             </a:pPr>
             <a:r>
-              <a:rPr sz="1600"/>
+              <a:rPr sz="1400"/>
               <a:t>    • Başlık: 28-44 pt</a:t>
             </a:r>
           </a:p>
           <a:p>
             <a:pPr lvl="1">
-              <a:spcAft>
-                <a:spcPts val="1000"/>
+              <a:lnSpc>
+                <a:spcPct val="90000"/>
+              </a:lnSpc>
+              <a:spcAft>
+                <a:spcPts val="300"/>
               </a:spcAft>
               <a:defRPr sz="1700"/>
             </a:pPr>
             <a:r>
-              <a:rPr sz="1600"/>
+              <a:rPr sz="1400"/>
               <a:t>    • Metin: 18-24 pt</a:t>
             </a:r>
           </a:p>
           <a:p>
             <a:pPr>
-              <a:spcAft>
-                <a:spcPts val="1000"/>
-              </a:spcAft>
-              <a:defRPr sz="1900"/>
-            </a:pPr>
-          </a:p>
-          <a:p>
-            <a:pPr>
-              <a:spcAft>
-                <a:spcPts val="1000"/>
-              </a:spcAft>
-              <a:defRPr sz="1900"/>
-            </a:pPr>
-            <a:r>
-              <a:rPr sz="1600"/>
+              <a:lnSpc>
+                <a:spcPct val="90000"/>
+              </a:lnSpc>
+              <a:spcAft>
+                <a:spcPts val="300"/>
+              </a:spcAft>
+              <a:defRPr sz="1900"/>
+            </a:pPr>
+          </a:p>
+          <a:p>
+            <a:pPr>
+              <a:lnSpc>
+                <a:spcPct val="90000"/>
+              </a:lnSpc>
+              <a:spcAft>
+                <a:spcPts val="300"/>
+              </a:spcAft>
+              <a:defRPr sz="1900"/>
+            </a:pPr>
+            <a:r>
+              <a:rPr sz="1400"/>
               <a:t>🖼️ Görseller:</a:t>
             </a:r>
           </a:p>
           <a:p>
             <a:pPr lvl="1">
-              <a:spcAft>
-                <a:spcPts val="1000"/>
+              <a:lnSpc>
+                <a:spcPct val="90000"/>
+              </a:lnSpc>
+              <a:spcAft>
+                <a:spcPts val="300"/>
               </a:spcAft>
               <a:defRPr sz="1700"/>
             </a:pPr>
             <a:r>
-              <a:rPr sz="1600"/>
+              <a:rPr sz="1400"/>
               <a:t>    • Yüksek çözünürlük</a:t>
             </a:r>
           </a:p>
           <a:p>
             <a:pPr lvl="1">
-              <a:spcAft>
-                <a:spcPts val="1000"/>
+              <a:lnSpc>
+                <a:spcPct val="90000"/>
+              </a:lnSpc>
+              <a:spcAft>
+                <a:spcPts val="300"/>
               </a:spcAft>
               <a:defRPr sz="1700"/>
             </a:pPr>
             <a:r>
-              <a:rPr sz="1600"/>
+              <a:rPr sz="1400"/>
               <a:t>    • Konuyla ilgili</a:t>
             </a:r>
           </a:p>
           <a:p>
             <a:pPr lvl="1">
-              <a:spcAft>
-                <a:spcPts val="1000"/>
+              <a:lnSpc>
+                <a:spcPct val="90000"/>
+              </a:lnSpc>
+              <a:spcAft>
+                <a:spcPts val="300"/>
               </a:spcAft>
               <a:defRPr sz="1700"/>
             </a:pPr>
             <a:r>
-              <a:rPr sz="1600"/>
+              <a:rPr sz="1400"/>
               <a:t>    • Telif haklarına dikkat</a:t>
             </a:r>
           </a:p>
           <a:p>
             <a:pPr>
-              <a:spcAft>
-                <a:spcPts val="1000"/>
-              </a:spcAft>
-              <a:defRPr sz="1900"/>
-            </a:pPr>
-          </a:p>
-          <a:p>
-            <a:pPr>
-              <a:spcAft>
-                <a:spcPts val="1000"/>
-              </a:spcAft>
-              <a:defRPr sz="1900"/>
-            </a:pPr>
-            <a:r>
-              <a:rPr sz="1600"/>
+              <a:lnSpc>
+                <a:spcPct val="90000"/>
+              </a:lnSpc>
+              <a:spcAft>
+                <a:spcPts val="300"/>
+              </a:spcAft>
+              <a:defRPr sz="1900"/>
+            </a:pPr>
+          </a:p>
+          <a:p>
+            <a:pPr>
+              <a:lnSpc>
+                <a:spcPct val="90000"/>
+              </a:lnSpc>
+              <a:spcAft>
+                <a:spcPts val="300"/>
+              </a:spcAft>
+              <a:defRPr sz="1900"/>
+            </a:pPr>
+            <a:r>
+              <a:rPr sz="1400"/>
               <a:t>💡 6-6 Kuralı:</a:t>
             </a:r>
           </a:p>
           <a:p>
             <a:pPr>
-              <a:spcAft>
-                <a:spcPts val="1000"/>
-              </a:spcAft>
-              <a:defRPr sz="1900"/>
-            </a:pPr>
-            <a:r>
-              <a:rPr sz="1600"/>
+              <a:lnSpc>
+                <a:spcPct val="90000"/>
+              </a:lnSpc>
+              <a:spcAft>
+                <a:spcPts val="300"/>
+              </a:spcAft>
+              <a:defRPr sz="1900"/>
+            </a:pPr>
+            <a:r>
+              <a:rPr sz="1400"/>
               <a:t>Slayt başına 6 madde, madde başına 6 kelime</a:t>
             </a:r>
           </a:p>
@@ -5427,7 +5660,7 @@
         </p:nvSpPr>
         <p:spPr/>
         <p:txBody>
-          <a:bodyPr/>
+          <a:bodyPr wrap="square"/>
           <a:lstStyle/>
           <a:p>
             <a:pPr>
@@ -5481,272 +5714,379 @@
             <a:spAutoFit/>
           </a:bodyPr>
           <a:lstStyle/>
-          <a:p/>
-          <a:p>
-            <a:pPr>
-              <a:spcAft>
-                <a:spcPts val="1000"/>
-              </a:spcAft>
-              <a:defRPr sz="1900"/>
-            </a:pPr>
-            <a:r>
+          <a:p>
+            <a:pPr>
+              <a:lnSpc>
+                <a:spcPct val="90000"/>
+              </a:lnSpc>
+              <a:spcAft>
+                <a:spcPts val="300"/>
+              </a:spcAft>
+            </a:pPr>
+          </a:p>
+          <a:p>
+            <a:pPr>
+              <a:lnSpc>
+                <a:spcPct val="90000"/>
+              </a:lnSpc>
+              <a:spcAft>
+                <a:spcPts val="300"/>
+              </a:spcAft>
+              <a:defRPr sz="1900"/>
+            </a:pPr>
+            <a:r>
+              <a:rPr sz="1500"/>
               <a:t>Slaytları canlı hale getir!</a:t>
             </a:r>
           </a:p>
           <a:p>
             <a:pPr>
-              <a:spcAft>
-                <a:spcPts val="1000"/>
-              </a:spcAft>
-              <a:defRPr sz="1900"/>
-            </a:pPr>
-          </a:p>
-          <a:p>
-            <a:pPr>
-              <a:spcAft>
-                <a:spcPts val="1000"/>
-              </a:spcAft>
-              <a:defRPr sz="1900"/>
-            </a:pPr>
-            <a:r>
+              <a:lnSpc>
+                <a:spcPct val="90000"/>
+              </a:lnSpc>
+              <a:spcAft>
+                <a:spcPts val="300"/>
+              </a:spcAft>
+              <a:defRPr sz="1900"/>
+            </a:pPr>
+          </a:p>
+          <a:p>
+            <a:pPr>
+              <a:lnSpc>
+                <a:spcPct val="90000"/>
+              </a:lnSpc>
+              <a:spcAft>
+                <a:spcPts val="300"/>
+              </a:spcAft>
+              <a:defRPr sz="1900"/>
+            </a:pPr>
+            <a:r>
+              <a:rPr sz="1500"/>
               <a:t>✅ Animasyon Türleri:</a:t>
             </a:r>
           </a:p>
           <a:p>
             <a:pPr>
-              <a:spcAft>
-                <a:spcPts val="1000"/>
-              </a:spcAft>
-              <a:defRPr sz="1900"/>
-            </a:pPr>
-          </a:p>
-          <a:p>
-            <a:pPr>
-              <a:spcAft>
-                <a:spcPts val="1000"/>
-              </a:spcAft>
-              <a:defRPr sz="1900"/>
-            </a:pPr>
-            <a:r>
+              <a:lnSpc>
+                <a:spcPct val="90000"/>
+              </a:lnSpc>
+              <a:spcAft>
+                <a:spcPts val="300"/>
+              </a:spcAft>
+              <a:defRPr sz="1900"/>
+            </a:pPr>
+          </a:p>
+          <a:p>
+            <a:pPr>
+              <a:lnSpc>
+                <a:spcPct val="90000"/>
+              </a:lnSpc>
+              <a:spcAft>
+                <a:spcPts val="300"/>
+              </a:spcAft>
+              <a:defRPr sz="1900"/>
+            </a:pPr>
+            <a:r>
+              <a:rPr sz="1500"/>
               <a:t>🎬 Giriş Animasyonları:</a:t>
             </a:r>
           </a:p>
           <a:p>
             <a:pPr lvl="1">
-              <a:spcAft>
-                <a:spcPts val="1000"/>
+              <a:lnSpc>
+                <a:spcPct val="90000"/>
+              </a:lnSpc>
+              <a:spcAft>
+                <a:spcPts val="300"/>
               </a:spcAft>
               <a:defRPr sz="1700"/>
             </a:pPr>
             <a:r>
+              <a:rPr sz="1500"/>
               <a:t>    • Belirme</a:t>
             </a:r>
           </a:p>
           <a:p>
             <a:pPr lvl="1">
-              <a:spcAft>
-                <a:spcPts val="1000"/>
+              <a:lnSpc>
+                <a:spcPct val="90000"/>
+              </a:lnSpc>
+              <a:spcAft>
+                <a:spcPts val="300"/>
               </a:spcAft>
               <a:defRPr sz="1700"/>
             </a:pPr>
             <a:r>
+              <a:rPr sz="1500"/>
               <a:t>    • Uçarak gelme</a:t>
             </a:r>
           </a:p>
           <a:p>
             <a:pPr lvl="1">
-              <a:spcAft>
-                <a:spcPts val="1000"/>
+              <a:lnSpc>
+                <a:spcPct val="90000"/>
+              </a:lnSpc>
+              <a:spcAft>
+                <a:spcPts val="300"/>
               </a:spcAft>
               <a:defRPr sz="1700"/>
             </a:pPr>
             <a:r>
+              <a:rPr sz="1500"/>
               <a:t>    • Kayarak gelme</a:t>
             </a:r>
           </a:p>
           <a:p>
             <a:pPr>
-              <a:spcAft>
-                <a:spcPts val="1000"/>
-              </a:spcAft>
-              <a:defRPr sz="1900"/>
-            </a:pPr>
-          </a:p>
-          <a:p>
-            <a:pPr>
-              <a:spcAft>
-                <a:spcPts val="1000"/>
-              </a:spcAft>
-              <a:defRPr sz="1900"/>
-            </a:pPr>
-            <a:r>
+              <a:lnSpc>
+                <a:spcPct val="90000"/>
+              </a:lnSpc>
+              <a:spcAft>
+                <a:spcPts val="300"/>
+              </a:spcAft>
+              <a:defRPr sz="1900"/>
+            </a:pPr>
+          </a:p>
+          <a:p>
+            <a:pPr>
+              <a:lnSpc>
+                <a:spcPct val="90000"/>
+              </a:lnSpc>
+              <a:spcAft>
+                <a:spcPts val="300"/>
+              </a:spcAft>
+              <a:defRPr sz="1900"/>
+            </a:pPr>
+            <a:r>
+              <a:rPr sz="1500"/>
               <a:t>🎭 Vurgu Animasyonları:</a:t>
             </a:r>
           </a:p>
           <a:p>
             <a:pPr lvl="1">
-              <a:spcAft>
-                <a:spcPts val="1000"/>
+              <a:lnSpc>
+                <a:spcPct val="90000"/>
+              </a:lnSpc>
+              <a:spcAft>
+                <a:spcPts val="300"/>
               </a:spcAft>
               <a:defRPr sz="1700"/>
             </a:pPr>
             <a:r>
+              <a:rPr sz="1500"/>
               <a:t>    • Büyütme/Küçültme</a:t>
             </a:r>
           </a:p>
           <a:p>
             <a:pPr lvl="1">
-              <a:spcAft>
-                <a:spcPts val="1000"/>
+              <a:lnSpc>
+                <a:spcPct val="90000"/>
+              </a:lnSpc>
+              <a:spcAft>
+                <a:spcPts val="300"/>
               </a:spcAft>
               <a:defRPr sz="1700"/>
             </a:pPr>
             <a:r>
+              <a:rPr sz="1500"/>
               <a:t>    • Döndürme</a:t>
             </a:r>
           </a:p>
           <a:p>
             <a:pPr lvl="1">
-              <a:spcAft>
-                <a:spcPts val="1000"/>
+              <a:lnSpc>
+                <a:spcPct val="90000"/>
+              </a:lnSpc>
+              <a:spcAft>
+                <a:spcPts val="300"/>
               </a:spcAft>
               <a:defRPr sz="1700"/>
             </a:pPr>
             <a:r>
+              <a:rPr sz="1500"/>
               <a:t>    • Renk değişimi</a:t>
             </a:r>
           </a:p>
           <a:p>
             <a:pPr>
-              <a:spcAft>
-                <a:spcPts val="1000"/>
-              </a:spcAft>
-              <a:defRPr sz="1900"/>
-            </a:pPr>
-          </a:p>
-          <a:p>
-            <a:pPr>
-              <a:spcAft>
-                <a:spcPts val="1000"/>
-              </a:spcAft>
-              <a:defRPr sz="1900"/>
-            </a:pPr>
-            <a:r>
+              <a:lnSpc>
+                <a:spcPct val="90000"/>
+              </a:lnSpc>
+              <a:spcAft>
+                <a:spcPts val="300"/>
+              </a:spcAft>
+              <a:defRPr sz="1900"/>
+            </a:pPr>
+          </a:p>
+          <a:p>
+            <a:pPr>
+              <a:lnSpc>
+                <a:spcPct val="90000"/>
+              </a:lnSpc>
+              <a:spcAft>
+                <a:spcPts val="300"/>
+              </a:spcAft>
+              <a:defRPr sz="1900"/>
+            </a:pPr>
+            <a:r>
+              <a:rPr sz="1500"/>
               <a:t>🚀 Çıkış Animasyonları:</a:t>
             </a:r>
           </a:p>
           <a:p>
             <a:pPr lvl="1">
-              <a:spcAft>
-                <a:spcPts val="1000"/>
+              <a:lnSpc>
+                <a:spcPct val="90000"/>
+              </a:lnSpc>
+              <a:spcAft>
+                <a:spcPts val="300"/>
               </a:spcAft>
               <a:defRPr sz="1700"/>
             </a:pPr>
             <a:r>
+              <a:rPr sz="1500"/>
               <a:t>    • Kaybolma</a:t>
             </a:r>
           </a:p>
           <a:p>
             <a:pPr lvl="1">
-              <a:spcAft>
-                <a:spcPts val="1000"/>
+              <a:lnSpc>
+                <a:spcPct val="90000"/>
+              </a:lnSpc>
+              <a:spcAft>
+                <a:spcPts val="300"/>
               </a:spcAft>
               <a:defRPr sz="1700"/>
             </a:pPr>
             <a:r>
+              <a:rPr sz="1500"/>
               <a:t>    • Uçarak gitme</a:t>
             </a:r>
           </a:p>
           <a:p>
             <a:pPr>
-              <a:spcAft>
-                <a:spcPts val="1000"/>
-              </a:spcAft>
-              <a:defRPr sz="1900"/>
-            </a:pPr>
-          </a:p>
-          <a:p>
-            <a:pPr>
-              <a:spcAft>
-                <a:spcPts val="1000"/>
-              </a:spcAft>
-              <a:defRPr sz="1900"/>
-            </a:pPr>
-            <a:r>
+              <a:lnSpc>
+                <a:spcPct val="90000"/>
+              </a:lnSpc>
+              <a:spcAft>
+                <a:spcPts val="300"/>
+              </a:spcAft>
+              <a:defRPr sz="1900"/>
+            </a:pPr>
+          </a:p>
+          <a:p>
+            <a:pPr>
+              <a:lnSpc>
+                <a:spcPct val="90000"/>
+              </a:lnSpc>
+              <a:spcAft>
+                <a:spcPts val="300"/>
+              </a:spcAft>
+              <a:defRPr sz="1900"/>
+            </a:pPr>
+            <a:r>
+              <a:rPr sz="1500"/>
               <a:t>⏱️ Zamanlama:</a:t>
             </a:r>
           </a:p>
           <a:p>
             <a:pPr lvl="1">
-              <a:spcAft>
-                <a:spcPts val="1000"/>
+              <a:lnSpc>
+                <a:spcPct val="90000"/>
+              </a:lnSpc>
+              <a:spcAft>
+                <a:spcPts val="300"/>
               </a:spcAft>
               <a:defRPr sz="1700"/>
             </a:pPr>
             <a:r>
+              <a:rPr sz="1500"/>
               <a:t>    • Otomatik (zaman ayarlı)</a:t>
             </a:r>
           </a:p>
           <a:p>
             <a:pPr lvl="1">
-              <a:spcAft>
-                <a:spcPts val="1000"/>
+              <a:lnSpc>
+                <a:spcPct val="90000"/>
+              </a:lnSpc>
+              <a:spcAft>
+                <a:spcPts val="300"/>
               </a:spcAft>
               <a:defRPr sz="1700"/>
             </a:pPr>
             <a:r>
+              <a:rPr sz="1500"/>
               <a:t>    • Tıklama ile</a:t>
             </a:r>
           </a:p>
           <a:p>
             <a:pPr>
-              <a:spcAft>
-                <a:spcPts val="1000"/>
-              </a:spcAft>
-              <a:defRPr sz="1900"/>
-            </a:pPr>
-          </a:p>
-          <a:p>
-            <a:pPr>
-              <a:spcAft>
-                <a:spcPts val="1000"/>
-              </a:spcAft>
-              <a:defRPr sz="1900"/>
-            </a:pPr>
-            <a:r>
+              <a:lnSpc>
+                <a:spcPct val="90000"/>
+              </a:lnSpc>
+              <a:spcAft>
+                <a:spcPts val="300"/>
+              </a:spcAft>
+              <a:defRPr sz="1900"/>
+            </a:pPr>
+          </a:p>
+          <a:p>
+            <a:pPr>
+              <a:lnSpc>
+                <a:spcPct val="90000"/>
+              </a:lnSpc>
+              <a:spcAft>
+                <a:spcPts val="300"/>
+              </a:spcAft>
+              <a:defRPr sz="1900"/>
+            </a:pPr>
+            <a:r>
+              <a:rPr sz="1500"/>
               <a:t>⚠️ Dikkat:</a:t>
             </a:r>
           </a:p>
           <a:p>
             <a:pPr lvl="1">
-              <a:spcAft>
-                <a:spcPts val="1000"/>
+              <a:lnSpc>
+                <a:spcPct val="90000"/>
+              </a:lnSpc>
+              <a:spcAft>
+                <a:spcPts val="300"/>
               </a:spcAft>
               <a:defRPr sz="1700"/>
             </a:pPr>
             <a:r>
+              <a:rPr sz="1500"/>
               <a:t>    • Fazla animasyon dikkat dağıtır</a:t>
             </a:r>
           </a:p>
           <a:p>
             <a:pPr lvl="1">
-              <a:spcAft>
-                <a:spcPts val="1000"/>
+              <a:lnSpc>
+                <a:spcPct val="90000"/>
+              </a:lnSpc>
+              <a:spcAft>
+                <a:spcPts val="300"/>
               </a:spcAft>
               <a:defRPr sz="1700"/>
             </a:pPr>
             <a:r>
+              <a:rPr sz="1500"/>
               <a:t>    • Basit tutun</a:t>
             </a:r>
           </a:p>
           <a:p>
             <a:pPr lvl="1">
-              <a:spcAft>
-                <a:spcPts val="1000"/>
+              <a:lnSpc>
+                <a:spcPct val="90000"/>
+              </a:lnSpc>
+              <a:spcAft>
+                <a:spcPts val="300"/>
               </a:spcAft>
               <a:defRPr sz="1700"/>
             </a:pPr>
             <a:r>
+              <a:rPr sz="1500"/>
               <a:t>    • Amaca uygun kullanın</a:t>
             </a:r>
           </a:p>
@@ -5782,7 +6122,7 @@
         </p:nvSpPr>
         <p:spPr/>
         <p:txBody>
-          <a:bodyPr/>
+          <a:bodyPr wrap="square"/>
           <a:lstStyle/>
           <a:p>
             <a:pPr>
@@ -5836,234 +6176,327 @@
             <a:spAutoFit/>
           </a:bodyPr>
           <a:lstStyle/>
-          <a:p/>
-          <a:p>
-            <a:pPr>
-              <a:spcAft>
-                <a:spcPts val="1000"/>
-              </a:spcAft>
-              <a:defRPr sz="1900"/>
-            </a:pPr>
-            <a:r>
+          <a:p>
+            <a:pPr>
+              <a:lnSpc>
+                <a:spcPct val="90000"/>
+              </a:lnSpc>
+              <a:spcAft>
+                <a:spcPts val="300"/>
+              </a:spcAft>
+            </a:pPr>
+          </a:p>
+          <a:p>
+            <a:pPr>
+              <a:lnSpc>
+                <a:spcPct val="90000"/>
+              </a:lnSpc>
+              <a:spcAft>
+                <a:spcPts val="300"/>
+              </a:spcAft>
+              <a:defRPr sz="1900"/>
+            </a:pPr>
+            <a:r>
+              <a:rPr sz="1500"/>
               <a:t>Slaytlar arası geçişler</a:t>
             </a:r>
           </a:p>
           <a:p>
             <a:pPr>
-              <a:spcAft>
-                <a:spcPts val="1000"/>
-              </a:spcAft>
-              <a:defRPr sz="1900"/>
-            </a:pPr>
-          </a:p>
-          <a:p>
-            <a:pPr>
-              <a:spcAft>
-                <a:spcPts val="1000"/>
-              </a:spcAft>
-              <a:defRPr sz="1900"/>
-            </a:pPr>
-            <a:r>
+              <a:lnSpc>
+                <a:spcPct val="90000"/>
+              </a:lnSpc>
+              <a:spcAft>
+                <a:spcPts val="300"/>
+              </a:spcAft>
+              <a:defRPr sz="1900"/>
+            </a:pPr>
+          </a:p>
+          <a:p>
+            <a:pPr>
+              <a:lnSpc>
+                <a:spcPct val="90000"/>
+              </a:lnSpc>
+              <a:spcAft>
+                <a:spcPts val="300"/>
+              </a:spcAft>
+              <a:defRPr sz="1900"/>
+            </a:pPr>
+            <a:r>
+              <a:rPr sz="1500"/>
               <a:t>✅ Popüler Geçişler:</a:t>
             </a:r>
           </a:p>
           <a:p>
             <a:pPr lvl="1">
-              <a:spcAft>
-                <a:spcPts val="1000"/>
+              <a:lnSpc>
+                <a:spcPct val="90000"/>
+              </a:lnSpc>
+              <a:spcAft>
+                <a:spcPts val="300"/>
               </a:spcAft>
               <a:defRPr sz="1700"/>
             </a:pPr>
             <a:r>
+              <a:rPr sz="1500"/>
               <a:t>    • Soldurma</a:t>
             </a:r>
           </a:p>
           <a:p>
             <a:pPr lvl="1">
-              <a:spcAft>
-                <a:spcPts val="1000"/>
+              <a:lnSpc>
+                <a:spcPct val="90000"/>
+              </a:lnSpc>
+              <a:spcAft>
+                <a:spcPts val="300"/>
               </a:spcAft>
               <a:defRPr sz="1700"/>
             </a:pPr>
             <a:r>
+              <a:rPr sz="1500"/>
               <a:t>    • İtme</a:t>
             </a:r>
           </a:p>
           <a:p>
             <a:pPr lvl="1">
-              <a:spcAft>
-                <a:spcPts val="1000"/>
+              <a:lnSpc>
+                <a:spcPct val="90000"/>
+              </a:lnSpc>
+              <a:spcAft>
+                <a:spcPts val="300"/>
               </a:spcAft>
               <a:defRPr sz="1700"/>
             </a:pPr>
             <a:r>
+              <a:rPr sz="1500"/>
               <a:t>    • Kapak açma</a:t>
             </a:r>
           </a:p>
           <a:p>
             <a:pPr lvl="1">
-              <a:spcAft>
-                <a:spcPts val="1000"/>
+              <a:lnSpc>
+                <a:spcPct val="90000"/>
+              </a:lnSpc>
+              <a:spcAft>
+                <a:spcPts val="300"/>
               </a:spcAft>
               <a:defRPr sz="1700"/>
             </a:pPr>
             <a:r>
+              <a:rPr sz="1500"/>
               <a:t>    • Küp döndürme</a:t>
             </a:r>
           </a:p>
           <a:p>
             <a:pPr>
-              <a:spcAft>
-                <a:spcPts val="1000"/>
-              </a:spcAft>
-              <a:defRPr sz="1900"/>
-            </a:pPr>
-          </a:p>
-          <a:p>
-            <a:pPr>
-              <a:spcAft>
-                <a:spcPts val="1000"/>
-              </a:spcAft>
-              <a:defRPr sz="1900"/>
-            </a:pPr>
-            <a:r>
+              <a:lnSpc>
+                <a:spcPct val="90000"/>
+              </a:lnSpc>
+              <a:spcAft>
+                <a:spcPts val="300"/>
+              </a:spcAft>
+              <a:defRPr sz="1900"/>
+            </a:pPr>
+          </a:p>
+          <a:p>
+            <a:pPr>
+              <a:lnSpc>
+                <a:spcPct val="90000"/>
+              </a:lnSpc>
+              <a:spcAft>
+                <a:spcPts val="300"/>
+              </a:spcAft>
+              <a:defRPr sz="1900"/>
+            </a:pPr>
+            <a:r>
+              <a:rPr sz="1500"/>
               <a:t>✅ Geçiş Ayarları:</a:t>
             </a:r>
           </a:p>
           <a:p>
             <a:pPr lvl="1">
-              <a:spcAft>
-                <a:spcPts val="1000"/>
+              <a:lnSpc>
+                <a:spcPct val="90000"/>
+              </a:lnSpc>
+              <a:spcAft>
+                <a:spcPts val="300"/>
               </a:spcAft>
               <a:defRPr sz="1700"/>
             </a:pPr>
             <a:r>
+              <a:rPr sz="1500"/>
               <a:t>    • Hız (yavaş, orta, hızlı)</a:t>
             </a:r>
           </a:p>
           <a:p>
             <a:pPr lvl="1">
-              <a:spcAft>
-                <a:spcPts val="1000"/>
+              <a:lnSpc>
+                <a:spcPct val="90000"/>
+              </a:lnSpc>
+              <a:spcAft>
+                <a:spcPts val="300"/>
               </a:spcAft>
               <a:defRPr sz="1700"/>
             </a:pPr>
             <a:r>
+              <a:rPr sz="1500"/>
               <a:t>    • Yön</a:t>
             </a:r>
           </a:p>
           <a:p>
             <a:pPr lvl="1">
-              <a:spcAft>
-                <a:spcPts val="1000"/>
+              <a:lnSpc>
+                <a:spcPct val="90000"/>
+              </a:lnSpc>
+              <a:spcAft>
+                <a:spcPts val="300"/>
               </a:spcAft>
               <a:defRPr sz="1700"/>
             </a:pPr>
             <a:r>
+              <a:rPr sz="1500"/>
               <a:t>    • Ses (genelde kullanılmaz)</a:t>
             </a:r>
           </a:p>
           <a:p>
             <a:pPr>
-              <a:spcAft>
-                <a:spcPts val="1000"/>
-              </a:spcAft>
-              <a:defRPr sz="1900"/>
-            </a:pPr>
-          </a:p>
-          <a:p>
-            <a:pPr>
-              <a:spcAft>
-                <a:spcPts val="1000"/>
-              </a:spcAft>
-              <a:defRPr sz="1900"/>
-            </a:pPr>
-            <a:r>
+              <a:lnSpc>
+                <a:spcPct val="90000"/>
+              </a:lnSpc>
+              <a:spcAft>
+                <a:spcPts val="300"/>
+              </a:spcAft>
+              <a:defRPr sz="1900"/>
+            </a:pPr>
+          </a:p>
+          <a:p>
+            <a:pPr>
+              <a:lnSpc>
+                <a:spcPct val="90000"/>
+              </a:lnSpc>
+              <a:spcAft>
+                <a:spcPts val="300"/>
+              </a:spcAft>
+              <a:defRPr sz="1900"/>
+            </a:pPr>
+            <a:r>
+              <a:rPr sz="1500"/>
               <a:t>💡 İyi Uygulama:</a:t>
             </a:r>
           </a:p>
           <a:p>
             <a:pPr lvl="1">
-              <a:spcAft>
-                <a:spcPts val="1000"/>
+              <a:lnSpc>
+                <a:spcPct val="90000"/>
+              </a:lnSpc>
+              <a:spcAft>
+                <a:spcPts val="300"/>
               </a:spcAft>
               <a:defRPr sz="1700"/>
             </a:pPr>
             <a:r>
+              <a:rPr sz="1500"/>
               <a:t>    • Tüm slaytlarda aynı geçiş</a:t>
             </a:r>
           </a:p>
           <a:p>
             <a:pPr lvl="1">
-              <a:spcAft>
-                <a:spcPts val="1000"/>
+              <a:lnSpc>
+                <a:spcPct val="90000"/>
+              </a:lnSpc>
+              <a:spcAft>
+                <a:spcPts val="300"/>
               </a:spcAft>
               <a:defRPr sz="1700"/>
             </a:pPr>
             <a:r>
+              <a:rPr sz="1500"/>
               <a:t>    • Basit geçiş seç</a:t>
             </a:r>
           </a:p>
           <a:p>
             <a:pPr lvl="1">
-              <a:spcAft>
-                <a:spcPts val="1000"/>
+              <a:lnSpc>
+                <a:spcPct val="90000"/>
+              </a:lnSpc>
+              <a:spcAft>
+                <a:spcPts val="300"/>
               </a:spcAft>
               <a:defRPr sz="1700"/>
             </a:pPr>
             <a:r>
+              <a:rPr sz="1500"/>
               <a:t>    • Hız: Orta</a:t>
             </a:r>
           </a:p>
           <a:p>
             <a:pPr>
-              <a:spcAft>
-                <a:spcPts val="1000"/>
-              </a:spcAft>
-              <a:defRPr sz="1900"/>
-            </a:pPr>
-          </a:p>
-          <a:p>
-            <a:pPr>
-              <a:spcAft>
-                <a:spcPts val="1000"/>
-              </a:spcAft>
-              <a:defRPr sz="1900"/>
-            </a:pPr>
-            <a:r>
+              <a:lnSpc>
+                <a:spcPct val="90000"/>
+              </a:lnSpc>
+              <a:spcAft>
+                <a:spcPts val="300"/>
+              </a:spcAft>
+              <a:defRPr sz="1900"/>
+            </a:pPr>
+          </a:p>
+          <a:p>
+            <a:pPr>
+              <a:lnSpc>
+                <a:spcPct val="90000"/>
+              </a:lnSpc>
+              <a:spcAft>
+                <a:spcPts val="300"/>
+              </a:spcAft>
+              <a:defRPr sz="1900"/>
+            </a:pPr>
+            <a:r>
+              <a:rPr sz="1500"/>
               <a:t>⚠️ Kötü Uygulama:</a:t>
             </a:r>
           </a:p>
           <a:p>
             <a:pPr lvl="1">
-              <a:spcAft>
-                <a:spcPts val="1000"/>
+              <a:lnSpc>
+                <a:spcPct val="90000"/>
+              </a:lnSpc>
+              <a:spcAft>
+                <a:spcPts val="300"/>
               </a:spcAft>
               <a:defRPr sz="1700"/>
             </a:pPr>
             <a:r>
+              <a:rPr sz="1500"/>
               <a:t>    • Her slayt farklı geçiş</a:t>
             </a:r>
           </a:p>
           <a:p>
             <a:pPr lvl="1">
-              <a:spcAft>
-                <a:spcPts val="1000"/>
+              <a:lnSpc>
+                <a:spcPct val="90000"/>
+              </a:lnSpc>
+              <a:spcAft>
+                <a:spcPts val="300"/>
               </a:spcAft>
               <a:defRPr sz="1700"/>
             </a:pPr>
             <a:r>
+              <a:rPr sz="1500"/>
               <a:t>    • Çok hızlı veya çok yavaş</a:t>
             </a:r>
           </a:p>
           <a:p>
             <a:pPr lvl="1">
-              <a:spcAft>
-                <a:spcPts val="1000"/>
+              <a:lnSpc>
+                <a:spcPct val="90000"/>
+              </a:lnSpc>
+              <a:spcAft>
+                <a:spcPts val="300"/>
               </a:spcAft>
               <a:defRPr sz="1700"/>
             </a:pPr>
             <a:r>
+              <a:rPr sz="1500"/>
               <a:t>    • Dikkat dağıtıcı efektler</a:t>
             </a:r>
           </a:p>
@@ -6099,7 +6532,7 @@
         </p:nvSpPr>
         <p:spPr/>
         <p:txBody>
-          <a:bodyPr/>
+          <a:bodyPr wrap="square"/>
           <a:lstStyle/>
           <a:p>
             <a:pPr>
@@ -6153,308 +6586,398 @@
             <a:spAutoFit/>
           </a:bodyPr>
           <a:lstStyle/>
-          <a:p/>
-          <a:p>
-            <a:pPr>
-              <a:spcAft>
-                <a:spcPts val="1000"/>
-              </a:spcAft>
-              <a:defRPr sz="1900"/>
-            </a:pPr>
-            <a:r>
-              <a:rPr sz="1600"/>
+          <a:p>
+            <a:pPr>
+              <a:lnSpc>
+                <a:spcPct val="90000"/>
+              </a:lnSpc>
+              <a:spcAft>
+                <a:spcPts val="300"/>
+              </a:spcAft>
+            </a:pPr>
+          </a:p>
+          <a:p>
+            <a:pPr>
+              <a:lnSpc>
+                <a:spcPct val="90000"/>
+              </a:lnSpc>
+              <a:spcAft>
+                <a:spcPts val="300"/>
+              </a:spcAft>
+              <a:defRPr sz="1900"/>
+            </a:pPr>
+            <a:r>
+              <a:rPr sz="1400"/>
               <a:t>Sunumu nasıl yapmalısın?</a:t>
             </a:r>
           </a:p>
           <a:p>
             <a:pPr>
-              <a:spcAft>
-                <a:spcPts val="1000"/>
-              </a:spcAft>
-              <a:defRPr sz="1900"/>
-            </a:pPr>
-          </a:p>
-          <a:p>
-            <a:pPr>
-              <a:spcAft>
-                <a:spcPts val="1000"/>
-              </a:spcAft>
-              <a:defRPr sz="1900"/>
-            </a:pPr>
-            <a:r>
-              <a:rPr sz="1600"/>
+              <a:lnSpc>
+                <a:spcPct val="90000"/>
+              </a:lnSpc>
+              <a:spcAft>
+                <a:spcPts val="300"/>
+              </a:spcAft>
+              <a:defRPr sz="1900"/>
+            </a:pPr>
+          </a:p>
+          <a:p>
+            <a:pPr>
+              <a:lnSpc>
+                <a:spcPct val="90000"/>
+              </a:lnSpc>
+              <a:spcAft>
+                <a:spcPts val="300"/>
+              </a:spcAft>
+              <a:defRPr sz="1900"/>
+            </a:pPr>
+            <a:r>
+              <a:rPr sz="1400"/>
               <a:t>✅ Sunum Öncesi:</a:t>
             </a:r>
           </a:p>
           <a:p>
             <a:pPr lvl="1">
-              <a:spcAft>
-                <a:spcPts val="1000"/>
+              <a:lnSpc>
+                <a:spcPct val="90000"/>
+              </a:lnSpc>
+              <a:spcAft>
+                <a:spcPts val="300"/>
               </a:spcAft>
               <a:defRPr sz="1700"/>
             </a:pPr>
             <a:r>
-              <a:rPr sz="1600"/>
+              <a:rPr sz="1400"/>
               <a:t>    • Prova yap</a:t>
             </a:r>
           </a:p>
           <a:p>
             <a:pPr lvl="1">
-              <a:spcAft>
-                <a:spcPts val="1000"/>
+              <a:lnSpc>
+                <a:spcPct val="90000"/>
+              </a:lnSpc>
+              <a:spcAft>
+                <a:spcPts val="300"/>
               </a:spcAft>
               <a:defRPr sz="1700"/>
             </a:pPr>
             <a:r>
-              <a:rPr sz="1600"/>
+              <a:rPr sz="1400"/>
               <a:t>    • Zamanını ölç</a:t>
             </a:r>
           </a:p>
           <a:p>
             <a:pPr lvl="1">
-              <a:spcAft>
-                <a:spcPts val="1000"/>
+              <a:lnSpc>
+                <a:spcPct val="90000"/>
+              </a:lnSpc>
+              <a:spcAft>
+                <a:spcPts val="300"/>
               </a:spcAft>
               <a:defRPr sz="1700"/>
             </a:pPr>
             <a:r>
-              <a:rPr sz="1600"/>
+              <a:rPr sz="1400"/>
               <a:t>    • Ekipmanı kontrol et</a:t>
             </a:r>
           </a:p>
           <a:p>
             <a:pPr>
-              <a:spcAft>
-                <a:spcPts val="1000"/>
-              </a:spcAft>
-              <a:defRPr sz="1900"/>
-            </a:pPr>
-          </a:p>
-          <a:p>
-            <a:pPr>
-              <a:spcAft>
-                <a:spcPts val="1000"/>
-              </a:spcAft>
-              <a:defRPr sz="1900"/>
-            </a:pPr>
-            <a:r>
-              <a:rPr sz="1600"/>
+              <a:lnSpc>
+                <a:spcPct val="90000"/>
+              </a:lnSpc>
+              <a:spcAft>
+                <a:spcPts val="300"/>
+              </a:spcAft>
+              <a:defRPr sz="1900"/>
+            </a:pPr>
+          </a:p>
+          <a:p>
+            <a:pPr>
+              <a:lnSpc>
+                <a:spcPct val="90000"/>
+              </a:lnSpc>
+              <a:spcAft>
+                <a:spcPts val="300"/>
+              </a:spcAft>
+              <a:defRPr sz="1900"/>
+            </a:pPr>
+            <a:r>
+              <a:rPr sz="1400"/>
               <a:t>✅ Sunum Sırasında:</a:t>
             </a:r>
           </a:p>
           <a:p>
             <a:pPr lvl="1">
-              <a:spcAft>
-                <a:spcPts val="1000"/>
+              <a:lnSpc>
+                <a:spcPct val="90000"/>
+              </a:lnSpc>
+              <a:spcAft>
+                <a:spcPts val="300"/>
               </a:spcAft>
               <a:defRPr sz="1700"/>
             </a:pPr>
             <a:r>
-              <a:rPr sz="1600"/>
+              <a:rPr sz="1400"/>
               <a:t>    • Göz teması kur</a:t>
             </a:r>
           </a:p>
           <a:p>
             <a:pPr lvl="1">
-              <a:spcAft>
-                <a:spcPts val="1000"/>
+              <a:lnSpc>
+                <a:spcPct val="90000"/>
+              </a:lnSpc>
+              <a:spcAft>
+                <a:spcPts val="300"/>
               </a:spcAft>
               <a:defRPr sz="1700"/>
             </a:pPr>
             <a:r>
-              <a:rPr sz="1600"/>
+              <a:rPr sz="1400"/>
               <a:t>    • Net konuş</a:t>
             </a:r>
           </a:p>
           <a:p>
             <a:pPr lvl="1">
-              <a:spcAft>
-                <a:spcPts val="1000"/>
+              <a:lnSpc>
+                <a:spcPct val="90000"/>
+              </a:lnSpc>
+              <a:spcAft>
+                <a:spcPts val="300"/>
               </a:spcAft>
               <a:defRPr sz="1700"/>
             </a:pPr>
             <a:r>
-              <a:rPr sz="1600"/>
+              <a:rPr sz="1400"/>
               <a:t>    • Slayta bakma, izleyicilere bak</a:t>
             </a:r>
           </a:p>
           <a:p>
             <a:pPr lvl="1">
-              <a:spcAft>
-                <a:spcPts val="1000"/>
+              <a:lnSpc>
+                <a:spcPct val="90000"/>
+              </a:lnSpc>
+              <a:spcAft>
+                <a:spcPts val="300"/>
               </a:spcAft>
               <a:defRPr sz="1700"/>
             </a:pPr>
             <a:r>
-              <a:rPr sz="1600"/>
+              <a:rPr sz="1400"/>
               <a:t>    • Jestlerini kullan</a:t>
             </a:r>
           </a:p>
           <a:p>
             <a:pPr lvl="1">
-              <a:spcAft>
-                <a:spcPts val="1000"/>
+              <a:lnSpc>
+                <a:spcPct val="90000"/>
+              </a:lnSpc>
+              <a:spcAft>
+                <a:spcPts val="300"/>
               </a:spcAft>
               <a:defRPr sz="1700"/>
             </a:pPr>
             <a:r>
-              <a:rPr sz="1600"/>
+              <a:rPr sz="1400"/>
               <a:t>    • Kendine güven</a:t>
             </a:r>
           </a:p>
           <a:p>
             <a:pPr>
-              <a:spcAft>
-                <a:spcPts val="1000"/>
-              </a:spcAft>
-              <a:defRPr sz="1900"/>
-            </a:pPr>
-          </a:p>
-          <a:p>
-            <a:pPr>
-              <a:spcAft>
-                <a:spcPts val="1000"/>
-              </a:spcAft>
-              <a:defRPr sz="1900"/>
-            </a:pPr>
-            <a:r>
-              <a:rPr sz="1600"/>
+              <a:lnSpc>
+                <a:spcPct val="90000"/>
+              </a:lnSpc>
+              <a:spcAft>
+                <a:spcPts val="300"/>
+              </a:spcAft>
+              <a:defRPr sz="1900"/>
+            </a:pPr>
+          </a:p>
+          <a:p>
+            <a:pPr>
+              <a:lnSpc>
+                <a:spcPct val="90000"/>
+              </a:lnSpc>
+              <a:spcAft>
+                <a:spcPts val="300"/>
+              </a:spcAft>
+              <a:defRPr sz="1900"/>
+            </a:pPr>
+            <a:r>
+              <a:rPr sz="1400"/>
               <a:t>✅ İçerik:</a:t>
             </a:r>
           </a:p>
           <a:p>
             <a:pPr lvl="1">
-              <a:spcAft>
-                <a:spcPts val="1000"/>
+              <a:lnSpc>
+                <a:spcPct val="90000"/>
+              </a:lnSpc>
+              <a:spcAft>
+                <a:spcPts val="300"/>
               </a:spcAft>
               <a:defRPr sz="1700"/>
             </a:pPr>
             <a:r>
-              <a:rPr sz="1600"/>
+              <a:rPr sz="1400"/>
               <a:t>    • Giriş yap</a:t>
             </a:r>
           </a:p>
           <a:p>
             <a:pPr lvl="1">
-              <a:spcAft>
-                <a:spcPts val="1000"/>
+              <a:lnSpc>
+                <a:spcPct val="90000"/>
+              </a:lnSpc>
+              <a:spcAft>
+                <a:spcPts val="300"/>
               </a:spcAft>
               <a:defRPr sz="1700"/>
             </a:pPr>
             <a:r>
-              <a:rPr sz="1600"/>
+              <a:rPr sz="1400"/>
               <a:t>    • Ana konuları sun</a:t>
             </a:r>
           </a:p>
           <a:p>
             <a:pPr lvl="1">
-              <a:spcAft>
-                <a:spcPts val="1000"/>
+              <a:lnSpc>
+                <a:spcPct val="90000"/>
+              </a:lnSpc>
+              <a:spcAft>
+                <a:spcPts val="300"/>
               </a:spcAft>
               <a:defRPr sz="1700"/>
             </a:pPr>
             <a:r>
-              <a:rPr sz="1600"/>
+              <a:rPr sz="1400"/>
               <a:t>    • Özet yap</a:t>
             </a:r>
           </a:p>
           <a:p>
             <a:pPr lvl="1">
-              <a:spcAft>
-                <a:spcPts val="1000"/>
+              <a:lnSpc>
+                <a:spcPct val="90000"/>
+              </a:lnSpc>
+              <a:spcAft>
+                <a:spcPts val="300"/>
               </a:spcAft>
               <a:defRPr sz="1700"/>
             </a:pPr>
             <a:r>
-              <a:rPr sz="1600"/>
+              <a:rPr sz="1400"/>
               <a:t>    • Sorular al</a:t>
             </a:r>
           </a:p>
           <a:p>
             <a:pPr>
-              <a:spcAft>
-                <a:spcPts val="1000"/>
-              </a:spcAft>
-              <a:defRPr sz="1900"/>
-            </a:pPr>
-          </a:p>
-          <a:p>
-            <a:pPr>
-              <a:spcAft>
-                <a:spcPts val="1000"/>
-              </a:spcAft>
-              <a:defRPr sz="1900"/>
-            </a:pPr>
-            <a:r>
-              <a:rPr sz="1600"/>
+              <a:lnSpc>
+                <a:spcPct val="90000"/>
+              </a:lnSpc>
+              <a:spcAft>
+                <a:spcPts val="300"/>
+              </a:spcAft>
+              <a:defRPr sz="1900"/>
+            </a:pPr>
+          </a:p>
+          <a:p>
+            <a:pPr>
+              <a:lnSpc>
+                <a:spcPct val="90000"/>
+              </a:lnSpc>
+              <a:spcAft>
+                <a:spcPts val="300"/>
+              </a:spcAft>
+              <a:defRPr sz="1900"/>
+            </a:pPr>
+            <a:r>
+              <a:rPr sz="1400"/>
               <a:t>💡 Altın Kural:</a:t>
             </a:r>
           </a:p>
           <a:p>
             <a:pPr>
-              <a:spcAft>
-                <a:spcPts val="1000"/>
-              </a:spcAft>
-              <a:defRPr sz="1900"/>
-            </a:pPr>
-            <a:r>
-              <a:rPr sz="1600"/>
+              <a:lnSpc>
+                <a:spcPct val="90000"/>
+              </a:lnSpc>
+              <a:spcAft>
+                <a:spcPts val="300"/>
+              </a:spcAft>
+              <a:defRPr sz="1900"/>
+            </a:pPr>
+            <a:r>
+              <a:rPr sz="1400"/>
               <a:t>Slayt senin yardımcın, sen sunumu yapıyorsun!</a:t>
             </a:r>
           </a:p>
           <a:p>
             <a:pPr>
-              <a:spcAft>
-                <a:spcPts val="1000"/>
-              </a:spcAft>
-              <a:defRPr sz="1900"/>
-            </a:pPr>
-          </a:p>
-          <a:p>
-            <a:pPr>
-              <a:spcAft>
-                <a:spcPts val="1000"/>
-              </a:spcAft>
-              <a:defRPr sz="1900"/>
-            </a:pPr>
-            <a:r>
-              <a:rPr sz="1600"/>
+              <a:lnSpc>
+                <a:spcPct val="90000"/>
+              </a:lnSpc>
+              <a:spcAft>
+                <a:spcPts val="300"/>
+              </a:spcAft>
+              <a:defRPr sz="1900"/>
+            </a:pPr>
+          </a:p>
+          <a:p>
+            <a:pPr>
+              <a:lnSpc>
+                <a:spcPct val="90000"/>
+              </a:lnSpc>
+              <a:spcAft>
+                <a:spcPts val="300"/>
+              </a:spcAft>
+              <a:defRPr sz="1900"/>
+            </a:pPr>
+            <a:r>
+              <a:rPr sz="1400"/>
               <a:t>⚠️ Yapma:</a:t>
             </a:r>
           </a:p>
           <a:p>
             <a:pPr lvl="1">
-              <a:spcAft>
-                <a:spcPts val="1000"/>
+              <a:lnSpc>
+                <a:spcPct val="90000"/>
+              </a:lnSpc>
+              <a:spcAft>
+                <a:spcPts val="300"/>
               </a:spcAft>
               <a:defRPr sz="1700"/>
             </a:pPr>
             <a:r>
-              <a:rPr sz="1600"/>
+              <a:rPr sz="1400"/>
               <a:t>    • Slaytı kelimesi kelimesine okuma</a:t>
             </a:r>
           </a:p>
           <a:p>
             <a:pPr lvl="1">
-              <a:spcAft>
-                <a:spcPts val="1000"/>
+              <a:lnSpc>
+                <a:spcPct val="90000"/>
+              </a:lnSpc>
+              <a:spcAft>
+                <a:spcPts val="300"/>
               </a:spcAft>
               <a:defRPr sz="1700"/>
             </a:pPr>
             <a:r>
-              <a:rPr sz="1600"/>
+              <a:rPr sz="1400"/>
               <a:t>    • Hızlı konuşma</a:t>
             </a:r>
           </a:p>
           <a:p>
             <a:pPr lvl="1">
-              <a:spcAft>
-                <a:spcPts val="1000"/>
+              <a:lnSpc>
+                <a:spcPct val="90000"/>
+              </a:lnSpc>
+              <a:spcAft>
+                <a:spcPts val="300"/>
               </a:spcAft>
               <a:defRPr sz="1700"/>
             </a:pPr>
             <a:r>
-              <a:rPr sz="1600"/>
+              <a:rPr sz="1400"/>
               <a:t>    • İzleyiciye sırt dönme</a:t>
             </a:r>
           </a:p>
@@ -6490,7 +7013,7 @@
         </p:nvSpPr>
         <p:spPr/>
         <p:txBody>
-          <a:bodyPr/>
+          <a:bodyPr wrap="square"/>
           <a:lstStyle/>
           <a:p>
             <a:pPr>
@@ -6544,160 +7067,226 @@
             <a:spAutoFit/>
           </a:bodyPr>
           <a:lstStyle/>
-          <a:p/>
-          <a:p>
-            <a:pPr>
-              <a:spcAft>
-                <a:spcPts val="1000"/>
-              </a:spcAft>
-              <a:defRPr sz="1900"/>
-            </a:pPr>
-            <a:r>
+          <a:p>
+            <a:pPr>
+              <a:lnSpc>
+                <a:spcPct val="90000"/>
+              </a:lnSpc>
+              <a:spcAft>
+                <a:spcPts val="300"/>
+              </a:spcAft>
+            </a:pPr>
+          </a:p>
+          <a:p>
+            <a:pPr>
+              <a:lnSpc>
+                <a:spcPct val="90000"/>
+              </a:lnSpc>
+              <a:spcAft>
+                <a:spcPts val="300"/>
+              </a:spcAft>
+              <a:defRPr sz="1900"/>
+            </a:pPr>
+            <a:r>
+              <a:rPr sz="1500"/>
               <a:t>Bu ünitede neler öğrendik?</a:t>
             </a:r>
           </a:p>
           <a:p>
             <a:pPr>
-              <a:spcAft>
-                <a:spcPts val="1000"/>
-              </a:spcAft>
-              <a:defRPr sz="1900"/>
-            </a:pPr>
-          </a:p>
-          <a:p>
-            <a:pPr>
-              <a:spcAft>
-                <a:spcPts val="1000"/>
-              </a:spcAft>
-              <a:defRPr sz="1900"/>
-            </a:pPr>
-            <a:r>
+              <a:lnSpc>
+                <a:spcPct val="90000"/>
+              </a:lnSpc>
+              <a:spcAft>
+                <a:spcPts val="300"/>
+              </a:spcAft>
+              <a:defRPr sz="1900"/>
+            </a:pPr>
+          </a:p>
+          <a:p>
+            <a:pPr>
+              <a:lnSpc>
+                <a:spcPct val="90000"/>
+              </a:lnSpc>
+              <a:spcAft>
+                <a:spcPts val="300"/>
+              </a:spcAft>
+              <a:defRPr sz="1900"/>
+            </a:pPr>
+            <a:r>
+              <a:rPr sz="1500"/>
               <a:t>✅ Sunum programları (PowerPoint, Google Slides)</a:t>
             </a:r>
           </a:p>
           <a:p>
             <a:pPr>
-              <a:spcAft>
-                <a:spcPts val="1000"/>
-              </a:spcAft>
-              <a:defRPr sz="1900"/>
-            </a:pPr>
-            <a:r>
+              <a:lnSpc>
+                <a:spcPct val="90000"/>
+              </a:lnSpc>
+              <a:spcAft>
+                <a:spcPts val="300"/>
+              </a:spcAft>
+              <a:defRPr sz="1900"/>
+            </a:pPr>
+            <a:r>
+              <a:rPr sz="1500"/>
               <a:t>✅ Slayt tasarımı ilkeleri</a:t>
             </a:r>
           </a:p>
           <a:p>
             <a:pPr>
-              <a:spcAft>
-                <a:spcPts val="1000"/>
-              </a:spcAft>
-              <a:defRPr sz="1900"/>
-            </a:pPr>
-            <a:r>
+              <a:lnSpc>
+                <a:spcPct val="90000"/>
+              </a:lnSpc>
+              <a:spcAft>
+                <a:spcPts val="300"/>
+              </a:spcAft>
+              <a:defRPr sz="1900"/>
+            </a:pPr>
+            <a:r>
+              <a:rPr sz="1500"/>
               <a:t>✅ Metin ve görsel ekleme</a:t>
             </a:r>
           </a:p>
           <a:p>
             <a:pPr>
-              <a:spcAft>
-                <a:spcPts val="1000"/>
-              </a:spcAft>
-              <a:defRPr sz="1900"/>
-            </a:pPr>
-            <a:r>
+              <a:lnSpc>
+                <a:spcPct val="90000"/>
+              </a:lnSpc>
+              <a:spcAft>
+                <a:spcPts val="300"/>
+              </a:spcAft>
+              <a:defRPr sz="1900"/>
+            </a:pPr>
+            <a:r>
+              <a:rPr sz="1500"/>
               <a:t>✅ Animasyonlar ve geçişler</a:t>
             </a:r>
           </a:p>
           <a:p>
             <a:pPr>
-              <a:spcAft>
-                <a:spcPts val="1000"/>
-              </a:spcAft>
-              <a:defRPr sz="1900"/>
-            </a:pPr>
-            <a:r>
+              <a:lnSpc>
+                <a:spcPct val="90000"/>
+              </a:lnSpc>
+              <a:spcAft>
+                <a:spcPts val="300"/>
+              </a:spcAft>
+              <a:defRPr sz="1900"/>
+            </a:pPr>
+            <a:r>
+              <a:rPr sz="1500"/>
               <a:t>✅ Multimedya ekleme</a:t>
             </a:r>
           </a:p>
           <a:p>
             <a:pPr>
-              <a:spcAft>
-                <a:spcPts val="1000"/>
-              </a:spcAft>
-              <a:defRPr sz="1900"/>
-            </a:pPr>
-            <a:r>
+              <a:lnSpc>
+                <a:spcPct val="90000"/>
+              </a:lnSpc>
+              <a:spcAft>
+                <a:spcPts val="300"/>
+              </a:spcAft>
+              <a:defRPr sz="1900"/>
+            </a:pPr>
+            <a:r>
+              <a:rPr sz="1500"/>
               <a:t>✅ Etkili sunum hazırlama</a:t>
             </a:r>
           </a:p>
           <a:p>
             <a:pPr>
-              <a:spcAft>
-                <a:spcPts val="1000"/>
-              </a:spcAft>
-              <a:defRPr sz="1900"/>
-            </a:pPr>
-            <a:r>
+              <a:lnSpc>
+                <a:spcPct val="90000"/>
+              </a:lnSpc>
+              <a:spcAft>
+                <a:spcPts val="300"/>
+              </a:spcAft>
+              <a:defRPr sz="1900"/>
+            </a:pPr>
+            <a:r>
+              <a:rPr sz="1500"/>
               <a:t>✅ Sunum yapma teknikleri</a:t>
             </a:r>
           </a:p>
           <a:p>
             <a:pPr>
-              <a:spcAft>
-                <a:spcPts val="1000"/>
-              </a:spcAft>
-              <a:defRPr sz="1900"/>
-            </a:pPr>
-          </a:p>
-          <a:p>
-            <a:pPr>
-              <a:spcAft>
-                <a:spcPts val="1000"/>
-              </a:spcAft>
-              <a:defRPr sz="1900"/>
-            </a:pPr>
-            <a:r>
+              <a:lnSpc>
+                <a:spcPct val="90000"/>
+              </a:lnSpc>
+              <a:spcAft>
+                <a:spcPts val="300"/>
+              </a:spcAft>
+              <a:defRPr sz="1900"/>
+            </a:pPr>
+          </a:p>
+          <a:p>
+            <a:pPr>
+              <a:lnSpc>
+                <a:spcPct val="90000"/>
+              </a:lnSpc>
+              <a:spcAft>
+                <a:spcPts val="300"/>
+              </a:spcAft>
+              <a:defRPr sz="1900"/>
+            </a:pPr>
+            <a:r>
+              <a:rPr sz="1500"/>
               <a:t>💡 Anahtar Mesaj:</a:t>
             </a:r>
           </a:p>
           <a:p>
             <a:pPr>
-              <a:spcAft>
-                <a:spcPts val="1000"/>
-              </a:spcAft>
-              <a:defRPr sz="1900"/>
-            </a:pPr>
-            <a:r>
+              <a:lnSpc>
+                <a:spcPct val="90000"/>
+              </a:lnSpc>
+              <a:spcAft>
+                <a:spcPts val="300"/>
+              </a:spcAft>
+              <a:defRPr sz="1900"/>
+            </a:pPr>
+            <a:r>
+              <a:rPr sz="1500"/>
               <a:t>Etkili sunum = Basit tasarım + İyi içerik + Kendine güven</a:t>
             </a:r>
           </a:p>
           <a:p>
             <a:pPr>
-              <a:spcAft>
-                <a:spcPts val="1000"/>
-              </a:spcAft>
-              <a:defRPr sz="1900"/>
-            </a:pPr>
-          </a:p>
-          <a:p>
-            <a:pPr>
-              <a:spcAft>
-                <a:spcPts val="1000"/>
-              </a:spcAft>
-              <a:defRPr sz="1900"/>
-            </a:pPr>
-            <a:r>
+              <a:lnSpc>
+                <a:spcPct val="90000"/>
+              </a:lnSpc>
+              <a:spcAft>
+                <a:spcPts val="300"/>
+              </a:spcAft>
+              <a:defRPr sz="1900"/>
+            </a:pPr>
+          </a:p>
+          <a:p>
+            <a:pPr>
+              <a:lnSpc>
+                <a:spcPct val="90000"/>
+              </a:lnSpc>
+              <a:spcAft>
+                <a:spcPts val="300"/>
+              </a:spcAft>
+              <a:defRPr sz="1900"/>
+            </a:pPr>
+            <a:r>
+              <a:rPr sz="1500"/>
               <a:t>🎯 Artık profesyonel sunumlar yapabilirsin!</a:t>
             </a:r>
           </a:p>
           <a:p>
             <a:pPr>
-              <a:spcAft>
-                <a:spcPts val="1000"/>
-              </a:spcAft>
-              <a:defRPr sz="1900"/>
-            </a:pPr>
-            <a:r>
+              <a:lnSpc>
+                <a:spcPct val="90000"/>
+              </a:lnSpc>
+              <a:spcAft>
+                <a:spcPts val="300"/>
+              </a:spcAft>
+              <a:defRPr sz="1900"/>
+            </a:pPr>
+            <a:r>
+              <a:rPr sz="1500"/>
               <a:t>🎤 Fikirlerini etkili bir şekilde anlatabilirsin!</a:t>
             </a:r>
           </a:p>

--- a/sunumlar/6-sinif-unite5-sunum-programlari-DETAYLI.pptx
+++ b/sunumlar/6-sinif-unite5-sunum-programlari-DETAYLI.pptx
@@ -4448,12 +4448,21 @@
           <a:noFill/>
         </p:spPr>
         <p:txBody>
-          <a:bodyPr wrap="square">
+          <a:bodyPr wrap="square" tIns="25400" bIns="25400" lIns="63500" rIns="63500">
             <a:spAutoFit/>
           </a:bodyPr>
           <a:lstStyle/>
           <a:p>
             <a:pPr algn="ctr">
+              <a:lnSpc>
+                <a:spcPct val="85000"/>
+              </a:lnSpc>
+              <a:spcBef>
+                <a:spcPts val="200"/>
+              </a:spcBef>
+              <a:spcAft>
+                <a:spcPts val="200"/>
+              </a:spcAft>
               <a:defRPr sz="5400" b="1">
                 <a:solidFill>
                   <a:srgbClr val="FFFFFF"/>
@@ -4461,6 +4470,7 @@
               </a:defRPr>
             </a:pPr>
             <a:r>
+              <a:rPr/>
               <a:t>6. SINIF - ÜNİTE 5</a:t>
             </a:r>
           </a:p>
@@ -4483,12 +4493,21 @@
           <a:noFill/>
         </p:spPr>
         <p:txBody>
-          <a:bodyPr wrap="square">
+          <a:bodyPr wrap="square" tIns="25400" bIns="25400" lIns="63500" rIns="63500">
             <a:spAutoFit/>
           </a:bodyPr>
           <a:lstStyle/>
           <a:p>
             <a:pPr algn="ctr">
+              <a:lnSpc>
+                <a:spcPct val="85000"/>
+              </a:lnSpc>
+              <a:spcBef>
+                <a:spcPts val="200"/>
+              </a:spcBef>
+              <a:spcAft>
+                <a:spcPts val="200"/>
+              </a:spcAft>
               <a:defRPr sz="2800">
                 <a:solidFill>
                   <a:srgbClr val="FFFFFF"/>
@@ -4496,6 +4515,7 @@
               </a:defRPr>
             </a:pPr>
             <a:r>
+              <a:rPr/>
               <a:t>Sunum Programları</a:t>
             </a:r>
           </a:p>
@@ -4531,10 +4551,19 @@
         </p:nvSpPr>
         <p:spPr/>
         <p:txBody>
-          <a:bodyPr wrap="square"/>
+          <a:bodyPr wrap="square" tIns="25400" bIns="25400" lIns="63500" rIns="63500"/>
           <a:lstStyle/>
           <a:p>
             <a:pPr>
+              <a:lnSpc>
+                <a:spcPct val="85000"/>
+              </a:lnSpc>
+              <a:spcBef>
+                <a:spcPts val="200"/>
+              </a:spcBef>
+              <a:spcAft>
+                <a:spcPts val="200"/>
+              </a:spcAft>
               <a:defRPr sz="3800" b="1">
                 <a:solidFill>
                   <a:srgbClr val="764BA2"/>
@@ -4542,6 +4571,7 @@
               </a:defRPr>
             </a:pPr>
             <a:r>
+              <a:rPr/>
               <a:t>📚 Ünitenin Konuları</a:t>
             </a:r>
           </a:p>
@@ -4581,7 +4611,7 @@
           <a:noFill/>
         </p:spPr>
         <p:txBody>
-          <a:bodyPr wrap="square">
+          <a:bodyPr wrap="square" tIns="25400" bIns="25400" lIns="63500" rIns="63500">
             <a:spAutoFit/>
           </a:bodyPr>
           <a:lstStyle/>
@@ -4598,10 +4628,13 @@
           <a:p>
             <a:pPr>
               <a:lnSpc>
-                <a:spcPct val="90000"/>
-              </a:lnSpc>
-              <a:spcAft>
-                <a:spcPts val="300"/>
+                <a:spcPct val="85000"/>
+              </a:lnSpc>
+              <a:spcBef>
+                <a:spcPts val="200"/>
+              </a:spcBef>
+              <a:spcAft>
+                <a:spcPts val="200"/>
               </a:spcAft>
               <a:defRPr sz="1900"/>
             </a:pPr>
@@ -4624,10 +4657,13 @@
           <a:p>
             <a:pPr>
               <a:lnSpc>
-                <a:spcPct val="90000"/>
-              </a:lnSpc>
-              <a:spcAft>
-                <a:spcPts val="300"/>
+                <a:spcPct val="85000"/>
+              </a:lnSpc>
+              <a:spcBef>
+                <a:spcPts val="200"/>
+              </a:spcBef>
+              <a:spcAft>
+                <a:spcPts val="200"/>
               </a:spcAft>
               <a:defRPr sz="1900"/>
             </a:pPr>
@@ -4639,10 +4675,13 @@
           <a:p>
             <a:pPr>
               <a:lnSpc>
-                <a:spcPct val="90000"/>
-              </a:lnSpc>
-              <a:spcAft>
-                <a:spcPts val="300"/>
+                <a:spcPct val="85000"/>
+              </a:lnSpc>
+              <a:spcBef>
+                <a:spcPts val="200"/>
+              </a:spcBef>
+              <a:spcAft>
+                <a:spcPts val="200"/>
               </a:spcAft>
               <a:defRPr sz="1900"/>
             </a:pPr>
@@ -4654,10 +4693,13 @@
           <a:p>
             <a:pPr>
               <a:lnSpc>
-                <a:spcPct val="90000"/>
-              </a:lnSpc>
-              <a:spcAft>
-                <a:spcPts val="300"/>
+                <a:spcPct val="85000"/>
+              </a:lnSpc>
+              <a:spcBef>
+                <a:spcPts val="200"/>
+              </a:spcBef>
+              <a:spcAft>
+                <a:spcPts val="200"/>
               </a:spcAft>
               <a:defRPr sz="1900"/>
             </a:pPr>
@@ -4669,10 +4711,13 @@
           <a:p>
             <a:pPr>
               <a:lnSpc>
-                <a:spcPct val="90000"/>
-              </a:lnSpc>
-              <a:spcAft>
-                <a:spcPts val="300"/>
+                <a:spcPct val="85000"/>
+              </a:lnSpc>
+              <a:spcBef>
+                <a:spcPts val="200"/>
+              </a:spcBef>
+              <a:spcAft>
+                <a:spcPts val="200"/>
               </a:spcAft>
               <a:defRPr sz="1900"/>
             </a:pPr>
@@ -4684,10 +4729,13 @@
           <a:p>
             <a:pPr>
               <a:lnSpc>
-                <a:spcPct val="90000"/>
-              </a:lnSpc>
-              <a:spcAft>
-                <a:spcPts val="300"/>
+                <a:spcPct val="85000"/>
+              </a:lnSpc>
+              <a:spcBef>
+                <a:spcPts val="200"/>
+              </a:spcBef>
+              <a:spcAft>
+                <a:spcPts val="200"/>
               </a:spcAft>
               <a:defRPr sz="1900"/>
             </a:pPr>
@@ -4699,10 +4747,13 @@
           <a:p>
             <a:pPr>
               <a:lnSpc>
-                <a:spcPct val="90000"/>
-              </a:lnSpc>
-              <a:spcAft>
-                <a:spcPts val="300"/>
+                <a:spcPct val="85000"/>
+              </a:lnSpc>
+              <a:spcBef>
+                <a:spcPts val="200"/>
+              </a:spcBef>
+              <a:spcAft>
+                <a:spcPts val="200"/>
               </a:spcAft>
               <a:defRPr sz="1900"/>
             </a:pPr>
@@ -4714,10 +4765,13 @@
           <a:p>
             <a:pPr>
               <a:lnSpc>
-                <a:spcPct val="90000"/>
-              </a:lnSpc>
-              <a:spcAft>
-                <a:spcPts val="300"/>
+                <a:spcPct val="85000"/>
+              </a:lnSpc>
+              <a:spcBef>
+                <a:spcPts val="200"/>
+              </a:spcBef>
+              <a:spcAft>
+                <a:spcPts val="200"/>
               </a:spcAft>
               <a:defRPr sz="1900"/>
             </a:pPr>
@@ -4729,10 +4783,13 @@
           <a:p>
             <a:pPr>
               <a:lnSpc>
-                <a:spcPct val="90000"/>
-              </a:lnSpc>
-              <a:spcAft>
-                <a:spcPts val="300"/>
+                <a:spcPct val="85000"/>
+              </a:lnSpc>
+              <a:spcBef>
+                <a:spcPts val="200"/>
+              </a:spcBef>
+              <a:spcAft>
+                <a:spcPts val="200"/>
               </a:spcAft>
               <a:defRPr sz="1900"/>
             </a:pPr>
@@ -4744,10 +4801,13 @@
           <a:p>
             <a:pPr>
               <a:lnSpc>
-                <a:spcPct val="90000"/>
-              </a:lnSpc>
-              <a:spcAft>
-                <a:spcPts val="300"/>
+                <a:spcPct val="85000"/>
+              </a:lnSpc>
+              <a:spcBef>
+                <a:spcPts val="200"/>
+              </a:spcBef>
+              <a:spcAft>
+                <a:spcPts val="200"/>
               </a:spcAft>
               <a:defRPr sz="1900"/>
             </a:pPr>
@@ -4759,10 +4819,13 @@
           <a:p>
             <a:pPr>
               <a:lnSpc>
-                <a:spcPct val="90000"/>
-              </a:lnSpc>
-              <a:spcAft>
-                <a:spcPts val="300"/>
+                <a:spcPct val="85000"/>
+              </a:lnSpc>
+              <a:spcBef>
+                <a:spcPts val="200"/>
+              </a:spcBef>
+              <a:spcAft>
+                <a:spcPts val="200"/>
               </a:spcAft>
               <a:defRPr sz="1900"/>
             </a:pPr>
@@ -4785,10 +4848,13 @@
           <a:p>
             <a:pPr>
               <a:lnSpc>
-                <a:spcPct val="90000"/>
-              </a:lnSpc>
-              <a:spcAft>
-                <a:spcPts val="300"/>
+                <a:spcPct val="85000"/>
+              </a:lnSpc>
+              <a:spcBef>
+                <a:spcPts val="200"/>
+              </a:spcBef>
+              <a:spcAft>
+                <a:spcPts val="200"/>
               </a:spcAft>
               <a:defRPr sz="1900"/>
             </a:pPr>
@@ -4800,10 +4866,13 @@
           <a:p>
             <a:pPr>
               <a:lnSpc>
-                <a:spcPct val="90000"/>
-              </a:lnSpc>
-              <a:spcAft>
-                <a:spcPts val="300"/>
+                <a:spcPct val="85000"/>
+              </a:lnSpc>
+              <a:spcBef>
+                <a:spcPts val="200"/>
+              </a:spcBef>
+              <a:spcAft>
+                <a:spcPts val="200"/>
               </a:spcAft>
               <a:defRPr sz="1900"/>
             </a:pPr>
@@ -4844,10 +4913,19 @@
         </p:nvSpPr>
         <p:spPr/>
         <p:txBody>
-          <a:bodyPr wrap="square"/>
+          <a:bodyPr wrap="square" tIns="25400" bIns="25400" lIns="63500" rIns="63500"/>
           <a:lstStyle/>
           <a:p>
             <a:pPr>
+              <a:lnSpc>
+                <a:spcPct val="85000"/>
+              </a:lnSpc>
+              <a:spcBef>
+                <a:spcPts val="200"/>
+              </a:spcBef>
+              <a:spcAft>
+                <a:spcPts val="200"/>
+              </a:spcAft>
               <a:defRPr sz="3800" b="1">
                 <a:solidFill>
                   <a:srgbClr val="764BA2"/>
@@ -4855,6 +4933,7 @@
               </a:defRPr>
             </a:pPr>
             <a:r>
+              <a:rPr/>
               <a:t>🎬 Sunum Programı Nedir?</a:t>
             </a:r>
           </a:p>
@@ -4894,7 +4973,7 @@
           <a:noFill/>
         </p:spPr>
         <p:txBody>
-          <a:bodyPr wrap="square">
+          <a:bodyPr wrap="square" tIns="25400" bIns="25400" lIns="63500" rIns="63500">
             <a:spAutoFit/>
           </a:bodyPr>
           <a:lstStyle/>
@@ -4911,10 +4990,13 @@
           <a:p>
             <a:pPr>
               <a:lnSpc>
-                <a:spcPct val="90000"/>
-              </a:lnSpc>
-              <a:spcAft>
-                <a:spcPts val="300"/>
+                <a:spcPct val="85000"/>
+              </a:lnSpc>
+              <a:spcBef>
+                <a:spcPts val="200"/>
+              </a:spcBef>
+              <a:spcAft>
+                <a:spcPts val="200"/>
               </a:spcAft>
               <a:defRPr sz="1900"/>
             </a:pPr>
@@ -4937,10 +5019,13 @@
           <a:p>
             <a:pPr>
               <a:lnSpc>
-                <a:spcPct val="90000"/>
-              </a:lnSpc>
-              <a:spcAft>
-                <a:spcPts val="300"/>
+                <a:spcPct val="85000"/>
+              </a:lnSpc>
+              <a:spcBef>
+                <a:spcPts val="200"/>
+              </a:spcBef>
+              <a:spcAft>
+                <a:spcPts val="200"/>
               </a:spcAft>
               <a:defRPr sz="1900"/>
             </a:pPr>
@@ -4952,10 +5037,13 @@
           <a:p>
             <a:pPr lvl="1">
               <a:lnSpc>
-                <a:spcPct val="90000"/>
-              </a:lnSpc>
-              <a:spcAft>
-                <a:spcPts val="300"/>
+                <a:spcPct val="85000"/>
+              </a:lnSpc>
+              <a:spcBef>
+                <a:spcPts val="200"/>
+              </a:spcBef>
+              <a:spcAft>
+                <a:spcPts val="200"/>
               </a:spcAft>
               <a:defRPr sz="1700"/>
             </a:pPr>
@@ -4967,10 +5055,13 @@
           <a:p>
             <a:pPr lvl="1">
               <a:lnSpc>
-                <a:spcPct val="90000"/>
-              </a:lnSpc>
-              <a:spcAft>
-                <a:spcPts val="300"/>
+                <a:spcPct val="85000"/>
+              </a:lnSpc>
+              <a:spcBef>
+                <a:spcPts val="200"/>
+              </a:spcBef>
+              <a:spcAft>
+                <a:spcPts val="200"/>
               </a:spcAft>
               <a:defRPr sz="1700"/>
             </a:pPr>
@@ -4982,10 +5073,13 @@
           <a:p>
             <a:pPr lvl="1">
               <a:lnSpc>
-                <a:spcPct val="90000"/>
-              </a:lnSpc>
-              <a:spcAft>
-                <a:spcPts val="300"/>
+                <a:spcPct val="85000"/>
+              </a:lnSpc>
+              <a:spcBef>
+                <a:spcPts val="200"/>
+              </a:spcBef>
+              <a:spcAft>
+                <a:spcPts val="200"/>
               </a:spcAft>
               <a:defRPr sz="1700"/>
             </a:pPr>
@@ -4997,10 +5091,13 @@
           <a:p>
             <a:pPr lvl="1">
               <a:lnSpc>
-                <a:spcPct val="90000"/>
-              </a:lnSpc>
-              <a:spcAft>
-                <a:spcPts val="300"/>
+                <a:spcPct val="85000"/>
+              </a:lnSpc>
+              <a:spcBef>
+                <a:spcPts val="200"/>
+              </a:spcBef>
+              <a:spcAft>
+                <a:spcPts val="200"/>
               </a:spcAft>
               <a:defRPr sz="1700"/>
             </a:pPr>
@@ -5023,10 +5120,13 @@
           <a:p>
             <a:pPr>
               <a:lnSpc>
-                <a:spcPct val="90000"/>
-              </a:lnSpc>
-              <a:spcAft>
-                <a:spcPts val="300"/>
+                <a:spcPct val="85000"/>
+              </a:lnSpc>
+              <a:spcBef>
+                <a:spcPts val="200"/>
+              </a:spcBef>
+              <a:spcAft>
+                <a:spcPts val="200"/>
               </a:spcAft>
               <a:defRPr sz="1900"/>
             </a:pPr>
@@ -5038,10 +5138,13 @@
           <a:p>
             <a:pPr lvl="1">
               <a:lnSpc>
-                <a:spcPct val="90000"/>
-              </a:lnSpc>
-              <a:spcAft>
-                <a:spcPts val="300"/>
+                <a:spcPct val="85000"/>
+              </a:lnSpc>
+              <a:spcBef>
+                <a:spcPts val="200"/>
+              </a:spcBef>
+              <a:spcAft>
+                <a:spcPts val="200"/>
               </a:spcAft>
               <a:defRPr sz="1700"/>
             </a:pPr>
@@ -5053,10 +5156,13 @@
           <a:p>
             <a:pPr lvl="1">
               <a:lnSpc>
-                <a:spcPct val="90000"/>
-              </a:lnSpc>
-              <a:spcAft>
-                <a:spcPts val="300"/>
+                <a:spcPct val="85000"/>
+              </a:lnSpc>
+              <a:spcBef>
+                <a:spcPts val="200"/>
+              </a:spcBef>
+              <a:spcAft>
+                <a:spcPts val="200"/>
               </a:spcAft>
               <a:defRPr sz="1700"/>
             </a:pPr>
@@ -5068,10 +5174,13 @@
           <a:p>
             <a:pPr lvl="1">
               <a:lnSpc>
-                <a:spcPct val="90000"/>
-              </a:lnSpc>
-              <a:spcAft>
-                <a:spcPts val="300"/>
+                <a:spcPct val="85000"/>
+              </a:lnSpc>
+              <a:spcBef>
+                <a:spcPts val="200"/>
+              </a:spcBef>
+              <a:spcAft>
+                <a:spcPts val="200"/>
               </a:spcAft>
               <a:defRPr sz="1700"/>
             </a:pPr>
@@ -5083,10 +5192,13 @@
           <a:p>
             <a:pPr lvl="1">
               <a:lnSpc>
-                <a:spcPct val="90000"/>
-              </a:lnSpc>
-              <a:spcAft>
-                <a:spcPts val="300"/>
+                <a:spcPct val="85000"/>
+              </a:lnSpc>
+              <a:spcBef>
+                <a:spcPts val="200"/>
+              </a:spcBef>
+              <a:spcAft>
+                <a:spcPts val="200"/>
               </a:spcAft>
               <a:defRPr sz="1700"/>
             </a:pPr>
@@ -5109,10 +5221,13 @@
           <a:p>
             <a:pPr>
               <a:lnSpc>
-                <a:spcPct val="90000"/>
-              </a:lnSpc>
-              <a:spcAft>
-                <a:spcPts val="300"/>
+                <a:spcPct val="85000"/>
+              </a:lnSpc>
+              <a:spcBef>
+                <a:spcPts val="200"/>
+              </a:spcBef>
+              <a:spcAft>
+                <a:spcPts val="200"/>
               </a:spcAft>
               <a:defRPr sz="1900"/>
             </a:pPr>
@@ -5124,10 +5239,13 @@
           <a:p>
             <a:pPr lvl="1">
               <a:lnSpc>
-                <a:spcPct val="90000"/>
-              </a:lnSpc>
-              <a:spcAft>
-                <a:spcPts val="300"/>
+                <a:spcPct val="85000"/>
+              </a:lnSpc>
+              <a:spcBef>
+                <a:spcPts val="200"/>
+              </a:spcBef>
+              <a:spcAft>
+                <a:spcPts val="200"/>
               </a:spcAft>
               <a:defRPr sz="1700"/>
             </a:pPr>
@@ -5139,10 +5257,13 @@
           <a:p>
             <a:pPr lvl="1">
               <a:lnSpc>
-                <a:spcPct val="90000"/>
-              </a:lnSpc>
-              <a:spcAft>
-                <a:spcPts val="300"/>
+                <a:spcPct val="85000"/>
+              </a:lnSpc>
+              <a:spcBef>
+                <a:spcPts val="200"/>
+              </a:spcBef>
+              <a:spcAft>
+                <a:spcPts val="200"/>
               </a:spcAft>
               <a:defRPr sz="1700"/>
             </a:pPr>
@@ -5154,10 +5275,13 @@
           <a:p>
             <a:pPr lvl="1">
               <a:lnSpc>
-                <a:spcPct val="90000"/>
-              </a:lnSpc>
-              <a:spcAft>
-                <a:spcPts val="300"/>
+                <a:spcPct val="85000"/>
+              </a:lnSpc>
+              <a:spcBef>
+                <a:spcPts val="200"/>
+              </a:spcBef>
+              <a:spcAft>
+                <a:spcPts val="200"/>
               </a:spcAft>
               <a:defRPr sz="1700"/>
             </a:pPr>
@@ -5169,10 +5293,13 @@
           <a:p>
             <a:pPr lvl="1">
               <a:lnSpc>
-                <a:spcPct val="90000"/>
-              </a:lnSpc>
-              <a:spcAft>
-                <a:spcPts val="300"/>
+                <a:spcPct val="85000"/>
+              </a:lnSpc>
+              <a:spcBef>
+                <a:spcPts val="200"/>
+              </a:spcBef>
+              <a:spcAft>
+                <a:spcPts val="200"/>
               </a:spcAft>
               <a:defRPr sz="1700"/>
             </a:pPr>
@@ -5213,10 +5340,19 @@
         </p:nvSpPr>
         <p:spPr/>
         <p:txBody>
-          <a:bodyPr wrap="square"/>
+          <a:bodyPr wrap="square" tIns="25400" bIns="25400" lIns="63500" rIns="63500"/>
           <a:lstStyle/>
           <a:p>
             <a:pPr>
+              <a:lnSpc>
+                <a:spcPct val="85000"/>
+              </a:lnSpc>
+              <a:spcBef>
+                <a:spcPts val="200"/>
+              </a:spcBef>
+              <a:spcAft>
+                <a:spcPts val="200"/>
+              </a:spcAft>
               <a:defRPr sz="3800" b="1">
                 <a:solidFill>
                   <a:srgbClr val="764BA2"/>
@@ -5224,6 +5360,7 @@
               </a:defRPr>
             </a:pPr>
             <a:r>
+              <a:rPr/>
               <a:t>🎨 Slayt Tasarımı</a:t>
             </a:r>
           </a:p>
@@ -5263,7 +5400,7 @@
           <a:noFill/>
         </p:spPr>
         <p:txBody>
-          <a:bodyPr wrap="square">
+          <a:bodyPr wrap="square" tIns="25400" bIns="25400" lIns="63500" rIns="63500">
             <a:spAutoFit/>
           </a:bodyPr>
           <a:lstStyle/>
@@ -5280,10 +5417,13 @@
           <a:p>
             <a:pPr>
               <a:lnSpc>
-                <a:spcPct val="90000"/>
-              </a:lnSpc>
-              <a:spcAft>
-                <a:spcPts val="300"/>
+                <a:spcPct val="85000"/>
+              </a:lnSpc>
+              <a:spcBef>
+                <a:spcPts val="200"/>
+              </a:spcBef>
+              <a:spcAft>
+                <a:spcPts val="200"/>
               </a:spcAft>
               <a:defRPr sz="1900"/>
             </a:pPr>
@@ -5306,10 +5446,13 @@
           <a:p>
             <a:pPr>
               <a:lnSpc>
-                <a:spcPct val="90000"/>
-              </a:lnSpc>
-              <a:spcAft>
-                <a:spcPts val="300"/>
+                <a:spcPct val="85000"/>
+              </a:lnSpc>
+              <a:spcBef>
+                <a:spcPts val="200"/>
+              </a:spcBef>
+              <a:spcAft>
+                <a:spcPts val="200"/>
               </a:spcAft>
               <a:defRPr sz="1900"/>
             </a:pPr>
@@ -5332,10 +5475,13 @@
           <a:p>
             <a:pPr>
               <a:lnSpc>
-                <a:spcPct val="90000"/>
-              </a:lnSpc>
-              <a:spcAft>
-                <a:spcPts val="300"/>
+                <a:spcPct val="85000"/>
+              </a:lnSpc>
+              <a:spcBef>
+                <a:spcPts val="200"/>
+              </a:spcBef>
+              <a:spcAft>
+                <a:spcPts val="200"/>
               </a:spcAft>
               <a:defRPr sz="1900"/>
             </a:pPr>
@@ -5347,10 +5493,13 @@
           <a:p>
             <a:pPr lvl="1">
               <a:lnSpc>
-                <a:spcPct val="90000"/>
-              </a:lnSpc>
-              <a:spcAft>
-                <a:spcPts val="300"/>
+                <a:spcPct val="85000"/>
+              </a:lnSpc>
+              <a:spcBef>
+                <a:spcPts val="200"/>
+              </a:spcBef>
+              <a:spcAft>
+                <a:spcPts val="200"/>
               </a:spcAft>
               <a:defRPr sz="1700"/>
             </a:pPr>
@@ -5362,10 +5511,13 @@
           <a:p>
             <a:pPr lvl="1">
               <a:lnSpc>
-                <a:spcPct val="90000"/>
-              </a:lnSpc>
-              <a:spcAft>
-                <a:spcPts val="300"/>
+                <a:spcPct val="85000"/>
+              </a:lnSpc>
+              <a:spcBef>
+                <a:spcPts val="200"/>
+              </a:spcBef>
+              <a:spcAft>
+                <a:spcPts val="200"/>
               </a:spcAft>
               <a:defRPr sz="1700"/>
             </a:pPr>
@@ -5377,10 +5529,13 @@
           <a:p>
             <a:pPr lvl="1">
               <a:lnSpc>
-                <a:spcPct val="90000"/>
-              </a:lnSpc>
-              <a:spcAft>
-                <a:spcPts val="300"/>
+                <a:spcPct val="85000"/>
+              </a:lnSpc>
+              <a:spcBef>
+                <a:spcPts val="200"/>
+              </a:spcBef>
+              <a:spcAft>
+                <a:spcPts val="200"/>
               </a:spcAft>
               <a:defRPr sz="1700"/>
             </a:pPr>
@@ -5403,10 +5558,13 @@
           <a:p>
             <a:pPr>
               <a:lnSpc>
-                <a:spcPct val="90000"/>
-              </a:lnSpc>
-              <a:spcAft>
-                <a:spcPts val="300"/>
+                <a:spcPct val="85000"/>
+              </a:lnSpc>
+              <a:spcBef>
+                <a:spcPts val="200"/>
+              </a:spcBef>
+              <a:spcAft>
+                <a:spcPts val="200"/>
               </a:spcAft>
               <a:defRPr sz="1900"/>
             </a:pPr>
@@ -5418,10 +5576,13 @@
           <a:p>
             <a:pPr lvl="1">
               <a:lnSpc>
-                <a:spcPct val="90000"/>
-              </a:lnSpc>
-              <a:spcAft>
-                <a:spcPts val="300"/>
+                <a:spcPct val="85000"/>
+              </a:lnSpc>
+              <a:spcBef>
+                <a:spcPts val="200"/>
+              </a:spcBef>
+              <a:spcAft>
+                <a:spcPts val="200"/>
               </a:spcAft>
               <a:defRPr sz="1700"/>
             </a:pPr>
@@ -5433,10 +5594,13 @@
           <a:p>
             <a:pPr lvl="1">
               <a:lnSpc>
-                <a:spcPct val="90000"/>
-              </a:lnSpc>
-              <a:spcAft>
-                <a:spcPts val="300"/>
+                <a:spcPct val="85000"/>
+              </a:lnSpc>
+              <a:spcBef>
+                <a:spcPts val="200"/>
+              </a:spcBef>
+              <a:spcAft>
+                <a:spcPts val="200"/>
               </a:spcAft>
               <a:defRPr sz="1700"/>
             </a:pPr>
@@ -5459,10 +5623,13 @@
           <a:p>
             <a:pPr>
               <a:lnSpc>
-                <a:spcPct val="90000"/>
-              </a:lnSpc>
-              <a:spcAft>
-                <a:spcPts val="300"/>
+                <a:spcPct val="85000"/>
+              </a:lnSpc>
+              <a:spcBef>
+                <a:spcPts val="200"/>
+              </a:spcBef>
+              <a:spcAft>
+                <a:spcPts val="200"/>
               </a:spcAft>
               <a:defRPr sz="1900"/>
             </a:pPr>
@@ -5474,10 +5641,13 @@
           <a:p>
             <a:pPr lvl="1">
               <a:lnSpc>
-                <a:spcPct val="90000"/>
-              </a:lnSpc>
-              <a:spcAft>
-                <a:spcPts val="300"/>
+                <a:spcPct val="85000"/>
+              </a:lnSpc>
+              <a:spcBef>
+                <a:spcPts val="200"/>
+              </a:spcBef>
+              <a:spcAft>
+                <a:spcPts val="200"/>
               </a:spcAft>
               <a:defRPr sz="1700"/>
             </a:pPr>
@@ -5489,10 +5659,13 @@
           <a:p>
             <a:pPr lvl="1">
               <a:lnSpc>
-                <a:spcPct val="90000"/>
-              </a:lnSpc>
-              <a:spcAft>
-                <a:spcPts val="300"/>
+                <a:spcPct val="85000"/>
+              </a:lnSpc>
+              <a:spcBef>
+                <a:spcPts val="200"/>
+              </a:spcBef>
+              <a:spcAft>
+                <a:spcPts val="200"/>
               </a:spcAft>
               <a:defRPr sz="1700"/>
             </a:pPr>
@@ -5504,10 +5677,13 @@
           <a:p>
             <a:pPr lvl="1">
               <a:lnSpc>
-                <a:spcPct val="90000"/>
-              </a:lnSpc>
-              <a:spcAft>
-                <a:spcPts val="300"/>
+                <a:spcPct val="85000"/>
+              </a:lnSpc>
+              <a:spcBef>
+                <a:spcPts val="200"/>
+              </a:spcBef>
+              <a:spcAft>
+                <a:spcPts val="200"/>
               </a:spcAft>
               <a:defRPr sz="1700"/>
             </a:pPr>
@@ -5530,10 +5706,13 @@
           <a:p>
             <a:pPr>
               <a:lnSpc>
-                <a:spcPct val="90000"/>
-              </a:lnSpc>
-              <a:spcAft>
-                <a:spcPts val="300"/>
+                <a:spcPct val="85000"/>
+              </a:lnSpc>
+              <a:spcBef>
+                <a:spcPts val="200"/>
+              </a:spcBef>
+              <a:spcAft>
+                <a:spcPts val="200"/>
               </a:spcAft>
               <a:defRPr sz="1900"/>
             </a:pPr>
@@ -5545,10 +5724,13 @@
           <a:p>
             <a:pPr lvl="1">
               <a:lnSpc>
-                <a:spcPct val="90000"/>
-              </a:lnSpc>
-              <a:spcAft>
-                <a:spcPts val="300"/>
+                <a:spcPct val="85000"/>
+              </a:lnSpc>
+              <a:spcBef>
+                <a:spcPts val="200"/>
+              </a:spcBef>
+              <a:spcAft>
+                <a:spcPts val="200"/>
               </a:spcAft>
               <a:defRPr sz="1700"/>
             </a:pPr>
@@ -5560,10 +5742,13 @@
           <a:p>
             <a:pPr lvl="1">
               <a:lnSpc>
-                <a:spcPct val="90000"/>
-              </a:lnSpc>
-              <a:spcAft>
-                <a:spcPts val="300"/>
+                <a:spcPct val="85000"/>
+              </a:lnSpc>
+              <a:spcBef>
+                <a:spcPts val="200"/>
+              </a:spcBef>
+              <a:spcAft>
+                <a:spcPts val="200"/>
               </a:spcAft>
               <a:defRPr sz="1700"/>
             </a:pPr>
@@ -5575,10 +5760,13 @@
           <a:p>
             <a:pPr lvl="1">
               <a:lnSpc>
-                <a:spcPct val="90000"/>
-              </a:lnSpc>
-              <a:spcAft>
-                <a:spcPts val="300"/>
+                <a:spcPct val="85000"/>
+              </a:lnSpc>
+              <a:spcBef>
+                <a:spcPts val="200"/>
+              </a:spcBef>
+              <a:spcAft>
+                <a:spcPts val="200"/>
               </a:spcAft>
               <a:defRPr sz="1700"/>
             </a:pPr>
@@ -5601,10 +5789,13 @@
           <a:p>
             <a:pPr>
               <a:lnSpc>
-                <a:spcPct val="90000"/>
-              </a:lnSpc>
-              <a:spcAft>
-                <a:spcPts val="300"/>
+                <a:spcPct val="85000"/>
+              </a:lnSpc>
+              <a:spcBef>
+                <a:spcPts val="200"/>
+              </a:spcBef>
+              <a:spcAft>
+                <a:spcPts val="200"/>
               </a:spcAft>
               <a:defRPr sz="1900"/>
             </a:pPr>
@@ -5616,10 +5807,13 @@
           <a:p>
             <a:pPr>
               <a:lnSpc>
-                <a:spcPct val="90000"/>
-              </a:lnSpc>
-              <a:spcAft>
-                <a:spcPts val="300"/>
+                <a:spcPct val="85000"/>
+              </a:lnSpc>
+              <a:spcBef>
+                <a:spcPts val="200"/>
+              </a:spcBef>
+              <a:spcAft>
+                <a:spcPts val="200"/>
               </a:spcAft>
               <a:defRPr sz="1900"/>
             </a:pPr>
@@ -5660,10 +5854,19 @@
         </p:nvSpPr>
         <p:spPr/>
         <p:txBody>
-          <a:bodyPr wrap="square"/>
+          <a:bodyPr wrap="square" tIns="25400" bIns="25400" lIns="63500" rIns="63500"/>
           <a:lstStyle/>
           <a:p>
             <a:pPr>
+              <a:lnSpc>
+                <a:spcPct val="85000"/>
+              </a:lnSpc>
+              <a:spcBef>
+                <a:spcPts val="200"/>
+              </a:spcBef>
+              <a:spcAft>
+                <a:spcPts val="200"/>
+              </a:spcAft>
               <a:defRPr sz="3800" b="1">
                 <a:solidFill>
                   <a:srgbClr val="764BA2"/>
@@ -5671,6 +5874,7 @@
               </a:defRPr>
             </a:pPr>
             <a:r>
+              <a:rPr/>
               <a:t>✨ Animasyonlar</a:t>
             </a:r>
           </a:p>
@@ -5710,7 +5914,7 @@
           <a:noFill/>
         </p:spPr>
         <p:txBody>
-          <a:bodyPr wrap="square">
+          <a:bodyPr wrap="square" tIns="25400" bIns="25400" lIns="63500" rIns="63500">
             <a:spAutoFit/>
           </a:bodyPr>
           <a:lstStyle/>
@@ -5727,10 +5931,13 @@
           <a:p>
             <a:pPr>
               <a:lnSpc>
-                <a:spcPct val="90000"/>
-              </a:lnSpc>
-              <a:spcAft>
-                <a:spcPts val="300"/>
+                <a:spcPct val="85000"/>
+              </a:lnSpc>
+              <a:spcBef>
+                <a:spcPts val="200"/>
+              </a:spcBef>
+              <a:spcAft>
+                <a:spcPts val="200"/>
               </a:spcAft>
               <a:defRPr sz="1900"/>
             </a:pPr>
@@ -5753,10 +5960,13 @@
           <a:p>
             <a:pPr>
               <a:lnSpc>
-                <a:spcPct val="90000"/>
-              </a:lnSpc>
-              <a:spcAft>
-                <a:spcPts val="300"/>
+                <a:spcPct val="85000"/>
+              </a:lnSpc>
+              <a:spcBef>
+                <a:spcPts val="200"/>
+              </a:spcBef>
+              <a:spcAft>
+                <a:spcPts val="200"/>
               </a:spcAft>
               <a:defRPr sz="1900"/>
             </a:pPr>
@@ -5779,10 +5989,13 @@
           <a:p>
             <a:pPr>
               <a:lnSpc>
-                <a:spcPct val="90000"/>
-              </a:lnSpc>
-              <a:spcAft>
-                <a:spcPts val="300"/>
+                <a:spcPct val="85000"/>
+              </a:lnSpc>
+              <a:spcBef>
+                <a:spcPts val="200"/>
+              </a:spcBef>
+              <a:spcAft>
+                <a:spcPts val="200"/>
               </a:spcAft>
               <a:defRPr sz="1900"/>
             </a:pPr>
@@ -5794,10 +6007,13 @@
           <a:p>
             <a:pPr lvl="1">
               <a:lnSpc>
-                <a:spcPct val="90000"/>
-              </a:lnSpc>
-              <a:spcAft>
-                <a:spcPts val="300"/>
+                <a:spcPct val="85000"/>
+              </a:lnSpc>
+              <a:spcBef>
+                <a:spcPts val="200"/>
+              </a:spcBef>
+              <a:spcAft>
+                <a:spcPts val="200"/>
               </a:spcAft>
               <a:defRPr sz="1700"/>
             </a:pPr>
@@ -5809,10 +6025,13 @@
           <a:p>
             <a:pPr lvl="1">
               <a:lnSpc>
-                <a:spcPct val="90000"/>
-              </a:lnSpc>
-              <a:spcAft>
-                <a:spcPts val="300"/>
+                <a:spcPct val="85000"/>
+              </a:lnSpc>
+              <a:spcBef>
+                <a:spcPts val="200"/>
+              </a:spcBef>
+              <a:spcAft>
+                <a:spcPts val="200"/>
               </a:spcAft>
               <a:defRPr sz="1700"/>
             </a:pPr>
@@ -5824,10 +6043,13 @@
           <a:p>
             <a:pPr lvl="1">
               <a:lnSpc>
-                <a:spcPct val="90000"/>
-              </a:lnSpc>
-              <a:spcAft>
-                <a:spcPts val="300"/>
+                <a:spcPct val="85000"/>
+              </a:lnSpc>
+              <a:spcBef>
+                <a:spcPts val="200"/>
+              </a:spcBef>
+              <a:spcAft>
+                <a:spcPts val="200"/>
               </a:spcAft>
               <a:defRPr sz="1700"/>
             </a:pPr>
@@ -5850,10 +6072,13 @@
           <a:p>
             <a:pPr>
               <a:lnSpc>
-                <a:spcPct val="90000"/>
-              </a:lnSpc>
-              <a:spcAft>
-                <a:spcPts val="300"/>
+                <a:spcPct val="85000"/>
+              </a:lnSpc>
+              <a:spcBef>
+                <a:spcPts val="200"/>
+              </a:spcBef>
+              <a:spcAft>
+                <a:spcPts val="200"/>
               </a:spcAft>
               <a:defRPr sz="1900"/>
             </a:pPr>
@@ -5865,10 +6090,13 @@
           <a:p>
             <a:pPr lvl="1">
               <a:lnSpc>
-                <a:spcPct val="90000"/>
-              </a:lnSpc>
-              <a:spcAft>
-                <a:spcPts val="300"/>
+                <a:spcPct val="85000"/>
+              </a:lnSpc>
+              <a:spcBef>
+                <a:spcPts val="200"/>
+              </a:spcBef>
+              <a:spcAft>
+                <a:spcPts val="200"/>
               </a:spcAft>
               <a:defRPr sz="1700"/>
             </a:pPr>
@@ -5880,10 +6108,13 @@
           <a:p>
             <a:pPr lvl="1">
               <a:lnSpc>
-                <a:spcPct val="90000"/>
-              </a:lnSpc>
-              <a:spcAft>
-                <a:spcPts val="300"/>
+                <a:spcPct val="85000"/>
+              </a:lnSpc>
+              <a:spcBef>
+                <a:spcPts val="200"/>
+              </a:spcBef>
+              <a:spcAft>
+                <a:spcPts val="200"/>
               </a:spcAft>
               <a:defRPr sz="1700"/>
             </a:pPr>
@@ -5895,10 +6126,13 @@
           <a:p>
             <a:pPr lvl="1">
               <a:lnSpc>
-                <a:spcPct val="90000"/>
-              </a:lnSpc>
-              <a:spcAft>
-                <a:spcPts val="300"/>
+                <a:spcPct val="85000"/>
+              </a:lnSpc>
+              <a:spcBef>
+                <a:spcPts val="200"/>
+              </a:spcBef>
+              <a:spcAft>
+                <a:spcPts val="200"/>
               </a:spcAft>
               <a:defRPr sz="1700"/>
             </a:pPr>
@@ -5921,10 +6155,13 @@
           <a:p>
             <a:pPr>
               <a:lnSpc>
-                <a:spcPct val="90000"/>
-              </a:lnSpc>
-              <a:spcAft>
-                <a:spcPts val="300"/>
+                <a:spcPct val="85000"/>
+              </a:lnSpc>
+              <a:spcBef>
+                <a:spcPts val="200"/>
+              </a:spcBef>
+              <a:spcAft>
+                <a:spcPts val="200"/>
               </a:spcAft>
               <a:defRPr sz="1900"/>
             </a:pPr>
@@ -5936,10 +6173,13 @@
           <a:p>
             <a:pPr lvl="1">
               <a:lnSpc>
-                <a:spcPct val="90000"/>
-              </a:lnSpc>
-              <a:spcAft>
-                <a:spcPts val="300"/>
+                <a:spcPct val="85000"/>
+              </a:lnSpc>
+              <a:spcBef>
+                <a:spcPts val="200"/>
+              </a:spcBef>
+              <a:spcAft>
+                <a:spcPts val="200"/>
               </a:spcAft>
               <a:defRPr sz="1700"/>
             </a:pPr>
@@ -5951,10 +6191,13 @@
           <a:p>
             <a:pPr lvl="1">
               <a:lnSpc>
-                <a:spcPct val="90000"/>
-              </a:lnSpc>
-              <a:spcAft>
-                <a:spcPts val="300"/>
+                <a:spcPct val="85000"/>
+              </a:lnSpc>
+              <a:spcBef>
+                <a:spcPts val="200"/>
+              </a:spcBef>
+              <a:spcAft>
+                <a:spcPts val="200"/>
               </a:spcAft>
               <a:defRPr sz="1700"/>
             </a:pPr>
@@ -5977,10 +6220,13 @@
           <a:p>
             <a:pPr>
               <a:lnSpc>
-                <a:spcPct val="90000"/>
-              </a:lnSpc>
-              <a:spcAft>
-                <a:spcPts val="300"/>
+                <a:spcPct val="85000"/>
+              </a:lnSpc>
+              <a:spcBef>
+                <a:spcPts val="200"/>
+              </a:spcBef>
+              <a:spcAft>
+                <a:spcPts val="200"/>
               </a:spcAft>
               <a:defRPr sz="1900"/>
             </a:pPr>
@@ -5992,10 +6238,13 @@
           <a:p>
             <a:pPr lvl="1">
               <a:lnSpc>
-                <a:spcPct val="90000"/>
-              </a:lnSpc>
-              <a:spcAft>
-                <a:spcPts val="300"/>
+                <a:spcPct val="85000"/>
+              </a:lnSpc>
+              <a:spcBef>
+                <a:spcPts val="200"/>
+              </a:spcBef>
+              <a:spcAft>
+                <a:spcPts val="200"/>
               </a:spcAft>
               <a:defRPr sz="1700"/>
             </a:pPr>
@@ -6007,10 +6256,13 @@
           <a:p>
             <a:pPr lvl="1">
               <a:lnSpc>
-                <a:spcPct val="90000"/>
-              </a:lnSpc>
-              <a:spcAft>
-                <a:spcPts val="300"/>
+                <a:spcPct val="85000"/>
+              </a:lnSpc>
+              <a:spcBef>
+                <a:spcPts val="200"/>
+              </a:spcBef>
+              <a:spcAft>
+                <a:spcPts val="200"/>
               </a:spcAft>
               <a:defRPr sz="1700"/>
             </a:pPr>
@@ -6033,10 +6285,13 @@
           <a:p>
             <a:pPr>
               <a:lnSpc>
-                <a:spcPct val="90000"/>
-              </a:lnSpc>
-              <a:spcAft>
-                <a:spcPts val="300"/>
+                <a:spcPct val="85000"/>
+              </a:lnSpc>
+              <a:spcBef>
+                <a:spcPts val="200"/>
+              </a:spcBef>
+              <a:spcAft>
+                <a:spcPts val="200"/>
               </a:spcAft>
               <a:defRPr sz="1900"/>
             </a:pPr>
@@ -6048,10 +6303,13 @@
           <a:p>
             <a:pPr lvl="1">
               <a:lnSpc>
-                <a:spcPct val="90000"/>
-              </a:lnSpc>
-              <a:spcAft>
-                <a:spcPts val="300"/>
+                <a:spcPct val="85000"/>
+              </a:lnSpc>
+              <a:spcBef>
+                <a:spcPts val="200"/>
+              </a:spcBef>
+              <a:spcAft>
+                <a:spcPts val="200"/>
               </a:spcAft>
               <a:defRPr sz="1700"/>
             </a:pPr>
@@ -6063,10 +6321,13 @@
           <a:p>
             <a:pPr lvl="1">
               <a:lnSpc>
-                <a:spcPct val="90000"/>
-              </a:lnSpc>
-              <a:spcAft>
-                <a:spcPts val="300"/>
+                <a:spcPct val="85000"/>
+              </a:lnSpc>
+              <a:spcBef>
+                <a:spcPts val="200"/>
+              </a:spcBef>
+              <a:spcAft>
+                <a:spcPts val="200"/>
               </a:spcAft>
               <a:defRPr sz="1700"/>
             </a:pPr>
@@ -6078,10 +6339,13 @@
           <a:p>
             <a:pPr lvl="1">
               <a:lnSpc>
-                <a:spcPct val="90000"/>
-              </a:lnSpc>
-              <a:spcAft>
-                <a:spcPts val="300"/>
+                <a:spcPct val="85000"/>
+              </a:lnSpc>
+              <a:spcBef>
+                <a:spcPts val="200"/>
+              </a:spcBef>
+              <a:spcAft>
+                <a:spcPts val="200"/>
               </a:spcAft>
               <a:defRPr sz="1700"/>
             </a:pPr>
@@ -6122,10 +6386,19 @@
         </p:nvSpPr>
         <p:spPr/>
         <p:txBody>
-          <a:bodyPr wrap="square"/>
+          <a:bodyPr wrap="square" tIns="25400" bIns="25400" lIns="63500" rIns="63500"/>
           <a:lstStyle/>
           <a:p>
             <a:pPr>
+              <a:lnSpc>
+                <a:spcPct val="85000"/>
+              </a:lnSpc>
+              <a:spcBef>
+                <a:spcPts val="200"/>
+              </a:spcBef>
+              <a:spcAft>
+                <a:spcPts val="200"/>
+              </a:spcAft>
               <a:defRPr sz="3800" b="1">
                 <a:solidFill>
                   <a:srgbClr val="764BA2"/>
@@ -6133,6 +6406,7 @@
               </a:defRPr>
             </a:pPr>
             <a:r>
+              <a:rPr/>
               <a:t>🎬 Geçiş Efektleri</a:t>
             </a:r>
           </a:p>
@@ -6172,7 +6446,7 @@
           <a:noFill/>
         </p:spPr>
         <p:txBody>
-          <a:bodyPr wrap="square">
+          <a:bodyPr wrap="square" tIns="25400" bIns="25400" lIns="63500" rIns="63500">
             <a:spAutoFit/>
           </a:bodyPr>
           <a:lstStyle/>
@@ -6189,10 +6463,13 @@
           <a:p>
             <a:pPr>
               <a:lnSpc>
-                <a:spcPct val="90000"/>
-              </a:lnSpc>
-              <a:spcAft>
-                <a:spcPts val="300"/>
+                <a:spcPct val="85000"/>
+              </a:lnSpc>
+              <a:spcBef>
+                <a:spcPts val="200"/>
+              </a:spcBef>
+              <a:spcAft>
+                <a:spcPts val="200"/>
               </a:spcAft>
               <a:defRPr sz="1900"/>
             </a:pPr>
@@ -6215,10 +6492,13 @@
           <a:p>
             <a:pPr>
               <a:lnSpc>
-                <a:spcPct val="90000"/>
-              </a:lnSpc>
-              <a:spcAft>
-                <a:spcPts val="300"/>
+                <a:spcPct val="85000"/>
+              </a:lnSpc>
+              <a:spcBef>
+                <a:spcPts val="200"/>
+              </a:spcBef>
+              <a:spcAft>
+                <a:spcPts val="200"/>
               </a:spcAft>
               <a:defRPr sz="1900"/>
             </a:pPr>
@@ -6230,10 +6510,13 @@
           <a:p>
             <a:pPr lvl="1">
               <a:lnSpc>
-                <a:spcPct val="90000"/>
-              </a:lnSpc>
-              <a:spcAft>
-                <a:spcPts val="300"/>
+                <a:spcPct val="85000"/>
+              </a:lnSpc>
+              <a:spcBef>
+                <a:spcPts val="200"/>
+              </a:spcBef>
+              <a:spcAft>
+                <a:spcPts val="200"/>
               </a:spcAft>
               <a:defRPr sz="1700"/>
             </a:pPr>
@@ -6245,10 +6528,13 @@
           <a:p>
             <a:pPr lvl="1">
               <a:lnSpc>
-                <a:spcPct val="90000"/>
-              </a:lnSpc>
-              <a:spcAft>
-                <a:spcPts val="300"/>
+                <a:spcPct val="85000"/>
+              </a:lnSpc>
+              <a:spcBef>
+                <a:spcPts val="200"/>
+              </a:spcBef>
+              <a:spcAft>
+                <a:spcPts val="200"/>
               </a:spcAft>
               <a:defRPr sz="1700"/>
             </a:pPr>
@@ -6260,10 +6546,13 @@
           <a:p>
             <a:pPr lvl="1">
               <a:lnSpc>
-                <a:spcPct val="90000"/>
-              </a:lnSpc>
-              <a:spcAft>
-                <a:spcPts val="300"/>
+                <a:spcPct val="85000"/>
+              </a:lnSpc>
+              <a:spcBef>
+                <a:spcPts val="200"/>
+              </a:spcBef>
+              <a:spcAft>
+                <a:spcPts val="200"/>
               </a:spcAft>
               <a:defRPr sz="1700"/>
             </a:pPr>
@@ -6275,10 +6564,13 @@
           <a:p>
             <a:pPr lvl="1">
               <a:lnSpc>
-                <a:spcPct val="90000"/>
-              </a:lnSpc>
-              <a:spcAft>
-                <a:spcPts val="300"/>
+                <a:spcPct val="85000"/>
+              </a:lnSpc>
+              <a:spcBef>
+                <a:spcPts val="200"/>
+              </a:spcBef>
+              <a:spcAft>
+                <a:spcPts val="200"/>
               </a:spcAft>
               <a:defRPr sz="1700"/>
             </a:pPr>
@@ -6301,10 +6593,13 @@
           <a:p>
             <a:pPr>
               <a:lnSpc>
-                <a:spcPct val="90000"/>
-              </a:lnSpc>
-              <a:spcAft>
-                <a:spcPts val="300"/>
+                <a:spcPct val="85000"/>
+              </a:lnSpc>
+              <a:spcBef>
+                <a:spcPts val="200"/>
+              </a:spcBef>
+              <a:spcAft>
+                <a:spcPts val="200"/>
               </a:spcAft>
               <a:defRPr sz="1900"/>
             </a:pPr>
@@ -6316,10 +6611,13 @@
           <a:p>
             <a:pPr lvl="1">
               <a:lnSpc>
-                <a:spcPct val="90000"/>
-              </a:lnSpc>
-              <a:spcAft>
-                <a:spcPts val="300"/>
+                <a:spcPct val="85000"/>
+              </a:lnSpc>
+              <a:spcBef>
+                <a:spcPts val="200"/>
+              </a:spcBef>
+              <a:spcAft>
+                <a:spcPts val="200"/>
               </a:spcAft>
               <a:defRPr sz="1700"/>
             </a:pPr>
@@ -6331,10 +6629,13 @@
           <a:p>
             <a:pPr lvl="1">
               <a:lnSpc>
-                <a:spcPct val="90000"/>
-              </a:lnSpc>
-              <a:spcAft>
-                <a:spcPts val="300"/>
+                <a:spcPct val="85000"/>
+              </a:lnSpc>
+              <a:spcBef>
+                <a:spcPts val="200"/>
+              </a:spcBef>
+              <a:spcAft>
+                <a:spcPts val="200"/>
               </a:spcAft>
               <a:defRPr sz="1700"/>
             </a:pPr>
@@ -6346,10 +6647,13 @@
           <a:p>
             <a:pPr lvl="1">
               <a:lnSpc>
-                <a:spcPct val="90000"/>
-              </a:lnSpc>
-              <a:spcAft>
-                <a:spcPts val="300"/>
+                <a:spcPct val="85000"/>
+              </a:lnSpc>
+              <a:spcBef>
+                <a:spcPts val="200"/>
+              </a:spcBef>
+              <a:spcAft>
+                <a:spcPts val="200"/>
               </a:spcAft>
               <a:defRPr sz="1700"/>
             </a:pPr>
@@ -6372,10 +6676,13 @@
           <a:p>
             <a:pPr>
               <a:lnSpc>
-                <a:spcPct val="90000"/>
-              </a:lnSpc>
-              <a:spcAft>
-                <a:spcPts val="300"/>
+                <a:spcPct val="85000"/>
+              </a:lnSpc>
+              <a:spcBef>
+                <a:spcPts val="200"/>
+              </a:spcBef>
+              <a:spcAft>
+                <a:spcPts val="200"/>
               </a:spcAft>
               <a:defRPr sz="1900"/>
             </a:pPr>
@@ -6387,10 +6694,13 @@
           <a:p>
             <a:pPr lvl="1">
               <a:lnSpc>
-                <a:spcPct val="90000"/>
-              </a:lnSpc>
-              <a:spcAft>
-                <a:spcPts val="300"/>
+                <a:spcPct val="85000"/>
+              </a:lnSpc>
+              <a:spcBef>
+                <a:spcPts val="200"/>
+              </a:spcBef>
+              <a:spcAft>
+                <a:spcPts val="200"/>
               </a:spcAft>
               <a:defRPr sz="1700"/>
             </a:pPr>
@@ -6402,10 +6712,13 @@
           <a:p>
             <a:pPr lvl="1">
               <a:lnSpc>
-                <a:spcPct val="90000"/>
-              </a:lnSpc>
-              <a:spcAft>
-                <a:spcPts val="300"/>
+                <a:spcPct val="85000"/>
+              </a:lnSpc>
+              <a:spcBef>
+                <a:spcPts val="200"/>
+              </a:spcBef>
+              <a:spcAft>
+                <a:spcPts val="200"/>
               </a:spcAft>
               <a:defRPr sz="1700"/>
             </a:pPr>
@@ -6417,10 +6730,13 @@
           <a:p>
             <a:pPr lvl="1">
               <a:lnSpc>
-                <a:spcPct val="90000"/>
-              </a:lnSpc>
-              <a:spcAft>
-                <a:spcPts val="300"/>
+                <a:spcPct val="85000"/>
+              </a:lnSpc>
+              <a:spcBef>
+                <a:spcPts val="200"/>
+              </a:spcBef>
+              <a:spcAft>
+                <a:spcPts val="200"/>
               </a:spcAft>
               <a:defRPr sz="1700"/>
             </a:pPr>
@@ -6443,10 +6759,13 @@
           <a:p>
             <a:pPr>
               <a:lnSpc>
-                <a:spcPct val="90000"/>
-              </a:lnSpc>
-              <a:spcAft>
-                <a:spcPts val="300"/>
+                <a:spcPct val="85000"/>
+              </a:lnSpc>
+              <a:spcBef>
+                <a:spcPts val="200"/>
+              </a:spcBef>
+              <a:spcAft>
+                <a:spcPts val="200"/>
               </a:spcAft>
               <a:defRPr sz="1900"/>
             </a:pPr>
@@ -6458,10 +6777,13 @@
           <a:p>
             <a:pPr lvl="1">
               <a:lnSpc>
-                <a:spcPct val="90000"/>
-              </a:lnSpc>
-              <a:spcAft>
-                <a:spcPts val="300"/>
+                <a:spcPct val="85000"/>
+              </a:lnSpc>
+              <a:spcBef>
+                <a:spcPts val="200"/>
+              </a:spcBef>
+              <a:spcAft>
+                <a:spcPts val="200"/>
               </a:spcAft>
               <a:defRPr sz="1700"/>
             </a:pPr>
@@ -6473,10 +6795,13 @@
           <a:p>
             <a:pPr lvl="1">
               <a:lnSpc>
-                <a:spcPct val="90000"/>
-              </a:lnSpc>
-              <a:spcAft>
-                <a:spcPts val="300"/>
+                <a:spcPct val="85000"/>
+              </a:lnSpc>
+              <a:spcBef>
+                <a:spcPts val="200"/>
+              </a:spcBef>
+              <a:spcAft>
+                <a:spcPts val="200"/>
               </a:spcAft>
               <a:defRPr sz="1700"/>
             </a:pPr>
@@ -6488,10 +6813,13 @@
           <a:p>
             <a:pPr lvl="1">
               <a:lnSpc>
-                <a:spcPct val="90000"/>
-              </a:lnSpc>
-              <a:spcAft>
-                <a:spcPts val="300"/>
+                <a:spcPct val="85000"/>
+              </a:lnSpc>
+              <a:spcBef>
+                <a:spcPts val="200"/>
+              </a:spcBef>
+              <a:spcAft>
+                <a:spcPts val="200"/>
               </a:spcAft>
               <a:defRPr sz="1700"/>
             </a:pPr>
@@ -6532,10 +6860,19 @@
         </p:nvSpPr>
         <p:spPr/>
         <p:txBody>
-          <a:bodyPr wrap="square"/>
+          <a:bodyPr wrap="square" tIns="25400" bIns="25400" lIns="63500" rIns="63500"/>
           <a:lstStyle/>
           <a:p>
             <a:pPr>
+              <a:lnSpc>
+                <a:spcPct val="85000"/>
+              </a:lnSpc>
+              <a:spcBef>
+                <a:spcPts val="200"/>
+              </a:spcBef>
+              <a:spcAft>
+                <a:spcPts val="200"/>
+              </a:spcAft>
               <a:defRPr sz="3800" b="1">
                 <a:solidFill>
                   <a:srgbClr val="764BA2"/>
@@ -6543,6 +6880,7 @@
               </a:defRPr>
             </a:pPr>
             <a:r>
+              <a:rPr/>
               <a:t>🎤 Etkili Sunum Yapma</a:t>
             </a:r>
           </a:p>
@@ -6582,7 +6920,7 @@
           <a:noFill/>
         </p:spPr>
         <p:txBody>
-          <a:bodyPr wrap="square">
+          <a:bodyPr wrap="square" tIns="25400" bIns="25400" lIns="63500" rIns="63500">
             <a:spAutoFit/>
           </a:bodyPr>
           <a:lstStyle/>
@@ -6599,10 +6937,13 @@
           <a:p>
             <a:pPr>
               <a:lnSpc>
-                <a:spcPct val="90000"/>
-              </a:lnSpc>
-              <a:spcAft>
-                <a:spcPts val="300"/>
+                <a:spcPct val="85000"/>
+              </a:lnSpc>
+              <a:spcBef>
+                <a:spcPts val="200"/>
+              </a:spcBef>
+              <a:spcAft>
+                <a:spcPts val="200"/>
               </a:spcAft>
               <a:defRPr sz="1900"/>
             </a:pPr>
@@ -6625,10 +6966,13 @@
           <a:p>
             <a:pPr>
               <a:lnSpc>
-                <a:spcPct val="90000"/>
-              </a:lnSpc>
-              <a:spcAft>
-                <a:spcPts val="300"/>
+                <a:spcPct val="85000"/>
+              </a:lnSpc>
+              <a:spcBef>
+                <a:spcPts val="200"/>
+              </a:spcBef>
+              <a:spcAft>
+                <a:spcPts val="200"/>
               </a:spcAft>
               <a:defRPr sz="1900"/>
             </a:pPr>
@@ -6640,10 +6984,13 @@
           <a:p>
             <a:pPr lvl="1">
               <a:lnSpc>
-                <a:spcPct val="90000"/>
-              </a:lnSpc>
-              <a:spcAft>
-                <a:spcPts val="300"/>
+                <a:spcPct val="85000"/>
+              </a:lnSpc>
+              <a:spcBef>
+                <a:spcPts val="200"/>
+              </a:spcBef>
+              <a:spcAft>
+                <a:spcPts val="200"/>
               </a:spcAft>
               <a:defRPr sz="1700"/>
             </a:pPr>
@@ -6655,10 +7002,13 @@
           <a:p>
             <a:pPr lvl="1">
               <a:lnSpc>
-                <a:spcPct val="90000"/>
-              </a:lnSpc>
-              <a:spcAft>
-                <a:spcPts val="300"/>
+                <a:spcPct val="85000"/>
+              </a:lnSpc>
+              <a:spcBef>
+                <a:spcPts val="200"/>
+              </a:spcBef>
+              <a:spcAft>
+                <a:spcPts val="200"/>
               </a:spcAft>
               <a:defRPr sz="1700"/>
             </a:pPr>
@@ -6670,10 +7020,13 @@
           <a:p>
             <a:pPr lvl="1">
               <a:lnSpc>
-                <a:spcPct val="90000"/>
-              </a:lnSpc>
-              <a:spcAft>
-                <a:spcPts val="300"/>
+                <a:spcPct val="85000"/>
+              </a:lnSpc>
+              <a:spcBef>
+                <a:spcPts val="200"/>
+              </a:spcBef>
+              <a:spcAft>
+                <a:spcPts val="200"/>
               </a:spcAft>
               <a:defRPr sz="1700"/>
             </a:pPr>
@@ -6696,10 +7049,13 @@
           <a:p>
             <a:pPr>
               <a:lnSpc>
-                <a:spcPct val="90000"/>
-              </a:lnSpc>
-              <a:spcAft>
-                <a:spcPts val="300"/>
+                <a:spcPct val="85000"/>
+              </a:lnSpc>
+              <a:spcBef>
+                <a:spcPts val="200"/>
+              </a:spcBef>
+              <a:spcAft>
+                <a:spcPts val="200"/>
               </a:spcAft>
               <a:defRPr sz="1900"/>
             </a:pPr>
@@ -6711,10 +7067,13 @@
           <a:p>
             <a:pPr lvl="1">
               <a:lnSpc>
-                <a:spcPct val="90000"/>
-              </a:lnSpc>
-              <a:spcAft>
-                <a:spcPts val="300"/>
+                <a:spcPct val="85000"/>
+              </a:lnSpc>
+              <a:spcBef>
+                <a:spcPts val="200"/>
+              </a:spcBef>
+              <a:spcAft>
+                <a:spcPts val="200"/>
               </a:spcAft>
               <a:defRPr sz="1700"/>
             </a:pPr>
@@ -6726,10 +7085,13 @@
           <a:p>
             <a:pPr lvl="1">
               <a:lnSpc>
-                <a:spcPct val="90000"/>
-              </a:lnSpc>
-              <a:spcAft>
-                <a:spcPts val="300"/>
+                <a:spcPct val="85000"/>
+              </a:lnSpc>
+              <a:spcBef>
+                <a:spcPts val="200"/>
+              </a:spcBef>
+              <a:spcAft>
+                <a:spcPts val="200"/>
               </a:spcAft>
               <a:defRPr sz="1700"/>
             </a:pPr>
@@ -6741,10 +7103,13 @@
           <a:p>
             <a:pPr lvl="1">
               <a:lnSpc>
-                <a:spcPct val="90000"/>
-              </a:lnSpc>
-              <a:spcAft>
-                <a:spcPts val="300"/>
+                <a:spcPct val="85000"/>
+              </a:lnSpc>
+              <a:spcBef>
+                <a:spcPts val="200"/>
+              </a:spcBef>
+              <a:spcAft>
+                <a:spcPts val="200"/>
               </a:spcAft>
               <a:defRPr sz="1700"/>
             </a:pPr>
@@ -6756,10 +7121,13 @@
           <a:p>
             <a:pPr lvl="1">
               <a:lnSpc>
-                <a:spcPct val="90000"/>
-              </a:lnSpc>
-              <a:spcAft>
-                <a:spcPts val="300"/>
+                <a:spcPct val="85000"/>
+              </a:lnSpc>
+              <a:spcBef>
+                <a:spcPts val="200"/>
+              </a:spcBef>
+              <a:spcAft>
+                <a:spcPts val="200"/>
               </a:spcAft>
               <a:defRPr sz="1700"/>
             </a:pPr>
@@ -6771,10 +7139,13 @@
           <a:p>
             <a:pPr lvl="1">
               <a:lnSpc>
-                <a:spcPct val="90000"/>
-              </a:lnSpc>
-              <a:spcAft>
-                <a:spcPts val="300"/>
+                <a:spcPct val="85000"/>
+              </a:lnSpc>
+              <a:spcBef>
+                <a:spcPts val="200"/>
+              </a:spcBef>
+              <a:spcAft>
+                <a:spcPts val="200"/>
               </a:spcAft>
               <a:defRPr sz="1700"/>
             </a:pPr>
@@ -6797,10 +7168,13 @@
           <a:p>
             <a:pPr>
               <a:lnSpc>
-                <a:spcPct val="90000"/>
-              </a:lnSpc>
-              <a:spcAft>
-                <a:spcPts val="300"/>
+                <a:spcPct val="85000"/>
+              </a:lnSpc>
+              <a:spcBef>
+                <a:spcPts val="200"/>
+              </a:spcBef>
+              <a:spcAft>
+                <a:spcPts val="200"/>
               </a:spcAft>
               <a:defRPr sz="1900"/>
             </a:pPr>
@@ -6812,10 +7186,13 @@
           <a:p>
             <a:pPr lvl="1">
               <a:lnSpc>
-                <a:spcPct val="90000"/>
-              </a:lnSpc>
-              <a:spcAft>
-                <a:spcPts val="300"/>
+                <a:spcPct val="85000"/>
+              </a:lnSpc>
+              <a:spcBef>
+                <a:spcPts val="200"/>
+              </a:spcBef>
+              <a:spcAft>
+                <a:spcPts val="200"/>
               </a:spcAft>
               <a:defRPr sz="1700"/>
             </a:pPr>
@@ -6827,10 +7204,13 @@
           <a:p>
             <a:pPr lvl="1">
               <a:lnSpc>
-                <a:spcPct val="90000"/>
-              </a:lnSpc>
-              <a:spcAft>
-                <a:spcPts val="300"/>
+                <a:spcPct val="85000"/>
+              </a:lnSpc>
+              <a:spcBef>
+                <a:spcPts val="200"/>
+              </a:spcBef>
+              <a:spcAft>
+                <a:spcPts val="200"/>
               </a:spcAft>
               <a:defRPr sz="1700"/>
             </a:pPr>
@@ -6842,10 +7222,13 @@
           <a:p>
             <a:pPr lvl="1">
               <a:lnSpc>
-                <a:spcPct val="90000"/>
-              </a:lnSpc>
-              <a:spcAft>
-                <a:spcPts val="300"/>
+                <a:spcPct val="85000"/>
+              </a:lnSpc>
+              <a:spcBef>
+                <a:spcPts val="200"/>
+              </a:spcBef>
+              <a:spcAft>
+                <a:spcPts val="200"/>
               </a:spcAft>
               <a:defRPr sz="1700"/>
             </a:pPr>
@@ -6857,10 +7240,13 @@
           <a:p>
             <a:pPr lvl="1">
               <a:lnSpc>
-                <a:spcPct val="90000"/>
-              </a:lnSpc>
-              <a:spcAft>
-                <a:spcPts val="300"/>
+                <a:spcPct val="85000"/>
+              </a:lnSpc>
+              <a:spcBef>
+                <a:spcPts val="200"/>
+              </a:spcBef>
+              <a:spcAft>
+                <a:spcPts val="200"/>
               </a:spcAft>
               <a:defRPr sz="1700"/>
             </a:pPr>
@@ -6883,10 +7269,13 @@
           <a:p>
             <a:pPr>
               <a:lnSpc>
-                <a:spcPct val="90000"/>
-              </a:lnSpc>
-              <a:spcAft>
-                <a:spcPts val="300"/>
+                <a:spcPct val="85000"/>
+              </a:lnSpc>
+              <a:spcBef>
+                <a:spcPts val="200"/>
+              </a:spcBef>
+              <a:spcAft>
+                <a:spcPts val="200"/>
               </a:spcAft>
               <a:defRPr sz="1900"/>
             </a:pPr>
@@ -6898,10 +7287,13 @@
           <a:p>
             <a:pPr>
               <a:lnSpc>
-                <a:spcPct val="90000"/>
-              </a:lnSpc>
-              <a:spcAft>
-                <a:spcPts val="300"/>
+                <a:spcPct val="85000"/>
+              </a:lnSpc>
+              <a:spcBef>
+                <a:spcPts val="200"/>
+              </a:spcBef>
+              <a:spcAft>
+                <a:spcPts val="200"/>
               </a:spcAft>
               <a:defRPr sz="1900"/>
             </a:pPr>
@@ -6924,10 +7316,13 @@
           <a:p>
             <a:pPr>
               <a:lnSpc>
-                <a:spcPct val="90000"/>
-              </a:lnSpc>
-              <a:spcAft>
-                <a:spcPts val="300"/>
+                <a:spcPct val="85000"/>
+              </a:lnSpc>
+              <a:spcBef>
+                <a:spcPts val="200"/>
+              </a:spcBef>
+              <a:spcAft>
+                <a:spcPts val="200"/>
               </a:spcAft>
               <a:defRPr sz="1900"/>
             </a:pPr>
@@ -6939,10 +7334,13 @@
           <a:p>
             <a:pPr lvl="1">
               <a:lnSpc>
-                <a:spcPct val="90000"/>
-              </a:lnSpc>
-              <a:spcAft>
-                <a:spcPts val="300"/>
+                <a:spcPct val="85000"/>
+              </a:lnSpc>
+              <a:spcBef>
+                <a:spcPts val="200"/>
+              </a:spcBef>
+              <a:spcAft>
+                <a:spcPts val="200"/>
               </a:spcAft>
               <a:defRPr sz="1700"/>
             </a:pPr>
@@ -6954,10 +7352,13 @@
           <a:p>
             <a:pPr lvl="1">
               <a:lnSpc>
-                <a:spcPct val="90000"/>
-              </a:lnSpc>
-              <a:spcAft>
-                <a:spcPts val="300"/>
+                <a:spcPct val="85000"/>
+              </a:lnSpc>
+              <a:spcBef>
+                <a:spcPts val="200"/>
+              </a:spcBef>
+              <a:spcAft>
+                <a:spcPts val="200"/>
               </a:spcAft>
               <a:defRPr sz="1700"/>
             </a:pPr>
@@ -6969,10 +7370,13 @@
           <a:p>
             <a:pPr lvl="1">
               <a:lnSpc>
-                <a:spcPct val="90000"/>
-              </a:lnSpc>
-              <a:spcAft>
-                <a:spcPts val="300"/>
+                <a:spcPct val="85000"/>
+              </a:lnSpc>
+              <a:spcBef>
+                <a:spcPts val="200"/>
+              </a:spcBef>
+              <a:spcAft>
+                <a:spcPts val="200"/>
               </a:spcAft>
               <a:defRPr sz="1700"/>
             </a:pPr>
@@ -7013,10 +7417,19 @@
         </p:nvSpPr>
         <p:spPr/>
         <p:txBody>
-          <a:bodyPr wrap="square"/>
+          <a:bodyPr wrap="square" tIns="25400" bIns="25400" lIns="63500" rIns="63500"/>
           <a:lstStyle/>
           <a:p>
             <a:pPr>
+              <a:lnSpc>
+                <a:spcPct val="85000"/>
+              </a:lnSpc>
+              <a:spcBef>
+                <a:spcPts val="200"/>
+              </a:spcBef>
+              <a:spcAft>
+                <a:spcPts val="200"/>
+              </a:spcAft>
               <a:defRPr sz="3800" b="1">
                 <a:solidFill>
                   <a:srgbClr val="764BA2"/>
@@ -7024,6 +7437,7 @@
               </a:defRPr>
             </a:pPr>
             <a:r>
+              <a:rPr/>
               <a:t>📝 Ünite Özeti</a:t>
             </a:r>
           </a:p>
@@ -7063,7 +7477,7 @@
           <a:noFill/>
         </p:spPr>
         <p:txBody>
-          <a:bodyPr wrap="square">
+          <a:bodyPr wrap="square" tIns="25400" bIns="25400" lIns="63500" rIns="63500">
             <a:spAutoFit/>
           </a:bodyPr>
           <a:lstStyle/>
@@ -7080,10 +7494,13 @@
           <a:p>
             <a:pPr>
               <a:lnSpc>
-                <a:spcPct val="90000"/>
-              </a:lnSpc>
-              <a:spcAft>
-                <a:spcPts val="300"/>
+                <a:spcPct val="85000"/>
+              </a:lnSpc>
+              <a:spcBef>
+                <a:spcPts val="200"/>
+              </a:spcBef>
+              <a:spcAft>
+                <a:spcPts val="200"/>
               </a:spcAft>
               <a:defRPr sz="1900"/>
             </a:pPr>
@@ -7106,10 +7523,13 @@
           <a:p>
             <a:pPr>
               <a:lnSpc>
-                <a:spcPct val="90000"/>
-              </a:lnSpc>
-              <a:spcAft>
-                <a:spcPts val="300"/>
+                <a:spcPct val="85000"/>
+              </a:lnSpc>
+              <a:spcBef>
+                <a:spcPts val="200"/>
+              </a:spcBef>
+              <a:spcAft>
+                <a:spcPts val="200"/>
               </a:spcAft>
               <a:defRPr sz="1900"/>
             </a:pPr>
@@ -7121,10 +7541,13 @@
           <a:p>
             <a:pPr>
               <a:lnSpc>
-                <a:spcPct val="90000"/>
-              </a:lnSpc>
-              <a:spcAft>
-                <a:spcPts val="300"/>
+                <a:spcPct val="85000"/>
+              </a:lnSpc>
+              <a:spcBef>
+                <a:spcPts val="200"/>
+              </a:spcBef>
+              <a:spcAft>
+                <a:spcPts val="200"/>
               </a:spcAft>
               <a:defRPr sz="1900"/>
             </a:pPr>
@@ -7136,10 +7559,13 @@
           <a:p>
             <a:pPr>
               <a:lnSpc>
-                <a:spcPct val="90000"/>
-              </a:lnSpc>
-              <a:spcAft>
-                <a:spcPts val="300"/>
+                <a:spcPct val="85000"/>
+              </a:lnSpc>
+              <a:spcBef>
+                <a:spcPts val="200"/>
+              </a:spcBef>
+              <a:spcAft>
+                <a:spcPts val="200"/>
               </a:spcAft>
               <a:defRPr sz="1900"/>
             </a:pPr>
@@ -7151,10 +7577,13 @@
           <a:p>
             <a:pPr>
               <a:lnSpc>
-                <a:spcPct val="90000"/>
-              </a:lnSpc>
-              <a:spcAft>
-                <a:spcPts val="300"/>
+                <a:spcPct val="85000"/>
+              </a:lnSpc>
+              <a:spcBef>
+                <a:spcPts val="200"/>
+              </a:spcBef>
+              <a:spcAft>
+                <a:spcPts val="200"/>
               </a:spcAft>
               <a:defRPr sz="1900"/>
             </a:pPr>
@@ -7166,10 +7595,13 @@
           <a:p>
             <a:pPr>
               <a:lnSpc>
-                <a:spcPct val="90000"/>
-              </a:lnSpc>
-              <a:spcAft>
-                <a:spcPts val="300"/>
+                <a:spcPct val="85000"/>
+              </a:lnSpc>
+              <a:spcBef>
+                <a:spcPts val="200"/>
+              </a:spcBef>
+              <a:spcAft>
+                <a:spcPts val="200"/>
               </a:spcAft>
               <a:defRPr sz="1900"/>
             </a:pPr>
@@ -7181,10 +7613,13 @@
           <a:p>
             <a:pPr>
               <a:lnSpc>
-                <a:spcPct val="90000"/>
-              </a:lnSpc>
-              <a:spcAft>
-                <a:spcPts val="300"/>
+                <a:spcPct val="85000"/>
+              </a:lnSpc>
+              <a:spcBef>
+                <a:spcPts val="200"/>
+              </a:spcBef>
+              <a:spcAft>
+                <a:spcPts val="200"/>
               </a:spcAft>
               <a:defRPr sz="1900"/>
             </a:pPr>
@@ -7196,10 +7631,13 @@
           <a:p>
             <a:pPr>
               <a:lnSpc>
-                <a:spcPct val="90000"/>
-              </a:lnSpc>
-              <a:spcAft>
-                <a:spcPts val="300"/>
+                <a:spcPct val="85000"/>
+              </a:lnSpc>
+              <a:spcBef>
+                <a:spcPts val="200"/>
+              </a:spcBef>
+              <a:spcAft>
+                <a:spcPts val="200"/>
               </a:spcAft>
               <a:defRPr sz="1900"/>
             </a:pPr>
@@ -7222,10 +7660,13 @@
           <a:p>
             <a:pPr>
               <a:lnSpc>
-                <a:spcPct val="90000"/>
-              </a:lnSpc>
-              <a:spcAft>
-                <a:spcPts val="300"/>
+                <a:spcPct val="85000"/>
+              </a:lnSpc>
+              <a:spcBef>
+                <a:spcPts val="200"/>
+              </a:spcBef>
+              <a:spcAft>
+                <a:spcPts val="200"/>
               </a:spcAft>
               <a:defRPr sz="1900"/>
             </a:pPr>
@@ -7237,10 +7678,13 @@
           <a:p>
             <a:pPr>
               <a:lnSpc>
-                <a:spcPct val="90000"/>
-              </a:lnSpc>
-              <a:spcAft>
-                <a:spcPts val="300"/>
+                <a:spcPct val="85000"/>
+              </a:lnSpc>
+              <a:spcBef>
+                <a:spcPts val="200"/>
+              </a:spcBef>
+              <a:spcAft>
+                <a:spcPts val="200"/>
               </a:spcAft>
               <a:defRPr sz="1900"/>
             </a:pPr>
@@ -7263,10 +7707,13 @@
           <a:p>
             <a:pPr>
               <a:lnSpc>
-                <a:spcPct val="90000"/>
-              </a:lnSpc>
-              <a:spcAft>
-                <a:spcPts val="300"/>
+                <a:spcPct val="85000"/>
+              </a:lnSpc>
+              <a:spcBef>
+                <a:spcPts val="200"/>
+              </a:spcBef>
+              <a:spcAft>
+                <a:spcPts val="200"/>
               </a:spcAft>
               <a:defRPr sz="1900"/>
             </a:pPr>
@@ -7278,10 +7725,13 @@
           <a:p>
             <a:pPr>
               <a:lnSpc>
-                <a:spcPct val="90000"/>
-              </a:lnSpc>
-              <a:spcAft>
-                <a:spcPts val="300"/>
+                <a:spcPct val="85000"/>
+              </a:lnSpc>
+              <a:spcBef>
+                <a:spcPts val="200"/>
+              </a:spcBef>
+              <a:spcAft>
+                <a:spcPts val="200"/>
               </a:spcAft>
               <a:defRPr sz="1900"/>
             </a:pPr>
